--- a/docs/測試排程分析報告.pptx
+++ b/docs/測試排程分析報告.pptx
@@ -16,9 +16,11 @@
     <p:sldId id="264" r:id="rId10"/>
     <p:sldId id="265" r:id="rId11"/>
     <p:sldId id="266" r:id="rId12"/>
+    <p:sldId id="267" r:id="rId13"/>
+    <p:sldId id="268" r:id="rId14"/>
   </p:sldIdLst>
   <p:notesMasterIdLst>
-    <p:notesMasterId r:id="rId13"/>
+    <p:notesMasterId r:id="rId15"/>
   </p:notesMasterIdLst>
   <p:sldSz cx="12192000" cy="6858000"/>
   <p:notesSz cx="6858000" cy="12192000"/>
@@ -600,7 +602,7 @@
           <a:p>
             <a:r>
               <a:rPr lang="en-US" dirty="0"/>
-              <a:t>前兩項是純管理決策，今天就能改；第三項是人力預算；第四項需要 IT 或設備工程投入。</a:t>
+              <a:t>這是模擬產生的 200 批 WIP，結構比照現場：5 種封裝、8 種程式、小中大批 60/30/10。</a:t>
             </a:r>
             <a:endParaRPr lang="en-US" dirty="0"/>
           </a:p>
@@ -688,7 +690,7 @@
           <a:p>
             <a:r>
               <a:rPr lang="en-US" dirty="0"/>
-              <a:t>四個階段刻意分開，避免同時變動多個變數而無法歸因。最大的單一不確定性是換程式是否佔用工程師。</a:t>
+              <a:t>3 人時省改機的等工程師時間是 32 分，其他法則是 5,000~13,000 分；加上當機後，3 人除了省改機全部拖到 36~52 小時。</a:t>
             </a:r>
             <a:endParaRPr lang="en-US" dirty="0"/>
           </a:p>
@@ -712,6 +714,182 @@
             <a:fld id="{F7021451-1387-4CA6-816F-3879F97B5CBC}" type="slidenum">
               <a:rPr lang="en-US"/>
               <a:t>11</a:t>
+            </a:fld>
+            <a:endParaRPr lang="en-US"/>
+          </a:p>
+        </p:txBody>
+      </p:sp>
+    </p:spTree>
+    <p:extLst>
+      <p:ext uri="{BB962C8B-B14F-4D97-AF65-F5344CB8AC3E}">
+        <p14:creationId xmlns:p14="http://schemas.microsoft.com/office/powerpoint/2010/main" val="1024086991"/>
+      </p:ext>
+    </p:extLst>
+  </p:cSld>
+  <p:clrMapOvr>
+    <a:masterClrMapping/>
+  </p:clrMapOvr>
+</p:notes>
+</file>
+
+<file path=ppt/notesSlides/notesSlide12.xml><?xml version="1.0" encoding="utf-8"?>
+<p:notes xmlns:a="http://schemas.openxmlformats.org/drawingml/2006/main" xmlns:r="http://schemas.openxmlformats.org/officeDocument/2006/relationships" xmlns:p="http://schemas.openxmlformats.org/presentationml/2006/main">
+  <p:cSld>
+    <p:spTree>
+      <p:nvGrpSpPr>
+        <p:cNvPr id="1" name=""/>
+        <p:cNvGrpSpPr/>
+        <p:nvPr/>
+      </p:nvGrpSpPr>
+      <p:grpSpPr>
+        <a:xfrm>
+          <a:off x="0" y="0"/>
+          <a:ext cx="0" cy="0"/>
+          <a:chOff x="0" y="0"/>
+          <a:chExt cx="0" cy="0"/>
+        </a:xfrm>
+      </p:grpSpPr>
+      <p:sp>
+        <p:nvSpPr>
+          <p:cNvPr id="2" name="Slide Image Placeholder 1"/>
+          <p:cNvSpPr>
+            <a:spLocks noGrp="1" noRot="1" noChangeAspect="1"/>
+          </p:cNvSpPr>
+          <p:nvPr>
+            <p:ph type="sldImg"/>
+          </p:nvPr>
+        </p:nvSpPr>
+        <p:spPr/>
+      </p:sp>
+      <p:sp>
+        <p:nvSpPr>
+          <p:cNvPr id="3" name="Notes Placeholder 2"/>
+          <p:cNvSpPr>
+            <a:spLocks noGrp="1"/>
+          </p:cNvSpPr>
+          <p:nvPr>
+            <p:ph type="body" idx="1"/>
+          </p:nvPr>
+        </p:nvSpPr>
+        <p:spPr/>
+        <p:txBody>
+          <a:bodyPr/>
+          <a:lstStyle/>
+          <a:p>
+            <a:r>
+              <a:rPr lang="en-US" dirty="0"/>
+              <a:t>前兩項是純管理決策，今天就能改；第三項是人力預算；第四項需要 IT 或設備工程投入。</a:t>
+            </a:r>
+            <a:endParaRPr lang="en-US" dirty="0"/>
+          </a:p>
+        </p:txBody>
+      </p:sp>
+      <p:sp>
+        <p:nvSpPr>
+          <p:cNvPr id="4" name="Slide Number Placeholder 3"/>
+          <p:cNvSpPr>
+            <a:spLocks noGrp="1"/>
+          </p:cNvSpPr>
+          <p:nvPr>
+            <p:ph type="sldNum" sz="quarter" idx="10"/>
+          </p:nvPr>
+        </p:nvSpPr>
+        <p:spPr/>
+        <p:txBody>
+          <a:bodyPr/>
+          <a:lstStyle/>
+          <a:p>
+            <a:fld id="{F7021451-1387-4CA6-816F-3879F97B5CBC}" type="slidenum">
+              <a:rPr lang="en-US"/>
+              <a:t>12</a:t>
+            </a:fld>
+            <a:endParaRPr lang="en-US"/>
+          </a:p>
+        </p:txBody>
+      </p:sp>
+    </p:spTree>
+    <p:extLst>
+      <p:ext uri="{BB962C8B-B14F-4D97-AF65-F5344CB8AC3E}">
+        <p14:creationId xmlns:p14="http://schemas.microsoft.com/office/powerpoint/2010/main" val="1024086991"/>
+      </p:ext>
+    </p:extLst>
+  </p:cSld>
+  <p:clrMapOvr>
+    <a:masterClrMapping/>
+  </p:clrMapOvr>
+</p:notes>
+</file>
+
+<file path=ppt/notesSlides/notesSlide13.xml><?xml version="1.0" encoding="utf-8"?>
+<p:notes xmlns:a="http://schemas.openxmlformats.org/drawingml/2006/main" xmlns:r="http://schemas.openxmlformats.org/officeDocument/2006/relationships" xmlns:p="http://schemas.openxmlformats.org/presentationml/2006/main">
+  <p:cSld>
+    <p:spTree>
+      <p:nvGrpSpPr>
+        <p:cNvPr id="1" name=""/>
+        <p:cNvGrpSpPr/>
+        <p:nvPr/>
+      </p:nvGrpSpPr>
+      <p:grpSpPr>
+        <a:xfrm>
+          <a:off x="0" y="0"/>
+          <a:ext cx="0" cy="0"/>
+          <a:chOff x="0" y="0"/>
+          <a:chExt cx="0" cy="0"/>
+        </a:xfrm>
+      </p:grpSpPr>
+      <p:sp>
+        <p:nvSpPr>
+          <p:cNvPr id="2" name="Slide Image Placeholder 1"/>
+          <p:cNvSpPr>
+            <a:spLocks noGrp="1" noRot="1" noChangeAspect="1"/>
+          </p:cNvSpPr>
+          <p:nvPr>
+            <p:ph type="sldImg"/>
+          </p:nvPr>
+        </p:nvSpPr>
+        <p:spPr/>
+      </p:sp>
+      <p:sp>
+        <p:nvSpPr>
+          <p:cNvPr id="3" name="Notes Placeholder 2"/>
+          <p:cNvSpPr>
+            <a:spLocks noGrp="1"/>
+          </p:cNvSpPr>
+          <p:nvPr>
+            <p:ph type="body" idx="1"/>
+          </p:nvPr>
+        </p:nvSpPr>
+        <p:spPr/>
+        <p:txBody>
+          <a:bodyPr/>
+          <a:lstStyle/>
+          <a:p>
+            <a:r>
+              <a:rPr lang="en-US" dirty="0"/>
+              <a:t>四個階段刻意分開，避免同時變動多個變數而無法歸因。最大的單一不確定性是換程式是否佔用工程師。</a:t>
+            </a:r>
+            <a:endParaRPr lang="en-US" dirty="0"/>
+          </a:p>
+        </p:txBody>
+      </p:sp>
+      <p:sp>
+        <p:nvSpPr>
+          <p:cNvPr id="4" name="Slide Number Placeholder 3"/>
+          <p:cNvSpPr>
+            <a:spLocks noGrp="1"/>
+          </p:cNvSpPr>
+          <p:nvPr>
+            <p:ph type="sldNum" sz="quarter" idx="10"/>
+          </p:nvPr>
+        </p:nvSpPr>
+        <p:spPr/>
+        <p:txBody>
+          <a:bodyPr/>
+          <a:lstStyle/>
+          <a:p>
+            <a:fld id="{F7021451-1387-4CA6-816F-3879F97B5CBC}" type="slidenum">
+              <a:rPr lang="en-US"/>
+              <a:t>13</a:t>
             </a:fld>
             <a:endParaRPr lang="en-US"/>
           </a:p>
@@ -1955,13 +2133,6 @@
 <file path=ppt/slides/slide10.xml><?xml version="1.0" encoding="utf-8"?>
 <p:sld xmlns:a="http://schemas.openxmlformats.org/drawingml/2006/main" xmlns:r="http://schemas.openxmlformats.org/officeDocument/2006/relationships" xmlns:p="http://schemas.openxmlformats.org/presentationml/2006/main">
   <p:cSld name="Slide 10">
-    <p:bg>
-      <p:bgPr>
-        <a:solidFill>
-          <a:srgbClr val="0E1A3C"/>
-        </a:solidFill>
-      </p:bgPr>
-    </p:bg>
     <p:spTree>
       <p:nvGrpSpPr>
         <p:cNvPr id="1" name=""/>
@@ -2042,13 +2213,13 @@
             <a:r>
               <a:rPr lang="en-US" sz="3000" b="1" dirty="0">
                 <a:solidFill>
-                  <a:srgbClr val="FFFFFF"/>
+                  <a:srgbClr val="1E2761"/>
                 </a:solidFill>
                 <a:latin typeface="Cambria" pitchFamily="34" charset="0"/>
                 <a:ea typeface="Cambria" pitchFamily="34" charset="-122"/>
                 <a:cs typeface="Cambria" pitchFamily="34" charset="-120"/>
               </a:rPr>
-              <a:t>專業建議</a:t>
+              <a:t>實測案例：清空 200 批 WIP 要多久</a:t>
             </a:r>
             <a:endParaRPr lang="en-US" sz="3000" dirty="0"/>
           </a:p>
@@ -2063,7 +2234,7 @@
         <p:spPr>
           <a:xfrm>
             <a:off x="1143000" y="896112"/>
-            <a:ext cx="10424160" cy="365760"/>
+            <a:ext cx="10424160" cy="384048"/>
           </a:xfrm>
           <a:prstGeom prst="rect">
             <a:avLst/>
@@ -2081,40 +2252,88 @@
             <a:r>
               <a:rPr lang="en-US" sz="1350" dirty="0">
                 <a:solidFill>
-                  <a:srgbClr val="CADCFC"/>
-                </a:solidFill>
-                <a:latin typeface="Calibri" pitchFamily="34" charset="0"/>
-                <a:ea typeface="Calibri" pitchFamily="34" charset="-122"/>
-                <a:cs typeface="Calibri" pitchFamily="34" charset="-120"/>
-              </a:rPr>
-              <a:t>依「投入成本 → 效益」排序，前兩項不需任何資本支出</a:t>
+                  <a:srgbClr val="5A6785"/>
+                </a:solidFill>
+                <a:latin typeface="Calibri" pitchFamily="34" charset="0"/>
+                <a:ea typeface="Calibri" pitchFamily="34" charset="-122"/>
+                <a:cs typeface="Calibri" pitchFamily="34" charset="-120"/>
+              </a:rPr>
+              <a:t>把待測清單直接餵進模型，跑到最後一批做完為止——問的不再是「一天做多少」，而是「這堆貨要多久清光」</a:t>
             </a:r>
             <a:endParaRPr lang="en-US" sz="1350" dirty="0"/>
           </a:p>
         </p:txBody>
       </p:sp>
-      <p:sp>
-        <p:nvSpPr>
-          <p:cNvPr id="5" name="Shape 3"/>
+      <p:pic>
+        <p:nvPicPr>
+          <p:cNvPr id="5" name="Image 0" descr="charts/c_clear.png">    </p:cNvPr>
+          <p:cNvPicPr>
+            <a:picLocks noChangeAspect="1"/>
+          </p:cNvPicPr>
+          <p:nvPr/>
+        </p:nvPicPr>
+        <p:blipFill>
+          <a:blip r:embed="rId1"/>
+          <a:stretch>
+            <a:fillRect/>
+          </a:stretch>
+        </p:blipFill>
+        <p:spPr>
+          <a:xfrm>
+            <a:off x="566928" y="1371600"/>
+            <a:ext cx="6858000" cy="2500091"/>
+          </a:xfrm>
+          <a:prstGeom prst="rect">
+            <a:avLst/>
+          </a:prstGeom>
+        </p:spPr>
+      </p:pic>
+      <p:pic>
+        <p:nvPicPr>
+          <p:cNvPr id="6" name="Image 1" descr="charts/c_curve.png">    </p:cNvPr>
+          <p:cNvPicPr>
+            <a:picLocks noChangeAspect="1"/>
+          </p:cNvPicPr>
+          <p:nvPr/>
+        </p:nvPicPr>
+        <p:blipFill>
+          <a:blip r:embed="rId2"/>
+          <a:stretch>
+            <a:fillRect/>
+          </a:stretch>
+        </p:blipFill>
+        <p:spPr>
+          <a:xfrm>
+            <a:off x="7562088" y="1371600"/>
+            <a:ext cx="4059936" cy="2702480"/>
+          </a:xfrm>
+          <a:prstGeom prst="rect">
+            <a:avLst/>
+          </a:prstGeom>
+        </p:spPr>
+      </p:pic>
+      <p:sp>
+        <p:nvSpPr>
+          <p:cNvPr id="7" name="Shape 3"/>
           <p:cNvSpPr/>
           <p:nvPr/>
         </p:nvSpPr>
         <p:spPr>
           <a:xfrm>
-            <a:off x="566928" y="1417320"/>
-            <a:ext cx="11018520" cy="1051560"/>
+            <a:off x="566928" y="4206240"/>
+            <a:ext cx="5486400" cy="1828800"/>
           </a:xfrm>
           <a:prstGeom prst="roundRect">
             <a:avLst>
-              <a:gd name="adj" fmla="val 4348"/>
+              <a:gd name="adj" fmla="val 2500"/>
             </a:avLst>
           </a:prstGeom>
           <a:solidFill>
-            <a:srgbClr val="17254C"/>
+            <a:srgbClr val="F5F7FB"/>
           </a:solidFill>
           <a:ln w="12700">
             <a:solidFill>
-              <a:srgbClr val="17254C"/>
+              <a:srgbClr val="FFFFFF"/>
             </a:solidFill>
             <a:prstDash val="solid"/>
           </a:ln>
@@ -2122,24 +2341,24 @@
       </p:sp>
       <p:sp>
         <p:nvSpPr>
-          <p:cNvPr id="6" name="Shape 4"/>
+          <p:cNvPr id="8" name="Shape 4"/>
           <p:cNvSpPr/>
           <p:nvPr/>
         </p:nvSpPr>
         <p:spPr>
           <a:xfrm>
-            <a:off x="841248" y="1728216"/>
-            <a:ext cx="429768" cy="429768"/>
+            <a:off x="804672" y="4462272"/>
+            <a:ext cx="146304" cy="146304"/>
           </a:xfrm>
           <a:prstGeom prst="ellipse">
             <a:avLst/>
           </a:prstGeom>
           <a:solidFill>
-            <a:srgbClr val="0F7B6C"/>
+            <a:srgbClr val="1E2761"/>
           </a:solidFill>
           <a:ln w="12700">
             <a:solidFill>
-              <a:srgbClr val="0F7B6C"/>
+              <a:srgbClr val="1E2761"/>
             </a:solidFill>
             <a:prstDash val="solid"/>
           </a:ln>
@@ -2147,53 +2366,14 @@
       </p:sp>
       <p:sp>
         <p:nvSpPr>
-          <p:cNvPr id="7" name="Text 5"/>
-          <p:cNvSpPr txBox="1"/>
-          <p:nvPr/>
-        </p:nvSpPr>
-        <p:spPr>
-          <a:xfrm>
-            <a:off x="841248" y="1764792"/>
-            <a:ext cx="429768" cy="365760"/>
-          </a:xfrm>
-          <a:prstGeom prst="rect">
-            <a:avLst/>
-          </a:prstGeom>
-          <a:noFill/>
-          <a:ln/>
-        </p:spPr>
-        <p:txBody>
-          <a:bodyPr wrap="square" lIns="0" tIns="0" rIns="0" bIns="0" rtlCol="0" anchor="ctr"/>
-          <a:lstStyle/>
-          <a:p>
-            <a:pPr algn="ctr" indent="0" marL="0">
-              <a:buNone/>
-            </a:pPr>
-            <a:r>
-              <a:rPr lang="en-US" sz="1600" b="1" dirty="0">
-                <a:solidFill>
-                  <a:srgbClr val="FFFFFF"/>
-                </a:solidFill>
-                <a:latin typeface="Calibri" pitchFamily="34" charset="0"/>
-                <a:ea typeface="Calibri" pitchFamily="34" charset="-122"/>
-                <a:cs typeface="Calibri" pitchFamily="34" charset="-120"/>
-              </a:rPr>
-              <a:t>1</a:t>
-            </a:r>
-            <a:endParaRPr lang="en-US" sz="1600" dirty="0"/>
-          </a:p>
-        </p:txBody>
-      </p:sp>
-      <p:sp>
-        <p:nvSpPr>
-          <p:cNvPr id="8" name="Text 6"/>
-          <p:cNvSpPr txBox="1"/>
-          <p:nvPr/>
-        </p:nvSpPr>
-        <p:spPr>
-          <a:xfrm>
-            <a:off x="1481328" y="1600200"/>
-            <a:ext cx="6583680" cy="365760"/>
+          <p:cNvPr id="9" name="Text 5"/>
+          <p:cNvSpPr txBox="1"/>
+          <p:nvPr/>
+        </p:nvSpPr>
+        <p:spPr>
+          <a:xfrm>
+            <a:off x="1060704" y="4361688"/>
+            <a:ext cx="4754880" cy="329184"/>
           </a:xfrm>
           <a:prstGeom prst="rect">
             <a:avLst/>
@@ -2209,30 +2389,30 @@
               <a:buNone/>
             </a:pPr>
             <a:r>
-              <a:rPr lang="en-US" sz="1700" b="1" dirty="0">
-                <a:solidFill>
-                  <a:srgbClr val="FFFFFF"/>
-                </a:solidFill>
-                <a:latin typeface="Calibri" pitchFamily="34" charset="0"/>
-                <a:ea typeface="Calibri" pitchFamily="34" charset="-122"/>
-                <a:cs typeface="Calibri" pitchFamily="34" charset="-120"/>
-              </a:rPr>
-              <a:t>排程法則改為「省改機優先」</a:t>
-            </a:r>
-            <a:endParaRPr lang="en-US" sz="1700" dirty="0"/>
-          </a:p>
-        </p:txBody>
-      </p:sp>
-      <p:sp>
-        <p:nvSpPr>
-          <p:cNvPr id="9" name="Text 7"/>
-          <p:cNvSpPr txBox="1"/>
-          <p:nvPr/>
-        </p:nvSpPr>
-        <p:spPr>
-          <a:xfrm>
-            <a:off x="1481328" y="1984248"/>
-            <a:ext cx="6583680" cy="347472"/>
+              <a:rPr lang="en-US" sz="1450" b="1" dirty="0">
+                <a:solidFill>
+                  <a:srgbClr val="1E2761"/>
+                </a:solidFill>
+                <a:latin typeface="Calibri" pitchFamily="34" charset="0"/>
+                <a:ea typeface="Calibri" pitchFamily="34" charset="-122"/>
+                <a:cs typeface="Calibri" pitchFamily="34" charset="-120"/>
+              </a:rPr>
+              <a:t>這批貨的基本盤</a:t>
+            </a:r>
+            <a:endParaRPr lang="en-US" sz="1450" dirty="0"/>
+          </a:p>
+        </p:txBody>
+      </p:sp>
+      <p:sp>
+        <p:nvSpPr>
+          <p:cNvPr id="10" name="Text 6"/>
+          <p:cNvSpPr txBox="1"/>
+          <p:nvPr/>
+        </p:nvSpPr>
+        <p:spPr>
+          <a:xfrm>
+            <a:off x="1060704" y="4718304"/>
+            <a:ext cx="4754880" cy="1225296"/>
           </a:xfrm>
           <a:prstGeom prst="rect">
             <a:avLst/>
@@ -2244,85 +2424,125 @@
           <a:bodyPr wrap="square" lIns="0" tIns="0" rIns="0" bIns="0" rtlCol="0" anchor="ctr"/>
           <a:lstStyle/>
           <a:p>
-            <a:pPr indent="0" marL="0">
-              <a:buNone/>
-            </a:pPr>
-            <a:r>
-              <a:rPr lang="en-US" sz="1250" dirty="0">
-                <a:solidFill>
-                  <a:srgbClr val="A9BBDD"/>
-                </a:solidFill>
-                <a:latin typeface="Calibri" pitchFamily="34" charset="0"/>
-                <a:ea typeface="Calibri" pitchFamily="34" charset="-122"/>
-                <a:cs typeface="Calibri" pitchFamily="34" charset="-120"/>
-              </a:rPr>
-              <a:t>同機種串著跑，工程師被釋放後全廠少等</a:t>
-            </a:r>
-            <a:endParaRPr lang="en-US" sz="1250" dirty="0"/>
-          </a:p>
-        </p:txBody>
-      </p:sp>
-      <p:sp>
-        <p:nvSpPr>
-          <p:cNvPr id="10" name="Text 8"/>
-          <p:cNvSpPr txBox="1"/>
-          <p:nvPr/>
-        </p:nvSpPr>
-        <p:spPr>
-          <a:xfrm>
-            <a:off x="8321040" y="1728216"/>
-            <a:ext cx="3063240" cy="457200"/>
-          </a:xfrm>
-          <a:prstGeom prst="rect">
-            <a:avLst/>
-          </a:prstGeom>
-          <a:noFill/>
-          <a:ln/>
-        </p:spPr>
-        <p:txBody>
-          <a:bodyPr wrap="square" lIns="0" tIns="0" rIns="0" bIns="0" rtlCol="0" anchor="ctr"/>
-          <a:lstStyle/>
-          <a:p>
-            <a:pPr algn="r" indent="0" marL="0">
-              <a:buNone/>
-            </a:pPr>
-            <a:r>
-              <a:rPr lang="en-US" sz="1900" b="1" dirty="0">
-                <a:solidFill>
-                  <a:srgbClr val="0F7B6C"/>
-                </a:solidFill>
-                <a:latin typeface="Cambria" pitchFamily="34" charset="0"/>
-                <a:ea typeface="Cambria" pitchFamily="34" charset="-122"/>
-                <a:cs typeface="Cambria" pitchFamily="34" charset="-120"/>
-              </a:rPr>
-              <a:t>+41 萬顆／日</a:t>
-            </a:r>
-            <a:endParaRPr lang="en-US" sz="1900" dirty="0"/>
-          </a:p>
-        </p:txBody>
-      </p:sp>
-      <p:sp>
-        <p:nvSpPr>
-          <p:cNvPr id="11" name="Shape 9"/>
+            <a:pPr marL="342900" indent="-342900">
+              <a:lnSpc>
+                <a:spcPts val="1800"/>
+              </a:lnSpc>
+              <a:spcAft>
+                <a:spcPts val="400"/>
+              </a:spcAft>
+              <a:buSzPct val="100000"/>
+              <a:buChar char="•"/>
+            </a:pPr>
+            <a:r>
+              <a:rPr lang="en-US" sz="1200" dirty="0">
+                <a:solidFill>
+                  <a:srgbClr val="16213E"/>
+                </a:solidFill>
+                <a:latin typeface="Calibri" pitchFamily="34" charset="0"/>
+                <a:ea typeface="Calibri" pitchFamily="34" charset="-122"/>
+                <a:cs typeface="Calibri" pitchFamily="34" charset="-120"/>
+              </a:rPr>
+              <a:t>200 批・66.2 萬顆・25 台機（機隊 100 site）</a:t>
+            </a:r>
+            <a:endParaRPr lang="en-US" sz="1200" dirty="0"/>
+          </a:p>
+          <a:p>
+            <a:pPr marL="342900" indent="-342900">
+              <a:lnSpc>
+                <a:spcPts val="1800"/>
+              </a:lnSpc>
+              <a:spcAft>
+                <a:spcPts val="400"/>
+              </a:spcAft>
+              <a:buSzPct val="100000"/>
+              <a:buChar char="•"/>
+            </a:pPr>
+            <a:r>
+              <a:rPr lang="en-US" sz="1200" dirty="0">
+                <a:solidFill>
+                  <a:srgbClr val="16213E"/>
+                </a:solidFill>
+                <a:latin typeface="Calibri" pitchFamily="34" charset="0"/>
+                <a:ea typeface="Calibri" pitchFamily="34" charset="-122"/>
+                <a:cs typeface="Calibri" pitchFamily="34" charset="-120"/>
+              </a:rPr>
+              <a:t>理論最短 4 小時 01 分（零改機零當機）</a:t>
+            </a:r>
+            <a:endParaRPr lang="en-US" sz="1200" dirty="0"/>
+          </a:p>
+          <a:p>
+            <a:pPr marL="342900" indent="-342900">
+              <a:lnSpc>
+                <a:spcPts val="1800"/>
+              </a:lnSpc>
+              <a:spcAft>
+                <a:spcPts val="400"/>
+              </a:spcAft>
+              <a:buSzPct val="100000"/>
+              <a:buChar char="•"/>
+            </a:pPr>
+            <a:r>
+              <a:rPr lang="en-US" sz="1200" dirty="0">
+                <a:solidFill>
+                  <a:srgbClr val="16213E"/>
+                </a:solidFill>
+                <a:latin typeface="Calibri" pitchFamily="34" charset="0"/>
+                <a:ea typeface="Calibri" pitchFamily="34" charset="-122"/>
+                <a:cs typeface="Calibri" pitchFamily="34" charset="-120"/>
+              </a:rPr>
+              <a:t>最快的法則 9 小時 41 分，仍比下限多 142%</a:t>
+            </a:r>
+            <a:endParaRPr lang="en-US" sz="1200" dirty="0"/>
+          </a:p>
+          <a:p>
+            <a:pPr marL="342900" indent="-342900">
+              <a:lnSpc>
+                <a:spcPts val="1800"/>
+              </a:lnSpc>
+              <a:spcAft>
+                <a:spcPts val="400"/>
+              </a:spcAft>
+              <a:buSzPct val="100000"/>
+              <a:buChar char="•"/>
+            </a:pPr>
+            <a:r>
+              <a:rPr lang="en-US" sz="1200" dirty="0">
+                <a:solidFill>
+                  <a:srgbClr val="16213E"/>
+                </a:solidFill>
+                <a:latin typeface="Calibri" pitchFamily="34" charset="0"/>
+                <a:ea typeface="Calibri" pitchFamily="34" charset="-122"/>
+                <a:cs typeface="Calibri" pitchFamily="34" charset="-120"/>
+              </a:rPr>
+              <a:t>最快與最慢差 10 小時 20 分</a:t>
+            </a:r>
+            <a:endParaRPr lang="en-US" sz="1200" dirty="0"/>
+          </a:p>
+        </p:txBody>
+      </p:sp>
+      <p:sp>
+        <p:nvSpPr>
+          <p:cNvPr id="11" name="Shape 7"/>
           <p:cNvSpPr/>
           <p:nvPr/>
         </p:nvSpPr>
         <p:spPr>
           <a:xfrm>
-            <a:off x="566928" y="2587752"/>
-            <a:ext cx="11018520" cy="1051560"/>
+            <a:off x="6172200" y="4206240"/>
+            <a:ext cx="5413248" cy="1828800"/>
           </a:xfrm>
           <a:prstGeom prst="roundRect">
             <a:avLst>
-              <a:gd name="adj" fmla="val 4348"/>
+              <a:gd name="adj" fmla="val 2500"/>
             </a:avLst>
           </a:prstGeom>
           <a:solidFill>
-            <a:srgbClr val="17254C"/>
+            <a:srgbClr val="F5F7FB"/>
           </a:solidFill>
           <a:ln w="12700">
             <a:solidFill>
-              <a:srgbClr val="17254C"/>
+              <a:srgbClr val="FFFFFF"/>
             </a:solidFill>
             <a:prstDash val="solid"/>
           </a:ln>
@@ -2330,24 +2550,24 @@
       </p:sp>
       <p:sp>
         <p:nvSpPr>
-          <p:cNvPr id="12" name="Shape 10"/>
+          <p:cNvPr id="12" name="Shape 8"/>
           <p:cNvSpPr/>
           <p:nvPr/>
         </p:nvSpPr>
         <p:spPr>
           <a:xfrm>
-            <a:off x="841248" y="2898648"/>
-            <a:ext cx="429768" cy="429768"/>
+            <a:off x="6409944" y="4462272"/>
+            <a:ext cx="146304" cy="146304"/>
           </a:xfrm>
           <a:prstGeom prst="ellipse">
             <a:avLst/>
           </a:prstGeom>
           <a:solidFill>
-            <a:srgbClr val="0F7B6C"/>
+            <a:srgbClr val="C2410C"/>
           </a:solidFill>
           <a:ln w="12700">
             <a:solidFill>
-              <a:srgbClr val="0F7B6C"/>
+              <a:srgbClr val="C2410C"/>
             </a:solidFill>
             <a:prstDash val="solid"/>
           </a:ln>
@@ -2355,53 +2575,14 @@
       </p:sp>
       <p:sp>
         <p:nvSpPr>
-          <p:cNvPr id="13" name="Text 11"/>
-          <p:cNvSpPr txBox="1"/>
-          <p:nvPr/>
-        </p:nvSpPr>
-        <p:spPr>
-          <a:xfrm>
-            <a:off x="841248" y="2935224"/>
-            <a:ext cx="429768" cy="365760"/>
-          </a:xfrm>
-          <a:prstGeom prst="rect">
-            <a:avLst/>
-          </a:prstGeom>
-          <a:noFill/>
-          <a:ln/>
-        </p:spPr>
-        <p:txBody>
-          <a:bodyPr wrap="square" lIns="0" tIns="0" rIns="0" bIns="0" rtlCol="0" anchor="ctr"/>
-          <a:lstStyle/>
-          <a:p>
-            <a:pPr algn="ctr" indent="0" marL="0">
-              <a:buNone/>
-            </a:pPr>
-            <a:r>
-              <a:rPr lang="en-US" sz="1600" b="1" dirty="0">
-                <a:solidFill>
-                  <a:srgbClr val="FFFFFF"/>
-                </a:solidFill>
-                <a:latin typeface="Calibri" pitchFamily="34" charset="0"/>
-                <a:ea typeface="Calibri" pitchFamily="34" charset="-122"/>
-                <a:cs typeface="Calibri" pitchFamily="34" charset="-120"/>
-              </a:rPr>
-              <a:t>2</a:t>
-            </a:r>
-            <a:endParaRPr lang="en-US" sz="1600" dirty="0"/>
-          </a:p>
-        </p:txBody>
-      </p:sp>
-      <p:sp>
-        <p:nvSpPr>
-          <p:cNvPr id="14" name="Text 12"/>
-          <p:cNvSpPr txBox="1"/>
-          <p:nvPr/>
-        </p:nvSpPr>
-        <p:spPr>
-          <a:xfrm>
-            <a:off x="1481328" y="2770632"/>
-            <a:ext cx="6583680" cy="365760"/>
+          <p:cNvPr id="13" name="Text 9"/>
+          <p:cNvSpPr txBox="1"/>
+          <p:nvPr/>
+        </p:nvSpPr>
+        <p:spPr>
+          <a:xfrm>
+            <a:off x="6665976" y="4361688"/>
+            <a:ext cx="4681728" cy="329184"/>
           </a:xfrm>
           <a:prstGeom prst="rect">
             <a:avLst/>
@@ -2417,30 +2598,30 @@
               <a:buNone/>
             </a:pPr>
             <a:r>
-              <a:rPr lang="en-US" sz="1700" b="1" dirty="0">
-                <a:solidFill>
-                  <a:srgbClr val="FFFFFF"/>
-                </a:solidFill>
-                <a:latin typeface="Calibri" pitchFamily="34" charset="0"/>
-                <a:ea typeface="Calibri" pitchFamily="34" charset="-122"/>
-                <a:cs typeface="Calibri" pitchFamily="34" charset="-120"/>
-              </a:rPr>
-              <a:t>派工單不提前開，做完當下才決定</a:t>
-            </a:r>
-            <a:endParaRPr lang="en-US" sz="1700" dirty="0"/>
-          </a:p>
-        </p:txBody>
-      </p:sp>
-      <p:sp>
-        <p:nvSpPr>
-          <p:cNvPr id="15" name="Text 13"/>
-          <p:cNvSpPr txBox="1"/>
-          <p:nvPr/>
-        </p:nvSpPr>
-        <p:spPr>
-          <a:xfrm>
-            <a:off x="1481328" y="3154680"/>
-            <a:ext cx="6583680" cy="347472"/>
+              <a:rPr lang="en-US" sz="1450" b="1" dirty="0">
+                <a:solidFill>
+                  <a:srgbClr val="1E2761"/>
+                </a:solidFill>
+                <a:latin typeface="Calibri" pitchFamily="34" charset="0"/>
+                <a:ea typeface="Calibri" pitchFamily="34" charset="-122"/>
+                <a:cs typeface="Calibri" pitchFamily="34" charset="-120"/>
+              </a:rPr>
+              <a:t>完成曲線看得出尾巴</a:t>
+            </a:r>
+            <a:endParaRPr lang="en-US" sz="1450" dirty="0"/>
+          </a:p>
+        </p:txBody>
+      </p:sp>
+      <p:sp>
+        <p:nvSpPr>
+          <p:cNvPr id="14" name="Text 10"/>
+          <p:cNvSpPr txBox="1"/>
+          <p:nvPr/>
+        </p:nvSpPr>
+        <p:spPr>
+          <a:xfrm>
+            <a:off x="6665976" y="4718304"/>
+            <a:ext cx="4681728" cy="1225296"/>
           </a:xfrm>
           <a:prstGeom prst="rect">
             <a:avLst/>
@@ -2450,517 +2631,141 @@
         </p:spPr>
         <p:txBody>
           <a:bodyPr wrap="square" lIns="0" tIns="0" rIns="0" bIns="0" rtlCol="0" anchor="ctr"/>
+          <a:lstStyle/>
+          <a:p>
+            <a:pPr marL="342900" indent="-342900">
+              <a:lnSpc>
+                <a:spcPts val="1800"/>
+              </a:lnSpc>
+              <a:spcAft>
+                <a:spcPts val="400"/>
+              </a:spcAft>
+              <a:buSzPct val="100000"/>
+              <a:buChar char="•"/>
+            </a:pPr>
+            <a:r>
+              <a:rPr lang="en-US" sz="1200" dirty="0">
+                <a:solidFill>
+                  <a:srgbClr val="16213E"/>
+                </a:solidFill>
+                <a:latin typeface="Calibri" pitchFamily="34" charset="0"/>
+                <a:ea typeface="Calibri" pitchFamily="34" charset="-122"/>
+                <a:cs typeface="Calibri" pitchFamily="34" charset="-120"/>
+              </a:rPr>
+              <a:t>省改機前 3 小時就做完 137 批，遙遙領先</a:t>
+            </a:r>
+            <a:endParaRPr lang="en-US" sz="1200" dirty="0"/>
+          </a:p>
+          <a:p>
+            <a:pPr marL="342900" indent="-342900">
+              <a:lnSpc>
+                <a:spcPts val="1800"/>
+              </a:lnSpc>
+              <a:spcAft>
+                <a:spcPts val="400"/>
+              </a:spcAft>
+              <a:buSzPct val="100000"/>
+              <a:buChar char="•"/>
+            </a:pPr>
+            <a:r>
+              <a:rPr lang="en-US" sz="1200" dirty="0">
+                <a:solidFill>
+                  <a:srgbClr val="16213E"/>
+                </a:solidFill>
+                <a:latin typeface="Calibri" pitchFamily="34" charset="0"/>
+                <a:ea typeface="Calibri" pitchFamily="34" charset="-122"/>
+                <a:cs typeface="Calibri" pitchFamily="34" charset="-120"/>
+              </a:rPr>
+              <a:t>但 9 小時後停在 198 批，最後 2 批拖到 14.5 小時</a:t>
+            </a:r>
+            <a:endParaRPr lang="en-US" sz="1200" dirty="0"/>
+          </a:p>
+          <a:p>
+            <a:pPr marL="342900" indent="-342900">
+              <a:lnSpc>
+                <a:spcPts val="1800"/>
+              </a:lnSpc>
+              <a:spcAft>
+                <a:spcPts val="400"/>
+              </a:spcAft>
+              <a:buSzPct val="100000"/>
+              <a:buChar char="•"/>
+            </a:pPr>
+            <a:r>
+              <a:rPr lang="en-US" sz="1200" dirty="0">
+                <a:solidFill>
+                  <a:srgbClr val="16213E"/>
+                </a:solidFill>
+                <a:latin typeface="Calibri" pitchFamily="34" charset="0"/>
+                <a:ea typeface="Calibri" pitchFamily="34" charset="-122"/>
+                <a:cs typeface="Calibri" pitchFamily="34" charset="-120"/>
+              </a:rPr>
+              <a:t>大批給快機起步慢，10 小時整批清光</a:t>
+            </a:r>
+            <a:endParaRPr lang="en-US" sz="1200" dirty="0"/>
+          </a:p>
+          <a:p>
+            <a:pPr marL="342900" indent="-342900">
+              <a:lnSpc>
+                <a:spcPts val="1800"/>
+              </a:lnSpc>
+              <a:spcAft>
+                <a:spcPts val="400"/>
+              </a:spcAft>
+              <a:buSzPct val="100000"/>
+              <a:buChar char="•"/>
+            </a:pPr>
+            <a:r>
+              <a:rPr lang="en-US" sz="1200" dirty="0">
+                <a:solidFill>
+                  <a:srgbClr val="16213E"/>
+                </a:solidFill>
+                <a:latin typeface="Calibri" pitchFamily="34" charset="0"/>
+                <a:ea typeface="Calibri" pitchFamily="34" charset="-122"/>
+                <a:cs typeface="Calibri" pitchFamily="34" charset="-120"/>
+              </a:rPr>
+              <a:t>看整批何時清空，不能只看前段衝得多快</a:t>
+            </a:r>
+            <a:endParaRPr lang="en-US" sz="1200" dirty="0"/>
+          </a:p>
+        </p:txBody>
+      </p:sp>
+      <p:sp>
+        <p:nvSpPr>
+          <p:cNvPr id="15" name="Text 11"/>
+          <p:cNvSpPr txBox="1"/>
+          <p:nvPr/>
+        </p:nvSpPr>
+        <p:spPr>
+          <a:xfrm>
+            <a:off x="566928" y="6126480"/>
+            <a:ext cx="11018520" cy="329184"/>
+          </a:xfrm>
+          <a:prstGeom prst="rect">
+            <a:avLst/>
+          </a:prstGeom>
+          <a:noFill/>
+          <a:ln/>
+        </p:spPr>
+        <p:txBody>
+          <a:bodyPr wrap="square" rtlCol="0" anchor="ctr"/>
           <a:lstStyle/>
           <a:p>
             <a:pPr indent="0" marL="0">
               <a:buNone/>
             </a:pPr>
             <a:r>
-              <a:rPr lang="en-US" sz="1250" dirty="0">
-                <a:solidFill>
-                  <a:srgbClr val="A9BBDD"/>
-                </a:solidFill>
-                <a:latin typeface="Calibri" pitchFamily="34" charset="0"/>
-                <a:ea typeface="Calibri" pitchFamily="34" charset="-122"/>
-                <a:cs typeface="Calibri" pitchFamily="34" charset="-120"/>
-              </a:rPr>
-              <a:t>取消預先押批，改為即時派工</a:t>
-            </a:r>
-            <a:endParaRPr lang="en-US" sz="1250" dirty="0"/>
-          </a:p>
-        </p:txBody>
-      </p:sp>
-      <p:sp>
-        <p:nvSpPr>
-          <p:cNvPr id="16" name="Text 14"/>
-          <p:cNvSpPr txBox="1"/>
-          <p:nvPr/>
-        </p:nvSpPr>
-        <p:spPr>
-          <a:xfrm>
-            <a:off x="8321040" y="2898648"/>
-            <a:ext cx="3063240" cy="457200"/>
-          </a:xfrm>
-          <a:prstGeom prst="rect">
-            <a:avLst/>
-          </a:prstGeom>
-          <a:noFill/>
-          <a:ln/>
-        </p:spPr>
-        <p:txBody>
-          <a:bodyPr wrap="square" lIns="0" tIns="0" rIns="0" bIns="0" rtlCol="0" anchor="ctr"/>
-          <a:lstStyle/>
-          <a:p>
-            <a:pPr algn="r" indent="0" marL="0">
-              <a:buNone/>
-            </a:pPr>
-            <a:r>
-              <a:rPr lang="en-US" sz="1900" b="1" dirty="0">
-                <a:solidFill>
-                  <a:srgbClr val="0F7B6C"/>
-                </a:solidFill>
-                <a:latin typeface="Cambria" pitchFamily="34" charset="0"/>
-                <a:ea typeface="Cambria" pitchFamily="34" charset="-122"/>
-                <a:cs typeface="Cambria" pitchFamily="34" charset="-120"/>
-              </a:rPr>
-              <a:t>+21 萬顆／日</a:t>
-            </a:r>
-            <a:endParaRPr lang="en-US" sz="1900" dirty="0"/>
-          </a:p>
-        </p:txBody>
-      </p:sp>
-      <p:sp>
-        <p:nvSpPr>
-          <p:cNvPr id="17" name="Shape 15"/>
-          <p:cNvSpPr/>
-          <p:nvPr/>
-        </p:nvSpPr>
-        <p:spPr>
-          <a:xfrm>
-            <a:off x="566928" y="3758184"/>
-            <a:ext cx="11018520" cy="1051560"/>
-          </a:xfrm>
-          <a:prstGeom prst="roundRect">
-            <a:avLst>
-              <a:gd name="adj" fmla="val 4348"/>
-            </a:avLst>
-          </a:prstGeom>
-          <a:solidFill>
-            <a:srgbClr val="17254C"/>
-          </a:solidFill>
-          <a:ln w="12700">
-            <a:solidFill>
-              <a:srgbClr val="17254C"/>
-            </a:solidFill>
-            <a:prstDash val="solid"/>
-          </a:ln>
-        </p:spPr>
-      </p:sp>
-      <p:sp>
-        <p:nvSpPr>
-          <p:cNvPr id="18" name="Shape 16"/>
-          <p:cNvSpPr/>
-          <p:nvPr/>
-        </p:nvSpPr>
-        <p:spPr>
-          <a:xfrm>
-            <a:off x="841248" y="4069080"/>
-            <a:ext cx="429768" cy="429768"/>
-          </a:xfrm>
-          <a:prstGeom prst="ellipse">
-            <a:avLst/>
-          </a:prstGeom>
-          <a:solidFill>
-            <a:srgbClr val="1C7293"/>
-          </a:solidFill>
-          <a:ln w="12700">
-            <a:solidFill>
-              <a:srgbClr val="1C7293"/>
-            </a:solidFill>
-            <a:prstDash val="solid"/>
-          </a:ln>
-        </p:spPr>
-      </p:sp>
-      <p:sp>
-        <p:nvSpPr>
-          <p:cNvPr id="19" name="Text 17"/>
-          <p:cNvSpPr txBox="1"/>
-          <p:nvPr/>
-        </p:nvSpPr>
-        <p:spPr>
-          <a:xfrm>
-            <a:off x="841248" y="4105656"/>
-            <a:ext cx="429768" cy="365760"/>
-          </a:xfrm>
-          <a:prstGeom prst="rect">
-            <a:avLst/>
-          </a:prstGeom>
-          <a:noFill/>
-          <a:ln/>
-        </p:spPr>
-        <p:txBody>
-          <a:bodyPr wrap="square" lIns="0" tIns="0" rIns="0" bIns="0" rtlCol="0" anchor="ctr"/>
-          <a:lstStyle/>
-          <a:p>
-            <a:pPr algn="ctr" indent="0" marL="0">
-              <a:buNone/>
-            </a:pPr>
-            <a:r>
-              <a:rPr lang="en-US" sz="1600" b="1" dirty="0">
-                <a:solidFill>
-                  <a:srgbClr val="FFFFFF"/>
-                </a:solidFill>
-                <a:latin typeface="Calibri" pitchFamily="34" charset="0"/>
-                <a:ea typeface="Calibri" pitchFamily="34" charset="-122"/>
-                <a:cs typeface="Calibri" pitchFamily="34" charset="-120"/>
-              </a:rPr>
-              <a:t>3</a:t>
-            </a:r>
-            <a:endParaRPr lang="en-US" sz="1600" dirty="0"/>
-          </a:p>
-        </p:txBody>
-      </p:sp>
-      <p:sp>
-        <p:nvSpPr>
-          <p:cNvPr id="20" name="Text 18"/>
-          <p:cNvSpPr txBox="1"/>
-          <p:nvPr/>
-        </p:nvSpPr>
-        <p:spPr>
-          <a:xfrm>
-            <a:off x="1481328" y="3941064"/>
-            <a:ext cx="6583680" cy="365760"/>
-          </a:xfrm>
-          <a:prstGeom prst="rect">
-            <a:avLst/>
-          </a:prstGeom>
-          <a:noFill/>
-          <a:ln/>
-        </p:spPr>
-        <p:txBody>
-          <a:bodyPr wrap="square" lIns="0" tIns="0" rIns="0" bIns="0" rtlCol="0" anchor="ctr"/>
-          <a:lstStyle/>
-          <a:p>
-            <a:pPr indent="0" marL="0">
-              <a:buNone/>
-            </a:pPr>
-            <a:r>
-              <a:rPr lang="en-US" sz="1700" b="1" dirty="0">
-                <a:solidFill>
-                  <a:srgbClr val="FFFFFF"/>
-                </a:solidFill>
-                <a:latin typeface="Calibri" pitchFamily="34" charset="0"/>
-                <a:ea typeface="Calibri" pitchFamily="34" charset="-122"/>
-                <a:cs typeface="Calibri" pitchFamily="34" charset="-120"/>
-              </a:rPr>
-              <a:t>工程師由 8 人補至 10 人（1:2.5）</a:t>
-            </a:r>
-            <a:endParaRPr lang="en-US" sz="1700" dirty="0"/>
-          </a:p>
-        </p:txBody>
-      </p:sp>
-      <p:sp>
-        <p:nvSpPr>
-          <p:cNvPr id="21" name="Text 19"/>
-          <p:cNvSpPr txBox="1"/>
-          <p:nvPr/>
-        </p:nvSpPr>
-        <p:spPr>
-          <a:xfrm>
-            <a:off x="1481328" y="4325112"/>
-            <a:ext cx="6583680" cy="347472"/>
-          </a:xfrm>
-          <a:prstGeom prst="rect">
-            <a:avLst/>
-          </a:prstGeom>
-          <a:noFill/>
-          <a:ln/>
-        </p:spPr>
-        <p:txBody>
-          <a:bodyPr wrap="square" lIns="0" tIns="0" rIns="0" bIns="0" rtlCol="0" anchor="ctr"/>
-          <a:lstStyle/>
-          <a:p>
-            <a:pPr indent="0" marL="0">
-              <a:buNone/>
-            </a:pPr>
-            <a:r>
-              <a:rPr lang="en-US" sz="1250" dirty="0">
-                <a:solidFill>
-                  <a:srgbClr val="A9BBDD"/>
-                </a:solidFill>
-                <a:latin typeface="Calibri" pitchFamily="34" charset="0"/>
-                <a:ea typeface="Calibri" pitchFamily="34" charset="-122"/>
-                <a:cs typeface="Calibri" pitchFamily="34" charset="-120"/>
-              </a:rPr>
-              <a:t>8 人時有 14.4% 的機台時間在停等</a:t>
-            </a:r>
-            <a:endParaRPr lang="en-US" sz="1250" dirty="0"/>
-          </a:p>
-        </p:txBody>
-      </p:sp>
-      <p:sp>
-        <p:nvSpPr>
-          <p:cNvPr id="22" name="Text 20"/>
-          <p:cNvSpPr txBox="1"/>
-          <p:nvPr/>
-        </p:nvSpPr>
-        <p:spPr>
-          <a:xfrm>
-            <a:off x="8321040" y="4069080"/>
-            <a:ext cx="3063240" cy="457200"/>
-          </a:xfrm>
-          <a:prstGeom prst="rect">
-            <a:avLst/>
-          </a:prstGeom>
-          <a:noFill/>
-          <a:ln/>
-        </p:spPr>
-        <p:txBody>
-          <a:bodyPr wrap="square" lIns="0" tIns="0" rIns="0" bIns="0" rtlCol="0" anchor="ctr"/>
-          <a:lstStyle/>
-          <a:p>
-            <a:pPr algn="r" indent="0" marL="0">
-              <a:buNone/>
-            </a:pPr>
-            <a:r>
-              <a:rPr lang="en-US" sz="1900" b="1" dirty="0">
-                <a:solidFill>
-                  <a:srgbClr val="1C7293"/>
-                </a:solidFill>
-                <a:latin typeface="Cambria" pitchFamily="34" charset="0"/>
-                <a:ea typeface="Cambria" pitchFamily="34" charset="-122"/>
-                <a:cs typeface="Cambria" pitchFamily="34" charset="-120"/>
-              </a:rPr>
-              <a:t>+7 萬顆／日</a:t>
-            </a:r>
-            <a:endParaRPr lang="en-US" sz="1900" dirty="0"/>
-          </a:p>
-        </p:txBody>
-      </p:sp>
-      <p:sp>
-        <p:nvSpPr>
-          <p:cNvPr id="23" name="Shape 21"/>
-          <p:cNvSpPr/>
-          <p:nvPr/>
-        </p:nvSpPr>
-        <p:spPr>
-          <a:xfrm>
-            <a:off x="566928" y="4928616"/>
-            <a:ext cx="11018520" cy="1051560"/>
-          </a:xfrm>
-          <a:prstGeom prst="roundRect">
-            <a:avLst>
-              <a:gd name="adj" fmla="val 4348"/>
-            </a:avLst>
-          </a:prstGeom>
-          <a:solidFill>
-            <a:srgbClr val="17254C"/>
-          </a:solidFill>
-          <a:ln w="12700">
-            <a:solidFill>
-              <a:srgbClr val="17254C"/>
-            </a:solidFill>
-            <a:prstDash val="solid"/>
-          </a:ln>
-        </p:spPr>
-      </p:sp>
-      <p:sp>
-        <p:nvSpPr>
-          <p:cNvPr id="24" name="Shape 22"/>
-          <p:cNvSpPr/>
-          <p:nvPr/>
-        </p:nvSpPr>
-        <p:spPr>
-          <a:xfrm>
-            <a:off x="841248" y="5239512"/>
-            <a:ext cx="429768" cy="429768"/>
-          </a:xfrm>
-          <a:prstGeom prst="ellipse">
-            <a:avLst/>
-          </a:prstGeom>
-          <a:solidFill>
-            <a:srgbClr val="1C7293"/>
-          </a:solidFill>
-          <a:ln w="12700">
-            <a:solidFill>
-              <a:srgbClr val="1C7293"/>
-            </a:solidFill>
-            <a:prstDash val="solid"/>
-          </a:ln>
-        </p:spPr>
-      </p:sp>
-      <p:sp>
-        <p:nvSpPr>
-          <p:cNvPr id="25" name="Text 23"/>
-          <p:cNvSpPr txBox="1"/>
-          <p:nvPr/>
-        </p:nvSpPr>
-        <p:spPr>
-          <a:xfrm>
-            <a:off x="841248" y="5276088"/>
-            <a:ext cx="429768" cy="365760"/>
-          </a:xfrm>
-          <a:prstGeom prst="rect">
-            <a:avLst/>
-          </a:prstGeom>
-          <a:noFill/>
-          <a:ln/>
-        </p:spPr>
-        <p:txBody>
-          <a:bodyPr wrap="square" lIns="0" tIns="0" rIns="0" bIns="0" rtlCol="0" anchor="ctr"/>
-          <a:lstStyle/>
-          <a:p>
-            <a:pPr algn="ctr" indent="0" marL="0">
-              <a:buNone/>
-            </a:pPr>
-            <a:r>
-              <a:rPr lang="en-US" sz="1600" b="1" dirty="0">
-                <a:solidFill>
-                  <a:srgbClr val="FFFFFF"/>
-                </a:solidFill>
-                <a:latin typeface="Calibri" pitchFamily="34" charset="0"/>
-                <a:ea typeface="Calibri" pitchFamily="34" charset="-122"/>
-                <a:cs typeface="Calibri" pitchFamily="34" charset="-120"/>
-              </a:rPr>
-              <a:t>4</a:t>
-            </a:r>
-            <a:endParaRPr lang="en-US" sz="1600" dirty="0"/>
-          </a:p>
-        </p:txBody>
-      </p:sp>
-      <p:sp>
-        <p:nvSpPr>
-          <p:cNvPr id="26" name="Text 24"/>
-          <p:cNvSpPr txBox="1"/>
-          <p:nvPr/>
-        </p:nvSpPr>
-        <p:spPr>
-          <a:xfrm>
-            <a:off x="1481328" y="5111496"/>
-            <a:ext cx="6583680" cy="365760"/>
-          </a:xfrm>
-          <a:prstGeom prst="rect">
-            <a:avLst/>
-          </a:prstGeom>
-          <a:noFill/>
-          <a:ln/>
-        </p:spPr>
-        <p:txBody>
-          <a:bodyPr wrap="square" lIns="0" tIns="0" rIns="0" bIns="0" rtlCol="0" anchor="ctr"/>
-          <a:lstStyle/>
-          <a:p>
-            <a:pPr indent="0" marL="0">
-              <a:buNone/>
-            </a:pPr>
-            <a:r>
-              <a:rPr lang="en-US" sz="1700" b="1" dirty="0">
-                <a:solidFill>
-                  <a:srgbClr val="FFFFFF"/>
-                </a:solidFill>
-                <a:latin typeface="Calibri" pitchFamily="34" charset="0"/>
-                <a:ea typeface="Calibri" pitchFamily="34" charset="-122"/>
-                <a:cs typeface="Calibri" pitchFamily="34" charset="-120"/>
-              </a:rPr>
-              <a:t>縮短換程式時間 30→15 分</a:t>
-            </a:r>
-            <a:endParaRPr lang="en-US" sz="1700" dirty="0"/>
-          </a:p>
-        </p:txBody>
-      </p:sp>
-      <p:sp>
-        <p:nvSpPr>
-          <p:cNvPr id="27" name="Text 25"/>
-          <p:cNvSpPr txBox="1"/>
-          <p:nvPr/>
-        </p:nvSpPr>
-        <p:spPr>
-          <a:xfrm>
-            <a:off x="1481328" y="5495544"/>
-            <a:ext cx="6583680" cy="347472"/>
-          </a:xfrm>
-          <a:prstGeom prst="rect">
-            <a:avLst/>
-          </a:prstGeom>
-          <a:noFill/>
-          <a:ln/>
-        </p:spPr>
-        <p:txBody>
-          <a:bodyPr wrap="square" lIns="0" tIns="0" rIns="0" bIns="0" rtlCol="0" anchor="ctr"/>
-          <a:lstStyle/>
-          <a:p>
-            <a:pPr indent="0" marL="0">
-              <a:buNone/>
-            </a:pPr>
-            <a:r>
-              <a:rPr lang="en-US" sz="1250" dirty="0">
-                <a:solidFill>
-                  <a:srgbClr val="A9BBDD"/>
-                </a:solidFill>
-                <a:latin typeface="Calibri" pitchFamily="34" charset="0"/>
-                <a:ea typeface="Calibri" pitchFamily="34" charset="-122"/>
-                <a:cs typeface="Calibri" pitchFamily="34" charset="-120"/>
-              </a:rPr>
-              <a:t>一天 213 次，槓桿最大的工程改善</a:t>
-            </a:r>
-            <a:endParaRPr lang="en-US" sz="1250" dirty="0"/>
-          </a:p>
-        </p:txBody>
-      </p:sp>
-      <p:sp>
-        <p:nvSpPr>
-          <p:cNvPr id="28" name="Text 26"/>
-          <p:cNvSpPr txBox="1"/>
-          <p:nvPr/>
-        </p:nvSpPr>
-        <p:spPr>
-          <a:xfrm>
-            <a:off x="8321040" y="5239512"/>
-            <a:ext cx="3063240" cy="457200"/>
-          </a:xfrm>
-          <a:prstGeom prst="rect">
-            <a:avLst/>
-          </a:prstGeom>
-          <a:noFill/>
-          <a:ln/>
-        </p:spPr>
-        <p:txBody>
-          <a:bodyPr wrap="square" lIns="0" tIns="0" rIns="0" bIns="0" rtlCol="0" anchor="ctr"/>
-          <a:lstStyle/>
-          <a:p>
-            <a:pPr algn="r" indent="0" marL="0">
-              <a:buNone/>
-            </a:pPr>
-            <a:r>
-              <a:rPr lang="en-US" sz="1900" b="1" dirty="0">
-                <a:solidFill>
-                  <a:srgbClr val="1C7293"/>
-                </a:solidFill>
-                <a:latin typeface="Cambria" pitchFamily="34" charset="0"/>
-                <a:ea typeface="Cambria" pitchFamily="34" charset="-122"/>
-                <a:cs typeface="Cambria" pitchFamily="34" charset="-120"/>
-              </a:rPr>
-              <a:t>+3 萬顆／日</a:t>
-            </a:r>
-            <a:endParaRPr lang="en-US" sz="1900" dirty="0"/>
-          </a:p>
-        </p:txBody>
-      </p:sp>
-      <p:sp>
-        <p:nvSpPr>
-          <p:cNvPr id="29" name="Text 27"/>
-          <p:cNvSpPr txBox="1"/>
-          <p:nvPr/>
-        </p:nvSpPr>
-        <p:spPr>
-          <a:xfrm>
-            <a:off x="566928" y="6108192"/>
-            <a:ext cx="11018520" cy="384048"/>
-          </a:xfrm>
-          <a:prstGeom prst="rect">
-            <a:avLst/>
-          </a:prstGeom>
-          <a:noFill/>
-          <a:ln/>
-        </p:spPr>
-        <p:txBody>
-          <a:bodyPr wrap="square" rtlCol="0" anchor="ctr"/>
-          <a:lstStyle/>
-          <a:p>
-            <a:pPr algn="ctr" indent="0" marL="0">
-              <a:buNone/>
-            </a:pPr>
-            <a:r>
-              <a:rPr lang="en-US" sz="1300" dirty="0">
-                <a:solidFill>
-                  <a:srgbClr val="CADCFC"/>
-                </a:solidFill>
-                <a:latin typeface="Calibri" pitchFamily="34" charset="0"/>
-                <a:ea typeface="Calibri" pitchFamily="34" charset="-122"/>
-                <a:cs typeface="Calibri" pitchFamily="34" charset="-120"/>
-              </a:rPr>
-              <a:t>四項全做：每日良品 77 萬 → 148 萬顆（+93%），逾期批數 220 批 → 2 批以下</a:t>
-            </a:r>
-            <a:endParaRPr lang="en-US" sz="1300" dirty="0"/>
+              <a:rPr lang="en-US" sz="1100" dirty="0">
+                <a:solidFill>
+                  <a:srgbClr val="5A6785"/>
+                </a:solidFill>
+                <a:latin typeface="Calibri" pitchFamily="34" charset="0"/>
+                <a:ea typeface="Calibri" pitchFamily="34" charset="-122"/>
+                <a:cs typeface="Calibri" pitchFamily="34" charset="-120"/>
+              </a:rPr>
+              <a:t>註　情境為「純排程比較」：關閉當機與良率波動，同一批貨每次跑結果完全相同，法則之間的差異純粹來自排程順序。</a:t>
+            </a:r>
+            <a:endParaRPr lang="en-US" sz="1100" dirty="0"/>
           </a:p>
         </p:txBody>
       </p:sp>
@@ -3061,7 +2866,7 @@
                 <a:ea typeface="Cambria" pitchFamily="34" charset="-122"/>
                 <a:cs typeface="Cambria" pitchFamily="34" charset="-120"/>
               </a:rPr>
-              <a:t>實施路徑、追蹤指標與模型限制</a:t>
+              <a:t>人力改變了最佳排程法則</a:t>
             </a:r>
             <a:endParaRPr lang="en-US" sz="3000" dirty="0"/>
           </a:p>
@@ -3100,26 +2905,74 @@
                 <a:ea typeface="Calibri" pitchFamily="34" charset="-122"/>
                 <a:cs typeface="Calibri" pitchFamily="34" charset="-120"/>
               </a:rPr>
-              <a:t>建議以四週為一個驗證循環，每一步都有可量測的指標</a:t>
+              <a:t>同一批貨、同一組機台，只改工程師人數，冠軍法則就換人做——這是前面所有結論的邊界條件</a:t>
             </a:r>
             <a:endParaRPr lang="en-US" sz="1350" dirty="0"/>
           </a:p>
         </p:txBody>
       </p:sp>
-      <p:sp>
-        <p:nvSpPr>
-          <p:cNvPr id="5" name="Shape 3"/>
+      <p:pic>
+        <p:nvPicPr>
+          <p:cNvPr id="5" name="Image 0" descr="charts/c_engpol.png">    </p:cNvPr>
+          <p:cNvPicPr>
+            <a:picLocks noChangeAspect="1"/>
+          </p:cNvPicPr>
+          <p:nvPr/>
+        </p:nvPicPr>
+        <p:blipFill>
+          <a:blip r:embed="rId1"/>
+          <a:stretch>
+            <a:fillRect/>
+          </a:stretch>
+        </p:blipFill>
+        <p:spPr>
+          <a:xfrm>
+            <a:off x="566928" y="1335024"/>
+            <a:ext cx="5394960" cy="3591134"/>
+          </a:xfrm>
+          <a:prstGeom prst="rect">
+            <a:avLst/>
+          </a:prstGeom>
+        </p:spPr>
+      </p:pic>
+      <p:pic>
+        <p:nvPicPr>
+          <p:cNvPr id="6" name="Image 1" descr="charts/c_frozen.png">    </p:cNvPr>
+          <p:cNvPicPr>
+            <a:picLocks noChangeAspect="1"/>
+          </p:cNvPicPr>
+          <p:nvPr/>
+        </p:nvPicPr>
+        <p:blipFill>
+          <a:blip r:embed="rId2"/>
+          <a:stretch>
+            <a:fillRect/>
+          </a:stretch>
+        </p:blipFill>
+        <p:spPr>
+          <a:xfrm>
+            <a:off x="6592824" y="1335024"/>
+            <a:ext cx="5029200" cy="3601289"/>
+          </a:xfrm>
+          <a:prstGeom prst="rect">
+            <a:avLst/>
+          </a:prstGeom>
+        </p:spPr>
+      </p:pic>
+      <p:sp>
+        <p:nvSpPr>
+          <p:cNvPr id="7" name="Shape 3"/>
           <p:cNvSpPr/>
           <p:nvPr/>
         </p:nvSpPr>
         <p:spPr>
           <a:xfrm>
-            <a:off x="566928" y="1417320"/>
-            <a:ext cx="2670048" cy="2560320"/>
+            <a:off x="566928" y="5047488"/>
+            <a:ext cx="5486400" cy="1600200"/>
           </a:xfrm>
           <a:prstGeom prst="roundRect">
             <a:avLst>
-              <a:gd name="adj" fmla="val 1786"/>
+              <a:gd name="adj" fmla="val 2857"/>
             </a:avLst>
           </a:prstGeom>
           <a:solidFill>
@@ -3135,6 +2988,1577 @@
       </p:sp>
       <p:sp>
         <p:nvSpPr>
+          <p:cNvPr id="8" name="Shape 4"/>
+          <p:cNvSpPr/>
+          <p:nvPr/>
+        </p:nvSpPr>
+        <p:spPr>
+          <a:xfrm>
+            <a:off x="804672" y="5303520"/>
+            <a:ext cx="146304" cy="146304"/>
+          </a:xfrm>
+          <a:prstGeom prst="ellipse">
+            <a:avLst/>
+          </a:prstGeom>
+          <a:solidFill>
+            <a:srgbClr val="0F7B6C"/>
+          </a:solidFill>
+          <a:ln w="12700">
+            <a:solidFill>
+              <a:srgbClr val="0F7B6C"/>
+            </a:solidFill>
+            <a:prstDash val="solid"/>
+          </a:ln>
+        </p:spPr>
+      </p:sp>
+      <p:sp>
+        <p:nvSpPr>
+          <p:cNvPr id="9" name="Text 5"/>
+          <p:cNvSpPr txBox="1"/>
+          <p:nvPr/>
+        </p:nvSpPr>
+        <p:spPr>
+          <a:xfrm>
+            <a:off x="1060704" y="5202936"/>
+            <a:ext cx="4754880" cy="329184"/>
+          </a:xfrm>
+          <a:prstGeom prst="rect">
+            <a:avLst/>
+          </a:prstGeom>
+          <a:noFill/>
+          <a:ln/>
+        </p:spPr>
+        <p:txBody>
+          <a:bodyPr wrap="square" lIns="0" tIns="0" rIns="0" bIns="0" rtlCol="0" anchor="ctr"/>
+          <a:lstStyle/>
+          <a:p>
+            <a:pPr indent="0" marL="0">
+              <a:buNone/>
+            </a:pPr>
+            <a:r>
+              <a:rPr lang="en-US" sz="1450" b="1" dirty="0">
+                <a:solidFill>
+                  <a:srgbClr val="1E2761"/>
+                </a:solidFill>
+                <a:latin typeface="Calibri" pitchFamily="34" charset="0"/>
+                <a:ea typeface="Calibri" pitchFamily="34" charset="-122"/>
+                <a:cs typeface="Calibri" pitchFamily="34" charset="-120"/>
+              </a:rPr>
+              <a:t>交叉點在 5～10 人之間</a:t>
+            </a:r>
+            <a:endParaRPr lang="en-US" sz="1450" dirty="0"/>
+          </a:p>
+        </p:txBody>
+      </p:sp>
+      <p:sp>
+        <p:nvSpPr>
+          <p:cNvPr id="10" name="Text 6"/>
+          <p:cNvSpPr txBox="1"/>
+          <p:nvPr/>
+        </p:nvSpPr>
+        <p:spPr>
+          <a:xfrm>
+            <a:off x="1060704" y="5559552"/>
+            <a:ext cx="4754880" cy="996696"/>
+          </a:xfrm>
+          <a:prstGeom prst="rect">
+            <a:avLst/>
+          </a:prstGeom>
+          <a:noFill/>
+          <a:ln/>
+        </p:spPr>
+        <p:txBody>
+          <a:bodyPr wrap="square" lIns="0" tIns="0" rIns="0" bIns="0" rtlCol="0" anchor="ctr"/>
+          <a:lstStyle/>
+          <a:p>
+            <a:pPr marL="342900" indent="-342900">
+              <a:lnSpc>
+                <a:spcPts val="1800"/>
+              </a:lnSpc>
+              <a:spcAft>
+                <a:spcPts val="400"/>
+              </a:spcAft>
+              <a:buSzPct val="100000"/>
+              <a:buChar char="•"/>
+            </a:pPr>
+            <a:r>
+              <a:rPr lang="en-US" sz="1200" dirty="0">
+                <a:solidFill>
+                  <a:srgbClr val="16213E"/>
+                </a:solidFill>
+                <a:latin typeface="Calibri" pitchFamily="34" charset="0"/>
+                <a:ea typeface="Calibri" pitchFamily="34" charset="-122"/>
+                <a:cs typeface="Calibri" pitchFamily="34" charset="-120"/>
+              </a:rPr>
+              <a:t>3 人：省改機 13.5 h 勝出，大批給快機要 18.0 h</a:t>
+            </a:r>
+            <a:endParaRPr lang="en-US" sz="1200" dirty="0"/>
+          </a:p>
+          <a:p>
+            <a:pPr marL="342900" indent="-342900">
+              <a:lnSpc>
+                <a:spcPts val="1800"/>
+              </a:lnSpc>
+              <a:spcAft>
+                <a:spcPts val="400"/>
+              </a:spcAft>
+              <a:buSzPct val="100000"/>
+              <a:buChar char="•"/>
+            </a:pPr>
+            <a:r>
+              <a:rPr lang="en-US" sz="1200" dirty="0">
+                <a:solidFill>
+                  <a:srgbClr val="16213E"/>
+                </a:solidFill>
+                <a:latin typeface="Calibri" pitchFamily="34" charset="0"/>
+                <a:ea typeface="Calibri" pitchFamily="34" charset="-122"/>
+                <a:cs typeface="Calibri" pitchFamily="34" charset="-120"/>
+              </a:rPr>
+              <a:t>10 人：大批給快機 9.7 h，省改機落到 14.5 h</a:t>
+            </a:r>
+            <a:endParaRPr lang="en-US" sz="1200" dirty="0"/>
+          </a:p>
+          <a:p>
+            <a:pPr marL="342900" indent="-342900">
+              <a:lnSpc>
+                <a:spcPts val="1800"/>
+              </a:lnSpc>
+              <a:spcAft>
+                <a:spcPts val="400"/>
+              </a:spcAft>
+              <a:buSzPct val="100000"/>
+              <a:buChar char="•"/>
+            </a:pPr>
+            <a:r>
+              <a:rPr lang="en-US" sz="1200" dirty="0">
+                <a:solidFill>
+                  <a:srgbClr val="16213E"/>
+                </a:solidFill>
+                <a:latin typeface="Calibri" pitchFamily="34" charset="0"/>
+                <a:ea typeface="Calibri" pitchFamily="34" charset="-122"/>
+                <a:cs typeface="Calibri" pitchFamily="34" charset="-120"/>
+              </a:rPr>
+              <a:t>人少 → 改機排隊；人多 → 閒機排隊</a:t>
+            </a:r>
+            <a:endParaRPr lang="en-US" sz="1200" dirty="0"/>
+          </a:p>
+        </p:txBody>
+      </p:sp>
+      <p:sp>
+        <p:nvSpPr>
+          <p:cNvPr id="11" name="Shape 7"/>
+          <p:cNvSpPr/>
+          <p:nvPr/>
+        </p:nvSpPr>
+        <p:spPr>
+          <a:xfrm>
+            <a:off x="6172200" y="5047488"/>
+            <a:ext cx="5413248" cy="1600200"/>
+          </a:xfrm>
+          <a:prstGeom prst="roundRect">
+            <a:avLst>
+              <a:gd name="adj" fmla="val 2857"/>
+            </a:avLst>
+          </a:prstGeom>
+          <a:solidFill>
+            <a:srgbClr val="F5F7FB"/>
+          </a:solidFill>
+          <a:ln w="12700">
+            <a:solidFill>
+              <a:srgbClr val="FFFFFF"/>
+            </a:solidFill>
+            <a:prstDash val="solid"/>
+          </a:ln>
+        </p:spPr>
+      </p:sp>
+      <p:sp>
+        <p:nvSpPr>
+          <p:cNvPr id="12" name="Shape 8"/>
+          <p:cNvSpPr/>
+          <p:nvPr/>
+        </p:nvSpPr>
+        <p:spPr>
+          <a:xfrm>
+            <a:off x="6409944" y="5303520"/>
+            <a:ext cx="146304" cy="146304"/>
+          </a:xfrm>
+          <a:prstGeom prst="ellipse">
+            <a:avLst/>
+          </a:prstGeom>
+          <a:solidFill>
+            <a:srgbClr val="C2410C"/>
+          </a:solidFill>
+          <a:ln w="12700">
+            <a:solidFill>
+              <a:srgbClr val="C2410C"/>
+            </a:solidFill>
+            <a:prstDash val="solid"/>
+          </a:ln>
+        </p:spPr>
+      </p:sp>
+      <p:sp>
+        <p:nvSpPr>
+          <p:cNvPr id="13" name="Text 9"/>
+          <p:cNvSpPr txBox="1"/>
+          <p:nvPr/>
+        </p:nvSpPr>
+        <p:spPr>
+          <a:xfrm>
+            <a:off x="6665976" y="5202936"/>
+            <a:ext cx="4681728" cy="329184"/>
+          </a:xfrm>
+          <a:prstGeom prst="rect">
+            <a:avLst/>
+          </a:prstGeom>
+          <a:noFill/>
+          <a:ln/>
+        </p:spPr>
+        <p:txBody>
+          <a:bodyPr wrap="square" lIns="0" tIns="0" rIns="0" bIns="0" rtlCol="0" anchor="ctr"/>
+          <a:lstStyle/>
+          <a:p>
+            <a:pPr indent="0" marL="0">
+              <a:buNone/>
+            </a:pPr>
+            <a:r>
+              <a:rPr lang="en-US" sz="1450" b="1" dirty="0">
+                <a:solidFill>
+                  <a:srgbClr val="1E2761"/>
+                </a:solidFill>
+                <a:latin typeface="Calibri" pitchFamily="34" charset="0"/>
+                <a:ea typeface="Calibri" pitchFamily="34" charset="-122"/>
+                <a:cs typeface="Calibri" pitchFamily="34" charset="-120"/>
+              </a:rPr>
+              <a:t>為什麼省改機在人多時會輸</a:t>
+            </a:r>
+            <a:endParaRPr lang="en-US" sz="1450" dirty="0"/>
+          </a:p>
+        </p:txBody>
+      </p:sp>
+      <p:sp>
+        <p:nvSpPr>
+          <p:cNvPr id="14" name="Text 10"/>
+          <p:cNvSpPr txBox="1"/>
+          <p:nvPr/>
+        </p:nvSpPr>
+        <p:spPr>
+          <a:xfrm>
+            <a:off x="6665976" y="5559552"/>
+            <a:ext cx="4681728" cy="996696"/>
+          </a:xfrm>
+          <a:prstGeom prst="rect">
+            <a:avLst/>
+          </a:prstGeom>
+          <a:noFill/>
+          <a:ln/>
+        </p:spPr>
+        <p:txBody>
+          <a:bodyPr wrap="square" lIns="0" tIns="0" rIns="0" bIns="0" rtlCol="0" anchor="ctr"/>
+          <a:lstStyle/>
+          <a:p>
+            <a:pPr marL="342900" indent="-342900">
+              <a:lnSpc>
+                <a:spcPts val="1800"/>
+              </a:lnSpc>
+              <a:spcAft>
+                <a:spcPts val="400"/>
+              </a:spcAft>
+              <a:buSzPct val="100000"/>
+              <a:buChar char="•"/>
+            </a:pPr>
+            <a:r>
+              <a:rPr lang="en-US" sz="1200" dirty="0">
+                <a:solidFill>
+                  <a:srgbClr val="16213E"/>
+                </a:solidFill>
+                <a:latin typeface="Calibri" pitchFamily="34" charset="0"/>
+                <a:ea typeface="Calibri" pitchFamily="34" charset="-122"/>
+                <a:cs typeface="Calibri" pitchFamily="34" charset="-120"/>
+              </a:rPr>
+              <a:t>不換 Kit ＝ 把機台配置凍結在現況</a:t>
+            </a:r>
+            <a:endParaRPr lang="en-US" sz="1200" dirty="0"/>
+          </a:p>
+          <a:p>
+            <a:pPr marL="342900" indent="-342900">
+              <a:lnSpc>
+                <a:spcPts val="1800"/>
+              </a:lnSpc>
+              <a:spcAft>
+                <a:spcPts val="400"/>
+              </a:spcAft>
+              <a:buSzPct val="100000"/>
+              <a:buChar char="•"/>
+            </a:pPr>
+            <a:r>
+              <a:rPr lang="en-US" sz="1200" dirty="0">
+                <a:solidFill>
+                  <a:srgbClr val="16213E"/>
+                </a:solidFill>
+                <a:latin typeface="Calibri" pitchFamily="34" charset="0"/>
+                <a:ea typeface="Calibri" pitchFamily="34" charset="-122"/>
+                <a:cs typeface="Calibri" pitchFamily="34" charset="-120"/>
+              </a:rPr>
+              <a:t>QFN32 佔 38.6% 工時，卻只有 22/100 site 裝著它</a:t>
+            </a:r>
+            <a:endParaRPr lang="en-US" sz="1200" dirty="0"/>
+          </a:p>
+          <a:p>
+            <a:pPr marL="342900" indent="-342900">
+              <a:lnSpc>
+                <a:spcPts val="1800"/>
+              </a:lnSpc>
+              <a:spcAft>
+                <a:spcPts val="400"/>
+              </a:spcAft>
+              <a:buSzPct val="100000"/>
+              <a:buChar char="•"/>
+            </a:pPr>
+            <a:r>
+              <a:rPr lang="en-US" sz="1200" dirty="0">
+                <a:solidFill>
+                  <a:srgbClr val="16213E"/>
+                </a:solidFill>
+                <a:latin typeface="Calibri" pitchFamily="34" charset="0"/>
+                <a:ea typeface="Calibri" pitchFamily="34" charset="-122"/>
+                <a:cs typeface="Calibri" pitchFamily="34" charset="-120"/>
+              </a:rPr>
+              <a:t>光這一種封裝就要 7 小時，其他機台只能閒著</a:t>
+            </a:r>
+            <a:endParaRPr lang="en-US" sz="1200" dirty="0"/>
+          </a:p>
+        </p:txBody>
+      </p:sp>
+    </p:spTree>
+  </p:cSld>
+  <p:clrMapOvr>
+    <a:masterClrMapping/>
+  </p:clrMapOvr>
+</p:sld>
+</file>
+
+<file path=ppt/slides/slide12.xml><?xml version="1.0" encoding="utf-8"?>
+<p:sld xmlns:a="http://schemas.openxmlformats.org/drawingml/2006/main" xmlns:r="http://schemas.openxmlformats.org/officeDocument/2006/relationships" xmlns:p="http://schemas.openxmlformats.org/presentationml/2006/main">
+  <p:cSld name="Slide 12">
+    <p:bg>
+      <p:bgPr>
+        <a:solidFill>
+          <a:srgbClr val="0E1A3C"/>
+        </a:solidFill>
+      </p:bgPr>
+    </p:bg>
+    <p:spTree>
+      <p:nvGrpSpPr>
+        <p:cNvPr id="1" name=""/>
+        <p:cNvGrpSpPr/>
+        <p:nvPr/>
+      </p:nvGrpSpPr>
+      <p:grpSpPr>
+        <a:xfrm>
+          <a:off x="0" y="0"/>
+          <a:ext cx="0" cy="0"/>
+          <a:chOff x="0" y="0"/>
+          <a:chExt cx="0" cy="0"/>
+        </a:xfrm>
+      </p:grpSpPr>
+      <p:sp>
+        <p:nvSpPr>
+          <p:cNvPr id="2" name="Text 0"/>
+          <p:cNvSpPr txBox="1"/>
+          <p:nvPr/>
+        </p:nvSpPr>
+        <p:spPr>
+          <a:xfrm>
+            <a:off x="566928" y="384048"/>
+            <a:ext cx="502920" cy="457200"/>
+          </a:xfrm>
+          <a:prstGeom prst="rect">
+            <a:avLst/>
+          </a:prstGeom>
+          <a:noFill/>
+          <a:ln/>
+        </p:spPr>
+        <p:txBody>
+          <a:bodyPr wrap="square" rtlCol="0" anchor="ctr"/>
+          <a:lstStyle/>
+          <a:p>
+            <a:pPr indent="0" marL="0">
+              <a:buNone/>
+            </a:pPr>
+            <a:r>
+              <a:rPr lang="en-US" sz="1300" b="1" dirty="0">
+                <a:solidFill>
+                  <a:srgbClr val="1C7293"/>
+                </a:solidFill>
+                <a:latin typeface="Calibri" pitchFamily="34" charset="0"/>
+                <a:ea typeface="Calibri" pitchFamily="34" charset="-122"/>
+                <a:cs typeface="Calibri" pitchFamily="34" charset="-120"/>
+              </a:rPr>
+              <a:t>11</a:t>
+            </a:r>
+            <a:endParaRPr lang="en-US" sz="1300" dirty="0"/>
+          </a:p>
+        </p:txBody>
+      </p:sp>
+      <p:sp>
+        <p:nvSpPr>
+          <p:cNvPr id="3" name="Text 1"/>
+          <p:cNvSpPr txBox="1"/>
+          <p:nvPr/>
+        </p:nvSpPr>
+        <p:spPr>
+          <a:xfrm>
+            <a:off x="1143000" y="310896"/>
+            <a:ext cx="10424160" cy="566928"/>
+          </a:xfrm>
+          <a:prstGeom prst="rect">
+            <a:avLst/>
+          </a:prstGeom>
+          <a:noFill/>
+          <a:ln/>
+        </p:spPr>
+        <p:txBody>
+          <a:bodyPr wrap="square" rtlCol="0" anchor="ctr"/>
+          <a:lstStyle/>
+          <a:p>
+            <a:pPr indent="0" marL="0">
+              <a:buNone/>
+            </a:pPr>
+            <a:r>
+              <a:rPr lang="en-US" sz="3000" b="1" dirty="0">
+                <a:solidFill>
+                  <a:srgbClr val="FFFFFF"/>
+                </a:solidFill>
+                <a:latin typeface="Cambria" pitchFamily="34" charset="0"/>
+                <a:ea typeface="Cambria" pitchFamily="34" charset="-122"/>
+                <a:cs typeface="Cambria" pitchFamily="34" charset="-120"/>
+              </a:rPr>
+              <a:t>專業建議</a:t>
+            </a:r>
+            <a:endParaRPr lang="en-US" sz="3000" dirty="0"/>
+          </a:p>
+        </p:txBody>
+      </p:sp>
+      <p:sp>
+        <p:nvSpPr>
+          <p:cNvPr id="4" name="Text 2"/>
+          <p:cNvSpPr txBox="1"/>
+          <p:nvPr/>
+        </p:nvSpPr>
+        <p:spPr>
+          <a:xfrm>
+            <a:off x="1143000" y="896112"/>
+            <a:ext cx="10424160" cy="365760"/>
+          </a:xfrm>
+          <a:prstGeom prst="rect">
+            <a:avLst/>
+          </a:prstGeom>
+          <a:noFill/>
+          <a:ln/>
+        </p:spPr>
+        <p:txBody>
+          <a:bodyPr wrap="square" rtlCol="0" anchor="ctr"/>
+          <a:lstStyle/>
+          <a:p>
+            <a:pPr indent="0" marL="0">
+              <a:buNone/>
+            </a:pPr>
+            <a:r>
+              <a:rPr lang="en-US" sz="1350" dirty="0">
+                <a:solidFill>
+                  <a:srgbClr val="CADCFC"/>
+                </a:solidFill>
+                <a:latin typeface="Calibri" pitchFamily="34" charset="0"/>
+                <a:ea typeface="Calibri" pitchFamily="34" charset="-122"/>
+                <a:cs typeface="Calibri" pitchFamily="34" charset="-120"/>
+              </a:rPr>
+              <a:t>依「投入成本 → 效益」排序，前兩項不需任何資本支出</a:t>
+            </a:r>
+            <a:endParaRPr lang="en-US" sz="1350" dirty="0"/>
+          </a:p>
+        </p:txBody>
+      </p:sp>
+      <p:sp>
+        <p:nvSpPr>
+          <p:cNvPr id="5" name="Shape 3"/>
+          <p:cNvSpPr/>
+          <p:nvPr/>
+        </p:nvSpPr>
+        <p:spPr>
+          <a:xfrm>
+            <a:off x="566928" y="1417320"/>
+            <a:ext cx="11018520" cy="1051560"/>
+          </a:xfrm>
+          <a:prstGeom prst="roundRect">
+            <a:avLst>
+              <a:gd name="adj" fmla="val 4348"/>
+            </a:avLst>
+          </a:prstGeom>
+          <a:solidFill>
+            <a:srgbClr val="17254C"/>
+          </a:solidFill>
+          <a:ln w="12700">
+            <a:solidFill>
+              <a:srgbClr val="17254C"/>
+            </a:solidFill>
+            <a:prstDash val="solid"/>
+          </a:ln>
+        </p:spPr>
+      </p:sp>
+      <p:sp>
+        <p:nvSpPr>
+          <p:cNvPr id="6" name="Shape 4"/>
+          <p:cNvSpPr/>
+          <p:nvPr/>
+        </p:nvSpPr>
+        <p:spPr>
+          <a:xfrm>
+            <a:off x="841248" y="1728216"/>
+            <a:ext cx="429768" cy="429768"/>
+          </a:xfrm>
+          <a:prstGeom prst="ellipse">
+            <a:avLst/>
+          </a:prstGeom>
+          <a:solidFill>
+            <a:srgbClr val="0F7B6C"/>
+          </a:solidFill>
+          <a:ln w="12700">
+            <a:solidFill>
+              <a:srgbClr val="0F7B6C"/>
+            </a:solidFill>
+            <a:prstDash val="solid"/>
+          </a:ln>
+        </p:spPr>
+      </p:sp>
+      <p:sp>
+        <p:nvSpPr>
+          <p:cNvPr id="7" name="Text 5"/>
+          <p:cNvSpPr txBox="1"/>
+          <p:nvPr/>
+        </p:nvSpPr>
+        <p:spPr>
+          <a:xfrm>
+            <a:off x="841248" y="1764792"/>
+            <a:ext cx="429768" cy="365760"/>
+          </a:xfrm>
+          <a:prstGeom prst="rect">
+            <a:avLst/>
+          </a:prstGeom>
+          <a:noFill/>
+          <a:ln/>
+        </p:spPr>
+        <p:txBody>
+          <a:bodyPr wrap="square" lIns="0" tIns="0" rIns="0" bIns="0" rtlCol="0" anchor="ctr"/>
+          <a:lstStyle/>
+          <a:p>
+            <a:pPr algn="ctr" indent="0" marL="0">
+              <a:buNone/>
+            </a:pPr>
+            <a:r>
+              <a:rPr lang="en-US" sz="1600" b="1" dirty="0">
+                <a:solidFill>
+                  <a:srgbClr val="FFFFFF"/>
+                </a:solidFill>
+                <a:latin typeface="Calibri" pitchFamily="34" charset="0"/>
+                <a:ea typeface="Calibri" pitchFamily="34" charset="-122"/>
+                <a:cs typeface="Calibri" pitchFamily="34" charset="-120"/>
+              </a:rPr>
+              <a:t>1</a:t>
+            </a:r>
+            <a:endParaRPr lang="en-US" sz="1600" dirty="0"/>
+          </a:p>
+        </p:txBody>
+      </p:sp>
+      <p:sp>
+        <p:nvSpPr>
+          <p:cNvPr id="8" name="Text 6"/>
+          <p:cNvSpPr txBox="1"/>
+          <p:nvPr/>
+        </p:nvSpPr>
+        <p:spPr>
+          <a:xfrm>
+            <a:off x="1481328" y="1600200"/>
+            <a:ext cx="6583680" cy="365760"/>
+          </a:xfrm>
+          <a:prstGeom prst="rect">
+            <a:avLst/>
+          </a:prstGeom>
+          <a:noFill/>
+          <a:ln/>
+        </p:spPr>
+        <p:txBody>
+          <a:bodyPr wrap="square" lIns="0" tIns="0" rIns="0" bIns="0" rtlCol="0" anchor="ctr"/>
+          <a:lstStyle/>
+          <a:p>
+            <a:pPr indent="0" marL="0">
+              <a:buNone/>
+            </a:pPr>
+            <a:r>
+              <a:rPr lang="en-US" sz="1700" b="1" dirty="0">
+                <a:solidFill>
+                  <a:srgbClr val="FFFFFF"/>
+                </a:solidFill>
+                <a:latin typeface="Calibri" pitchFamily="34" charset="0"/>
+                <a:ea typeface="Calibri" pitchFamily="34" charset="-122"/>
+                <a:cs typeface="Calibri" pitchFamily="34" charset="-120"/>
+              </a:rPr>
+              <a:t>排程法則改為「省改機優先」</a:t>
+            </a:r>
+            <a:endParaRPr lang="en-US" sz="1700" dirty="0"/>
+          </a:p>
+        </p:txBody>
+      </p:sp>
+      <p:sp>
+        <p:nvSpPr>
+          <p:cNvPr id="9" name="Text 7"/>
+          <p:cNvSpPr txBox="1"/>
+          <p:nvPr/>
+        </p:nvSpPr>
+        <p:spPr>
+          <a:xfrm>
+            <a:off x="1481328" y="1984248"/>
+            <a:ext cx="6583680" cy="347472"/>
+          </a:xfrm>
+          <a:prstGeom prst="rect">
+            <a:avLst/>
+          </a:prstGeom>
+          <a:noFill/>
+          <a:ln/>
+        </p:spPr>
+        <p:txBody>
+          <a:bodyPr wrap="square" lIns="0" tIns="0" rIns="0" bIns="0" rtlCol="0" anchor="ctr"/>
+          <a:lstStyle/>
+          <a:p>
+            <a:pPr indent="0" marL="0">
+              <a:buNone/>
+            </a:pPr>
+            <a:r>
+              <a:rPr lang="en-US" sz="1250" dirty="0">
+                <a:solidFill>
+                  <a:srgbClr val="A9BBDD"/>
+                </a:solidFill>
+                <a:latin typeface="Calibri" pitchFamily="34" charset="0"/>
+                <a:ea typeface="Calibri" pitchFamily="34" charset="-122"/>
+                <a:cs typeface="Calibri" pitchFamily="34" charset="-120"/>
+              </a:rPr>
+              <a:t>同機種串著跑，工程師被釋放後全廠少等</a:t>
+            </a:r>
+            <a:endParaRPr lang="en-US" sz="1250" dirty="0"/>
+          </a:p>
+        </p:txBody>
+      </p:sp>
+      <p:sp>
+        <p:nvSpPr>
+          <p:cNvPr id="10" name="Text 8"/>
+          <p:cNvSpPr txBox="1"/>
+          <p:nvPr/>
+        </p:nvSpPr>
+        <p:spPr>
+          <a:xfrm>
+            <a:off x="8321040" y="1728216"/>
+            <a:ext cx="3063240" cy="457200"/>
+          </a:xfrm>
+          <a:prstGeom prst="rect">
+            <a:avLst/>
+          </a:prstGeom>
+          <a:noFill/>
+          <a:ln/>
+        </p:spPr>
+        <p:txBody>
+          <a:bodyPr wrap="square" lIns="0" tIns="0" rIns="0" bIns="0" rtlCol="0" anchor="ctr"/>
+          <a:lstStyle/>
+          <a:p>
+            <a:pPr algn="r" indent="0" marL="0">
+              <a:buNone/>
+            </a:pPr>
+            <a:r>
+              <a:rPr lang="en-US" sz="1900" b="1" dirty="0">
+                <a:solidFill>
+                  <a:srgbClr val="0F7B6C"/>
+                </a:solidFill>
+                <a:latin typeface="Cambria" pitchFamily="34" charset="0"/>
+                <a:ea typeface="Cambria" pitchFamily="34" charset="-122"/>
+                <a:cs typeface="Cambria" pitchFamily="34" charset="-120"/>
+              </a:rPr>
+              <a:t>+41 萬顆／日</a:t>
+            </a:r>
+            <a:endParaRPr lang="en-US" sz="1900" dirty="0"/>
+          </a:p>
+        </p:txBody>
+      </p:sp>
+      <p:sp>
+        <p:nvSpPr>
+          <p:cNvPr id="11" name="Shape 9"/>
+          <p:cNvSpPr/>
+          <p:nvPr/>
+        </p:nvSpPr>
+        <p:spPr>
+          <a:xfrm>
+            <a:off x="566928" y="2587752"/>
+            <a:ext cx="11018520" cy="1051560"/>
+          </a:xfrm>
+          <a:prstGeom prst="roundRect">
+            <a:avLst>
+              <a:gd name="adj" fmla="val 4348"/>
+            </a:avLst>
+          </a:prstGeom>
+          <a:solidFill>
+            <a:srgbClr val="17254C"/>
+          </a:solidFill>
+          <a:ln w="12700">
+            <a:solidFill>
+              <a:srgbClr val="17254C"/>
+            </a:solidFill>
+            <a:prstDash val="solid"/>
+          </a:ln>
+        </p:spPr>
+      </p:sp>
+      <p:sp>
+        <p:nvSpPr>
+          <p:cNvPr id="12" name="Shape 10"/>
+          <p:cNvSpPr/>
+          <p:nvPr/>
+        </p:nvSpPr>
+        <p:spPr>
+          <a:xfrm>
+            <a:off x="841248" y="2898648"/>
+            <a:ext cx="429768" cy="429768"/>
+          </a:xfrm>
+          <a:prstGeom prst="ellipse">
+            <a:avLst/>
+          </a:prstGeom>
+          <a:solidFill>
+            <a:srgbClr val="0F7B6C"/>
+          </a:solidFill>
+          <a:ln w="12700">
+            <a:solidFill>
+              <a:srgbClr val="0F7B6C"/>
+            </a:solidFill>
+            <a:prstDash val="solid"/>
+          </a:ln>
+        </p:spPr>
+      </p:sp>
+      <p:sp>
+        <p:nvSpPr>
+          <p:cNvPr id="13" name="Text 11"/>
+          <p:cNvSpPr txBox="1"/>
+          <p:nvPr/>
+        </p:nvSpPr>
+        <p:spPr>
+          <a:xfrm>
+            <a:off x="841248" y="2935224"/>
+            <a:ext cx="429768" cy="365760"/>
+          </a:xfrm>
+          <a:prstGeom prst="rect">
+            <a:avLst/>
+          </a:prstGeom>
+          <a:noFill/>
+          <a:ln/>
+        </p:spPr>
+        <p:txBody>
+          <a:bodyPr wrap="square" lIns="0" tIns="0" rIns="0" bIns="0" rtlCol="0" anchor="ctr"/>
+          <a:lstStyle/>
+          <a:p>
+            <a:pPr algn="ctr" indent="0" marL="0">
+              <a:buNone/>
+            </a:pPr>
+            <a:r>
+              <a:rPr lang="en-US" sz="1600" b="1" dirty="0">
+                <a:solidFill>
+                  <a:srgbClr val="FFFFFF"/>
+                </a:solidFill>
+                <a:latin typeface="Calibri" pitchFamily="34" charset="0"/>
+                <a:ea typeface="Calibri" pitchFamily="34" charset="-122"/>
+                <a:cs typeface="Calibri" pitchFamily="34" charset="-120"/>
+              </a:rPr>
+              <a:t>2</a:t>
+            </a:r>
+            <a:endParaRPr lang="en-US" sz="1600" dirty="0"/>
+          </a:p>
+        </p:txBody>
+      </p:sp>
+      <p:sp>
+        <p:nvSpPr>
+          <p:cNvPr id="14" name="Text 12"/>
+          <p:cNvSpPr txBox="1"/>
+          <p:nvPr/>
+        </p:nvSpPr>
+        <p:spPr>
+          <a:xfrm>
+            <a:off x="1481328" y="2770632"/>
+            <a:ext cx="6583680" cy="365760"/>
+          </a:xfrm>
+          <a:prstGeom prst="rect">
+            <a:avLst/>
+          </a:prstGeom>
+          <a:noFill/>
+          <a:ln/>
+        </p:spPr>
+        <p:txBody>
+          <a:bodyPr wrap="square" lIns="0" tIns="0" rIns="0" bIns="0" rtlCol="0" anchor="ctr"/>
+          <a:lstStyle/>
+          <a:p>
+            <a:pPr indent="0" marL="0">
+              <a:buNone/>
+            </a:pPr>
+            <a:r>
+              <a:rPr lang="en-US" sz="1700" b="1" dirty="0">
+                <a:solidFill>
+                  <a:srgbClr val="FFFFFF"/>
+                </a:solidFill>
+                <a:latin typeface="Calibri" pitchFamily="34" charset="0"/>
+                <a:ea typeface="Calibri" pitchFamily="34" charset="-122"/>
+                <a:cs typeface="Calibri" pitchFamily="34" charset="-120"/>
+              </a:rPr>
+              <a:t>派工單不提前開，做完當下才決定</a:t>
+            </a:r>
+            <a:endParaRPr lang="en-US" sz="1700" dirty="0"/>
+          </a:p>
+        </p:txBody>
+      </p:sp>
+      <p:sp>
+        <p:nvSpPr>
+          <p:cNvPr id="15" name="Text 13"/>
+          <p:cNvSpPr txBox="1"/>
+          <p:nvPr/>
+        </p:nvSpPr>
+        <p:spPr>
+          <a:xfrm>
+            <a:off x="1481328" y="3154680"/>
+            <a:ext cx="6583680" cy="347472"/>
+          </a:xfrm>
+          <a:prstGeom prst="rect">
+            <a:avLst/>
+          </a:prstGeom>
+          <a:noFill/>
+          <a:ln/>
+        </p:spPr>
+        <p:txBody>
+          <a:bodyPr wrap="square" lIns="0" tIns="0" rIns="0" bIns="0" rtlCol="0" anchor="ctr"/>
+          <a:lstStyle/>
+          <a:p>
+            <a:pPr indent="0" marL="0">
+              <a:buNone/>
+            </a:pPr>
+            <a:r>
+              <a:rPr lang="en-US" sz="1250" dirty="0">
+                <a:solidFill>
+                  <a:srgbClr val="A9BBDD"/>
+                </a:solidFill>
+                <a:latin typeface="Calibri" pitchFamily="34" charset="0"/>
+                <a:ea typeface="Calibri" pitchFamily="34" charset="-122"/>
+                <a:cs typeface="Calibri" pitchFamily="34" charset="-120"/>
+              </a:rPr>
+              <a:t>取消預先押批，改為即時派工</a:t>
+            </a:r>
+            <a:endParaRPr lang="en-US" sz="1250" dirty="0"/>
+          </a:p>
+        </p:txBody>
+      </p:sp>
+      <p:sp>
+        <p:nvSpPr>
+          <p:cNvPr id="16" name="Text 14"/>
+          <p:cNvSpPr txBox="1"/>
+          <p:nvPr/>
+        </p:nvSpPr>
+        <p:spPr>
+          <a:xfrm>
+            <a:off x="8321040" y="2898648"/>
+            <a:ext cx="3063240" cy="457200"/>
+          </a:xfrm>
+          <a:prstGeom prst="rect">
+            <a:avLst/>
+          </a:prstGeom>
+          <a:noFill/>
+          <a:ln/>
+        </p:spPr>
+        <p:txBody>
+          <a:bodyPr wrap="square" lIns="0" tIns="0" rIns="0" bIns="0" rtlCol="0" anchor="ctr"/>
+          <a:lstStyle/>
+          <a:p>
+            <a:pPr algn="r" indent="0" marL="0">
+              <a:buNone/>
+            </a:pPr>
+            <a:r>
+              <a:rPr lang="en-US" sz="1900" b="1" dirty="0">
+                <a:solidFill>
+                  <a:srgbClr val="0F7B6C"/>
+                </a:solidFill>
+                <a:latin typeface="Cambria" pitchFamily="34" charset="0"/>
+                <a:ea typeface="Cambria" pitchFamily="34" charset="-122"/>
+                <a:cs typeface="Cambria" pitchFamily="34" charset="-120"/>
+              </a:rPr>
+              <a:t>+21 萬顆／日</a:t>
+            </a:r>
+            <a:endParaRPr lang="en-US" sz="1900" dirty="0"/>
+          </a:p>
+        </p:txBody>
+      </p:sp>
+      <p:sp>
+        <p:nvSpPr>
+          <p:cNvPr id="17" name="Shape 15"/>
+          <p:cNvSpPr/>
+          <p:nvPr/>
+        </p:nvSpPr>
+        <p:spPr>
+          <a:xfrm>
+            <a:off x="566928" y="3758184"/>
+            <a:ext cx="11018520" cy="1051560"/>
+          </a:xfrm>
+          <a:prstGeom prst="roundRect">
+            <a:avLst>
+              <a:gd name="adj" fmla="val 4348"/>
+            </a:avLst>
+          </a:prstGeom>
+          <a:solidFill>
+            <a:srgbClr val="17254C"/>
+          </a:solidFill>
+          <a:ln w="12700">
+            <a:solidFill>
+              <a:srgbClr val="17254C"/>
+            </a:solidFill>
+            <a:prstDash val="solid"/>
+          </a:ln>
+        </p:spPr>
+      </p:sp>
+      <p:sp>
+        <p:nvSpPr>
+          <p:cNvPr id="18" name="Shape 16"/>
+          <p:cNvSpPr/>
+          <p:nvPr/>
+        </p:nvSpPr>
+        <p:spPr>
+          <a:xfrm>
+            <a:off x="841248" y="4069080"/>
+            <a:ext cx="429768" cy="429768"/>
+          </a:xfrm>
+          <a:prstGeom prst="ellipse">
+            <a:avLst/>
+          </a:prstGeom>
+          <a:solidFill>
+            <a:srgbClr val="1C7293"/>
+          </a:solidFill>
+          <a:ln w="12700">
+            <a:solidFill>
+              <a:srgbClr val="1C7293"/>
+            </a:solidFill>
+            <a:prstDash val="solid"/>
+          </a:ln>
+        </p:spPr>
+      </p:sp>
+      <p:sp>
+        <p:nvSpPr>
+          <p:cNvPr id="19" name="Text 17"/>
+          <p:cNvSpPr txBox="1"/>
+          <p:nvPr/>
+        </p:nvSpPr>
+        <p:spPr>
+          <a:xfrm>
+            <a:off x="841248" y="4105656"/>
+            <a:ext cx="429768" cy="365760"/>
+          </a:xfrm>
+          <a:prstGeom prst="rect">
+            <a:avLst/>
+          </a:prstGeom>
+          <a:noFill/>
+          <a:ln/>
+        </p:spPr>
+        <p:txBody>
+          <a:bodyPr wrap="square" lIns="0" tIns="0" rIns="0" bIns="0" rtlCol="0" anchor="ctr"/>
+          <a:lstStyle/>
+          <a:p>
+            <a:pPr algn="ctr" indent="0" marL="0">
+              <a:buNone/>
+            </a:pPr>
+            <a:r>
+              <a:rPr lang="en-US" sz="1600" b="1" dirty="0">
+                <a:solidFill>
+                  <a:srgbClr val="FFFFFF"/>
+                </a:solidFill>
+                <a:latin typeface="Calibri" pitchFamily="34" charset="0"/>
+                <a:ea typeface="Calibri" pitchFamily="34" charset="-122"/>
+                <a:cs typeface="Calibri" pitchFamily="34" charset="-120"/>
+              </a:rPr>
+              <a:t>3</a:t>
+            </a:r>
+            <a:endParaRPr lang="en-US" sz="1600" dirty="0"/>
+          </a:p>
+        </p:txBody>
+      </p:sp>
+      <p:sp>
+        <p:nvSpPr>
+          <p:cNvPr id="20" name="Text 18"/>
+          <p:cNvSpPr txBox="1"/>
+          <p:nvPr/>
+        </p:nvSpPr>
+        <p:spPr>
+          <a:xfrm>
+            <a:off x="1481328" y="3941064"/>
+            <a:ext cx="6583680" cy="365760"/>
+          </a:xfrm>
+          <a:prstGeom prst="rect">
+            <a:avLst/>
+          </a:prstGeom>
+          <a:noFill/>
+          <a:ln/>
+        </p:spPr>
+        <p:txBody>
+          <a:bodyPr wrap="square" lIns="0" tIns="0" rIns="0" bIns="0" rtlCol="0" anchor="ctr"/>
+          <a:lstStyle/>
+          <a:p>
+            <a:pPr indent="0" marL="0">
+              <a:buNone/>
+            </a:pPr>
+            <a:r>
+              <a:rPr lang="en-US" sz="1700" b="1" dirty="0">
+                <a:solidFill>
+                  <a:srgbClr val="FFFFFF"/>
+                </a:solidFill>
+                <a:latin typeface="Calibri" pitchFamily="34" charset="0"/>
+                <a:ea typeface="Calibri" pitchFamily="34" charset="-122"/>
+                <a:cs typeface="Calibri" pitchFamily="34" charset="-120"/>
+              </a:rPr>
+              <a:t>工程師由 8 人補至 10 人（1:2.5）</a:t>
+            </a:r>
+            <a:endParaRPr lang="en-US" sz="1700" dirty="0"/>
+          </a:p>
+        </p:txBody>
+      </p:sp>
+      <p:sp>
+        <p:nvSpPr>
+          <p:cNvPr id="21" name="Text 19"/>
+          <p:cNvSpPr txBox="1"/>
+          <p:nvPr/>
+        </p:nvSpPr>
+        <p:spPr>
+          <a:xfrm>
+            <a:off x="1481328" y="4325112"/>
+            <a:ext cx="6583680" cy="347472"/>
+          </a:xfrm>
+          <a:prstGeom prst="rect">
+            <a:avLst/>
+          </a:prstGeom>
+          <a:noFill/>
+          <a:ln/>
+        </p:spPr>
+        <p:txBody>
+          <a:bodyPr wrap="square" lIns="0" tIns="0" rIns="0" bIns="0" rtlCol="0" anchor="ctr"/>
+          <a:lstStyle/>
+          <a:p>
+            <a:pPr indent="0" marL="0">
+              <a:buNone/>
+            </a:pPr>
+            <a:r>
+              <a:rPr lang="en-US" sz="1250" dirty="0">
+                <a:solidFill>
+                  <a:srgbClr val="A9BBDD"/>
+                </a:solidFill>
+                <a:latin typeface="Calibri" pitchFamily="34" charset="0"/>
+                <a:ea typeface="Calibri" pitchFamily="34" charset="-122"/>
+                <a:cs typeface="Calibri" pitchFamily="34" charset="-120"/>
+              </a:rPr>
+              <a:t>8 人時有 14.4% 的機台時間在停等</a:t>
+            </a:r>
+            <a:endParaRPr lang="en-US" sz="1250" dirty="0"/>
+          </a:p>
+        </p:txBody>
+      </p:sp>
+      <p:sp>
+        <p:nvSpPr>
+          <p:cNvPr id="22" name="Text 20"/>
+          <p:cNvSpPr txBox="1"/>
+          <p:nvPr/>
+        </p:nvSpPr>
+        <p:spPr>
+          <a:xfrm>
+            <a:off x="8321040" y="4069080"/>
+            <a:ext cx="3063240" cy="457200"/>
+          </a:xfrm>
+          <a:prstGeom prst="rect">
+            <a:avLst/>
+          </a:prstGeom>
+          <a:noFill/>
+          <a:ln/>
+        </p:spPr>
+        <p:txBody>
+          <a:bodyPr wrap="square" lIns="0" tIns="0" rIns="0" bIns="0" rtlCol="0" anchor="ctr"/>
+          <a:lstStyle/>
+          <a:p>
+            <a:pPr algn="r" indent="0" marL="0">
+              <a:buNone/>
+            </a:pPr>
+            <a:r>
+              <a:rPr lang="en-US" sz="1900" b="1" dirty="0">
+                <a:solidFill>
+                  <a:srgbClr val="1C7293"/>
+                </a:solidFill>
+                <a:latin typeface="Cambria" pitchFamily="34" charset="0"/>
+                <a:ea typeface="Cambria" pitchFamily="34" charset="-122"/>
+                <a:cs typeface="Cambria" pitchFamily="34" charset="-120"/>
+              </a:rPr>
+              <a:t>+7 萬顆／日</a:t>
+            </a:r>
+            <a:endParaRPr lang="en-US" sz="1900" dirty="0"/>
+          </a:p>
+        </p:txBody>
+      </p:sp>
+      <p:sp>
+        <p:nvSpPr>
+          <p:cNvPr id="23" name="Shape 21"/>
+          <p:cNvSpPr/>
+          <p:nvPr/>
+        </p:nvSpPr>
+        <p:spPr>
+          <a:xfrm>
+            <a:off x="566928" y="4928616"/>
+            <a:ext cx="11018520" cy="1051560"/>
+          </a:xfrm>
+          <a:prstGeom prst="roundRect">
+            <a:avLst>
+              <a:gd name="adj" fmla="val 4348"/>
+            </a:avLst>
+          </a:prstGeom>
+          <a:solidFill>
+            <a:srgbClr val="17254C"/>
+          </a:solidFill>
+          <a:ln w="12700">
+            <a:solidFill>
+              <a:srgbClr val="17254C"/>
+            </a:solidFill>
+            <a:prstDash val="solid"/>
+          </a:ln>
+        </p:spPr>
+      </p:sp>
+      <p:sp>
+        <p:nvSpPr>
+          <p:cNvPr id="24" name="Shape 22"/>
+          <p:cNvSpPr/>
+          <p:nvPr/>
+        </p:nvSpPr>
+        <p:spPr>
+          <a:xfrm>
+            <a:off x="841248" y="5239512"/>
+            <a:ext cx="429768" cy="429768"/>
+          </a:xfrm>
+          <a:prstGeom prst="ellipse">
+            <a:avLst/>
+          </a:prstGeom>
+          <a:solidFill>
+            <a:srgbClr val="1C7293"/>
+          </a:solidFill>
+          <a:ln w="12700">
+            <a:solidFill>
+              <a:srgbClr val="1C7293"/>
+            </a:solidFill>
+            <a:prstDash val="solid"/>
+          </a:ln>
+        </p:spPr>
+      </p:sp>
+      <p:sp>
+        <p:nvSpPr>
+          <p:cNvPr id="25" name="Text 23"/>
+          <p:cNvSpPr txBox="1"/>
+          <p:nvPr/>
+        </p:nvSpPr>
+        <p:spPr>
+          <a:xfrm>
+            <a:off x="841248" y="5276088"/>
+            <a:ext cx="429768" cy="365760"/>
+          </a:xfrm>
+          <a:prstGeom prst="rect">
+            <a:avLst/>
+          </a:prstGeom>
+          <a:noFill/>
+          <a:ln/>
+        </p:spPr>
+        <p:txBody>
+          <a:bodyPr wrap="square" lIns="0" tIns="0" rIns="0" bIns="0" rtlCol="0" anchor="ctr"/>
+          <a:lstStyle/>
+          <a:p>
+            <a:pPr algn="ctr" indent="0" marL="0">
+              <a:buNone/>
+            </a:pPr>
+            <a:r>
+              <a:rPr lang="en-US" sz="1600" b="1" dirty="0">
+                <a:solidFill>
+                  <a:srgbClr val="FFFFFF"/>
+                </a:solidFill>
+                <a:latin typeface="Calibri" pitchFamily="34" charset="0"/>
+                <a:ea typeface="Calibri" pitchFamily="34" charset="-122"/>
+                <a:cs typeface="Calibri" pitchFamily="34" charset="-120"/>
+              </a:rPr>
+              <a:t>4</a:t>
+            </a:r>
+            <a:endParaRPr lang="en-US" sz="1600" dirty="0"/>
+          </a:p>
+        </p:txBody>
+      </p:sp>
+      <p:sp>
+        <p:nvSpPr>
+          <p:cNvPr id="26" name="Text 24"/>
+          <p:cNvSpPr txBox="1"/>
+          <p:nvPr/>
+        </p:nvSpPr>
+        <p:spPr>
+          <a:xfrm>
+            <a:off x="1481328" y="5111496"/>
+            <a:ext cx="6583680" cy="365760"/>
+          </a:xfrm>
+          <a:prstGeom prst="rect">
+            <a:avLst/>
+          </a:prstGeom>
+          <a:noFill/>
+          <a:ln/>
+        </p:spPr>
+        <p:txBody>
+          <a:bodyPr wrap="square" lIns="0" tIns="0" rIns="0" bIns="0" rtlCol="0" anchor="ctr"/>
+          <a:lstStyle/>
+          <a:p>
+            <a:pPr indent="0" marL="0">
+              <a:buNone/>
+            </a:pPr>
+            <a:r>
+              <a:rPr lang="en-US" sz="1700" b="1" dirty="0">
+                <a:solidFill>
+                  <a:srgbClr val="FFFFFF"/>
+                </a:solidFill>
+                <a:latin typeface="Calibri" pitchFamily="34" charset="0"/>
+                <a:ea typeface="Calibri" pitchFamily="34" charset="-122"/>
+                <a:cs typeface="Calibri" pitchFamily="34" charset="-120"/>
+              </a:rPr>
+              <a:t>縮短換程式時間 30→15 分</a:t>
+            </a:r>
+            <a:endParaRPr lang="en-US" sz="1700" dirty="0"/>
+          </a:p>
+        </p:txBody>
+      </p:sp>
+      <p:sp>
+        <p:nvSpPr>
+          <p:cNvPr id="27" name="Text 25"/>
+          <p:cNvSpPr txBox="1"/>
+          <p:nvPr/>
+        </p:nvSpPr>
+        <p:spPr>
+          <a:xfrm>
+            <a:off x="1481328" y="5495544"/>
+            <a:ext cx="6583680" cy="347472"/>
+          </a:xfrm>
+          <a:prstGeom prst="rect">
+            <a:avLst/>
+          </a:prstGeom>
+          <a:noFill/>
+          <a:ln/>
+        </p:spPr>
+        <p:txBody>
+          <a:bodyPr wrap="square" lIns="0" tIns="0" rIns="0" bIns="0" rtlCol="0" anchor="ctr"/>
+          <a:lstStyle/>
+          <a:p>
+            <a:pPr indent="0" marL="0">
+              <a:buNone/>
+            </a:pPr>
+            <a:r>
+              <a:rPr lang="en-US" sz="1250" dirty="0">
+                <a:solidFill>
+                  <a:srgbClr val="A9BBDD"/>
+                </a:solidFill>
+                <a:latin typeface="Calibri" pitchFamily="34" charset="0"/>
+                <a:ea typeface="Calibri" pitchFamily="34" charset="-122"/>
+                <a:cs typeface="Calibri" pitchFamily="34" charset="-120"/>
+              </a:rPr>
+              <a:t>一天 213 次，槓桿最大的工程改善</a:t>
+            </a:r>
+            <a:endParaRPr lang="en-US" sz="1250" dirty="0"/>
+          </a:p>
+        </p:txBody>
+      </p:sp>
+      <p:sp>
+        <p:nvSpPr>
+          <p:cNvPr id="28" name="Text 26"/>
+          <p:cNvSpPr txBox="1"/>
+          <p:nvPr/>
+        </p:nvSpPr>
+        <p:spPr>
+          <a:xfrm>
+            <a:off x="8321040" y="5239512"/>
+            <a:ext cx="3063240" cy="457200"/>
+          </a:xfrm>
+          <a:prstGeom prst="rect">
+            <a:avLst/>
+          </a:prstGeom>
+          <a:noFill/>
+          <a:ln/>
+        </p:spPr>
+        <p:txBody>
+          <a:bodyPr wrap="square" lIns="0" tIns="0" rIns="0" bIns="0" rtlCol="0" anchor="ctr"/>
+          <a:lstStyle/>
+          <a:p>
+            <a:pPr algn="r" indent="0" marL="0">
+              <a:buNone/>
+            </a:pPr>
+            <a:r>
+              <a:rPr lang="en-US" sz="1900" b="1" dirty="0">
+                <a:solidFill>
+                  <a:srgbClr val="1C7293"/>
+                </a:solidFill>
+                <a:latin typeface="Cambria" pitchFamily="34" charset="0"/>
+                <a:ea typeface="Cambria" pitchFamily="34" charset="-122"/>
+                <a:cs typeface="Cambria" pitchFamily="34" charset="-120"/>
+              </a:rPr>
+              <a:t>+3 萬顆／日</a:t>
+            </a:r>
+            <a:endParaRPr lang="en-US" sz="1900" dirty="0"/>
+          </a:p>
+        </p:txBody>
+      </p:sp>
+      <p:sp>
+        <p:nvSpPr>
+          <p:cNvPr id="29" name="Text 27"/>
+          <p:cNvSpPr txBox="1"/>
+          <p:nvPr/>
+        </p:nvSpPr>
+        <p:spPr>
+          <a:xfrm>
+            <a:off x="566928" y="6035040"/>
+            <a:ext cx="11018520" cy="310896"/>
+          </a:xfrm>
+          <a:prstGeom prst="rect">
+            <a:avLst/>
+          </a:prstGeom>
+          <a:noFill/>
+          <a:ln/>
+        </p:spPr>
+        <p:txBody>
+          <a:bodyPr wrap="square" rtlCol="0" anchor="ctr"/>
+          <a:lstStyle/>
+          <a:p>
+            <a:pPr algn="ctr" indent="0" marL="0">
+              <a:buNone/>
+            </a:pPr>
+            <a:r>
+              <a:rPr lang="en-US" sz="1300" dirty="0">
+                <a:solidFill>
+                  <a:srgbClr val="CADCFC"/>
+                </a:solidFill>
+                <a:latin typeface="Calibri" pitchFamily="34" charset="0"/>
+                <a:ea typeface="Calibri" pitchFamily="34" charset="-122"/>
+                <a:cs typeface="Calibri" pitchFamily="34" charset="-120"/>
+              </a:rPr>
+              <a:t>四項全做：每日良品 77 萬 → 148 萬顆（+93%），逾期批數 220 批 → 2 批以下</a:t>
+            </a:r>
+            <a:endParaRPr lang="en-US" sz="1300" dirty="0"/>
+          </a:p>
+        </p:txBody>
+      </p:sp>
+      <p:sp>
+        <p:nvSpPr>
+          <p:cNvPr id="30" name="Text 28"/>
+          <p:cNvSpPr txBox="1"/>
+          <p:nvPr/>
+        </p:nvSpPr>
+        <p:spPr>
+          <a:xfrm>
+            <a:off x="566928" y="6345936"/>
+            <a:ext cx="11018520" cy="310896"/>
+          </a:xfrm>
+          <a:prstGeom prst="rect">
+            <a:avLst/>
+          </a:prstGeom>
+          <a:noFill/>
+          <a:ln/>
+        </p:spPr>
+        <p:txBody>
+          <a:bodyPr wrap="square" rtlCol="0" anchor="ctr"/>
+          <a:lstStyle/>
+          <a:p>
+            <a:pPr algn="ctr" indent="0" marL="0">
+              <a:buNone/>
+            </a:pPr>
+            <a:r>
+              <a:rPr lang="en-US" sz="1150" dirty="0">
+                <a:solidFill>
+                  <a:srgbClr val="A9BBDD"/>
+                </a:solidFill>
+                <a:latin typeface="Calibri" pitchFamily="34" charset="0"/>
+                <a:ea typeface="Calibri" pitchFamily="34" charset="-122"/>
+                <a:cs typeface="Calibri" pitchFamily="34" charset="-120"/>
+              </a:rPr>
+              <a:t>但第 1 項有前提：省改機是「人力吃緊」時的最佳解。人補到 1:2.5 之後，改用「大批給快機」更快——夜班與白班人數不同，規則就該不同。</a:t>
+            </a:r>
+            <a:endParaRPr lang="en-US" sz="1150" dirty="0"/>
+          </a:p>
+        </p:txBody>
+      </p:sp>
+    </p:spTree>
+  </p:cSld>
+  <p:clrMapOvr>
+    <a:masterClrMapping/>
+  </p:clrMapOvr>
+</p:sld>
+</file>
+
+<file path=ppt/slides/slide13.xml><?xml version="1.0" encoding="utf-8"?>
+<p:sld xmlns:a="http://schemas.openxmlformats.org/drawingml/2006/main" xmlns:r="http://schemas.openxmlformats.org/officeDocument/2006/relationships" xmlns:p="http://schemas.openxmlformats.org/presentationml/2006/main">
+  <p:cSld name="Slide 13">
+    <p:spTree>
+      <p:nvGrpSpPr>
+        <p:cNvPr id="1" name=""/>
+        <p:cNvGrpSpPr/>
+        <p:nvPr/>
+      </p:nvGrpSpPr>
+      <p:grpSpPr>
+        <a:xfrm>
+          <a:off x="0" y="0"/>
+          <a:ext cx="0" cy="0"/>
+          <a:chOff x="0" y="0"/>
+          <a:chExt cx="0" cy="0"/>
+        </a:xfrm>
+      </p:grpSpPr>
+      <p:sp>
+        <p:nvSpPr>
+          <p:cNvPr id="2" name="Text 0"/>
+          <p:cNvSpPr txBox="1"/>
+          <p:nvPr/>
+        </p:nvSpPr>
+        <p:spPr>
+          <a:xfrm>
+            <a:off x="566928" y="384048"/>
+            <a:ext cx="502920" cy="457200"/>
+          </a:xfrm>
+          <a:prstGeom prst="rect">
+            <a:avLst/>
+          </a:prstGeom>
+          <a:noFill/>
+          <a:ln/>
+        </p:spPr>
+        <p:txBody>
+          <a:bodyPr wrap="square" rtlCol="0" anchor="ctr"/>
+          <a:lstStyle/>
+          <a:p>
+            <a:pPr indent="0" marL="0">
+              <a:buNone/>
+            </a:pPr>
+            <a:r>
+              <a:rPr lang="en-US" sz="1300" b="1" dirty="0">
+                <a:solidFill>
+                  <a:srgbClr val="1C7293"/>
+                </a:solidFill>
+                <a:latin typeface="Calibri" pitchFamily="34" charset="0"/>
+                <a:ea typeface="Calibri" pitchFamily="34" charset="-122"/>
+                <a:cs typeface="Calibri" pitchFamily="34" charset="-120"/>
+              </a:rPr>
+              <a:t>12</a:t>
+            </a:r>
+            <a:endParaRPr lang="en-US" sz="1300" dirty="0"/>
+          </a:p>
+        </p:txBody>
+      </p:sp>
+      <p:sp>
+        <p:nvSpPr>
+          <p:cNvPr id="3" name="Text 1"/>
+          <p:cNvSpPr txBox="1"/>
+          <p:nvPr/>
+        </p:nvSpPr>
+        <p:spPr>
+          <a:xfrm>
+            <a:off x="1143000" y="310896"/>
+            <a:ext cx="10424160" cy="566928"/>
+          </a:xfrm>
+          <a:prstGeom prst="rect">
+            <a:avLst/>
+          </a:prstGeom>
+          <a:noFill/>
+          <a:ln/>
+        </p:spPr>
+        <p:txBody>
+          <a:bodyPr wrap="square" rtlCol="0" anchor="ctr"/>
+          <a:lstStyle/>
+          <a:p>
+            <a:pPr indent="0" marL="0">
+              <a:buNone/>
+            </a:pPr>
+            <a:r>
+              <a:rPr lang="en-US" sz="3000" b="1" dirty="0">
+                <a:solidFill>
+                  <a:srgbClr val="1E2761"/>
+                </a:solidFill>
+                <a:latin typeface="Cambria" pitchFamily="34" charset="0"/>
+                <a:ea typeface="Cambria" pitchFamily="34" charset="-122"/>
+                <a:cs typeface="Cambria" pitchFamily="34" charset="-120"/>
+              </a:rPr>
+              <a:t>實施路徑、追蹤指標與模型限制</a:t>
+            </a:r>
+            <a:endParaRPr lang="en-US" sz="3000" dirty="0"/>
+          </a:p>
+        </p:txBody>
+      </p:sp>
+      <p:sp>
+        <p:nvSpPr>
+          <p:cNvPr id="4" name="Text 2"/>
+          <p:cNvSpPr txBox="1"/>
+          <p:nvPr/>
+        </p:nvSpPr>
+        <p:spPr>
+          <a:xfrm>
+            <a:off x="1143000" y="896112"/>
+            <a:ext cx="10424160" cy="384048"/>
+          </a:xfrm>
+          <a:prstGeom prst="rect">
+            <a:avLst/>
+          </a:prstGeom>
+          <a:noFill/>
+          <a:ln/>
+        </p:spPr>
+        <p:txBody>
+          <a:bodyPr wrap="square" rtlCol="0" anchor="ctr"/>
+          <a:lstStyle/>
+          <a:p>
+            <a:pPr indent="0" marL="0">
+              <a:buNone/>
+            </a:pPr>
+            <a:r>
+              <a:rPr lang="en-US" sz="1350" dirty="0">
+                <a:solidFill>
+                  <a:srgbClr val="5A6785"/>
+                </a:solidFill>
+                <a:latin typeface="Calibri" pitchFamily="34" charset="0"/>
+                <a:ea typeface="Calibri" pitchFamily="34" charset="-122"/>
+                <a:cs typeface="Calibri" pitchFamily="34" charset="-120"/>
+              </a:rPr>
+              <a:t>建議以四週為一個驗證循環，每一步都有可量測的指標</a:t>
+            </a:r>
+            <a:endParaRPr lang="en-US" sz="1350" dirty="0"/>
+          </a:p>
+        </p:txBody>
+      </p:sp>
+      <p:sp>
+        <p:nvSpPr>
+          <p:cNvPr id="5" name="Shape 3"/>
+          <p:cNvSpPr/>
+          <p:nvPr/>
+        </p:nvSpPr>
+        <p:spPr>
+          <a:xfrm>
+            <a:off x="566928" y="1417320"/>
+            <a:ext cx="2670048" cy="2395728"/>
+          </a:xfrm>
+          <a:prstGeom prst="roundRect">
+            <a:avLst>
+              <a:gd name="adj" fmla="val 1908"/>
+            </a:avLst>
+          </a:prstGeom>
+          <a:solidFill>
+            <a:srgbClr val="F5F7FB"/>
+          </a:solidFill>
+          <a:ln w="12700">
+            <a:solidFill>
+              <a:srgbClr val="FFFFFF"/>
+            </a:solidFill>
+            <a:prstDash val="solid"/>
+          </a:ln>
+        </p:spPr>
+      </p:sp>
+      <p:sp>
+        <p:nvSpPr>
           <p:cNvPr id="6" name="Shape 4"/>
           <p:cNvSpPr/>
           <p:nvPr/>
@@ -3325,8 +4749,8 @@
         </p:nvSpPr>
         <p:spPr>
           <a:xfrm>
-            <a:off x="795528" y="3255264"/>
-            <a:ext cx="2240280" cy="566928"/>
+            <a:off x="795528" y="3200400"/>
+            <a:ext cx="2240280" cy="530352"/>
           </a:xfrm>
           <a:prstGeom prst="rect">
             <a:avLst/>
@@ -3368,11 +4792,11 @@
         <p:spPr>
           <a:xfrm>
             <a:off x="3419856" y="1417320"/>
-            <a:ext cx="2670048" cy="2560320"/>
+            <a:ext cx="2670048" cy="2395728"/>
           </a:xfrm>
           <a:prstGeom prst="roundRect">
             <a:avLst>
-              <a:gd name="adj" fmla="val 1786"/>
+              <a:gd name="adj" fmla="val 1908"/>
             </a:avLst>
           </a:prstGeom>
           <a:solidFill>
@@ -3578,8 +5002,8 @@
         </p:nvSpPr>
         <p:spPr>
           <a:xfrm>
-            <a:off x="3648456" y="3255264"/>
-            <a:ext cx="2240280" cy="566928"/>
+            <a:off x="3648456" y="3200400"/>
+            <a:ext cx="2240280" cy="530352"/>
           </a:xfrm>
           <a:prstGeom prst="rect">
             <a:avLst/>
@@ -3621,11 +5045,11 @@
         <p:spPr>
           <a:xfrm>
             <a:off x="6272784" y="1417320"/>
-            <a:ext cx="2670048" cy="2560320"/>
+            <a:ext cx="2670048" cy="2395728"/>
           </a:xfrm>
           <a:prstGeom prst="roundRect">
             <a:avLst>
-              <a:gd name="adj" fmla="val 1786"/>
+              <a:gd name="adj" fmla="val 1908"/>
             </a:avLst>
           </a:prstGeom>
           <a:solidFill>
@@ -3831,8 +5255,8 @@
         </p:nvSpPr>
         <p:spPr>
           <a:xfrm>
-            <a:off x="6501384" y="3255264"/>
-            <a:ext cx="2240280" cy="566928"/>
+            <a:off x="6501384" y="3200400"/>
+            <a:ext cx="2240280" cy="530352"/>
           </a:xfrm>
           <a:prstGeom prst="rect">
             <a:avLst/>
@@ -3874,11 +5298,11 @@
         <p:spPr>
           <a:xfrm>
             <a:off x="9125712" y="1417320"/>
-            <a:ext cx="2670048" cy="2560320"/>
+            <a:ext cx="2670048" cy="2395728"/>
           </a:xfrm>
           <a:prstGeom prst="roundRect">
             <a:avLst>
-              <a:gd name="adj" fmla="val 1786"/>
+              <a:gd name="adj" fmla="val 1908"/>
             </a:avLst>
           </a:prstGeom>
           <a:solidFill>
@@ -4084,8 +5508,8 @@
         </p:nvSpPr>
         <p:spPr>
           <a:xfrm>
-            <a:off x="9354312" y="3255264"/>
-            <a:ext cx="2240280" cy="566928"/>
+            <a:off x="9354312" y="3200400"/>
+            <a:ext cx="2240280" cy="530352"/>
           </a:xfrm>
           <a:prstGeom prst="rect">
             <a:avLst/>
@@ -4126,12 +5550,12 @@
         </p:nvSpPr>
         <p:spPr>
           <a:xfrm>
-            <a:off x="566928" y="4133088"/>
-            <a:ext cx="5486400" cy="1920240"/>
+            <a:off x="566928" y="3968496"/>
+            <a:ext cx="5486400" cy="2157984"/>
           </a:xfrm>
           <a:prstGeom prst="roundRect">
             <a:avLst>
-              <a:gd name="adj" fmla="val 2381"/>
+              <a:gd name="adj" fmla="val 2119"/>
             </a:avLst>
           </a:prstGeom>
           <a:solidFill>
@@ -4153,7 +5577,7 @@
         </p:nvSpPr>
         <p:spPr>
           <a:xfrm>
-            <a:off x="804672" y="4389120"/>
+            <a:off x="804672" y="4224528"/>
             <a:ext cx="146304" cy="146304"/>
           </a:xfrm>
           <a:prstGeom prst="ellipse">
@@ -4178,7 +5602,7 @@
         </p:nvSpPr>
         <p:spPr>
           <a:xfrm>
-            <a:off x="1060704" y="4288536"/>
+            <a:off x="1060704" y="4123944"/>
             <a:ext cx="4754880" cy="329184"/>
           </a:xfrm>
           <a:prstGeom prst="rect">
@@ -4217,8 +5641,8 @@
         </p:nvSpPr>
         <p:spPr>
           <a:xfrm>
-            <a:off x="1060704" y="4645152"/>
-            <a:ext cx="4754880" cy="1316736"/>
+            <a:off x="1060704" y="4480560"/>
+            <a:ext cx="4754880" cy="1554480"/>
           </a:xfrm>
           <a:prstGeom prst="rect">
             <a:avLst/>
@@ -4335,12 +5759,12 @@
         </p:nvSpPr>
         <p:spPr>
           <a:xfrm>
-            <a:off x="6172200" y="4133088"/>
-            <a:ext cx="5413248" cy="1920240"/>
+            <a:off x="6172200" y="3968496"/>
+            <a:ext cx="5413248" cy="2157984"/>
           </a:xfrm>
           <a:prstGeom prst="roundRect">
             <a:avLst>
-              <a:gd name="adj" fmla="val 2381"/>
+              <a:gd name="adj" fmla="val 2119"/>
             </a:avLst>
           </a:prstGeom>
           <a:solidFill>
@@ -4362,7 +5786,7 @@
         </p:nvSpPr>
         <p:spPr>
           <a:xfrm>
-            <a:off x="6409944" y="4389120"/>
+            <a:off x="6409944" y="4224528"/>
             <a:ext cx="146304" cy="146304"/>
           </a:xfrm>
           <a:prstGeom prst="ellipse">
@@ -4387,7 +5811,7 @@
         </p:nvSpPr>
         <p:spPr>
           <a:xfrm>
-            <a:off x="6665976" y="4288536"/>
+            <a:off x="6665976" y="4123944"/>
             <a:ext cx="4681728" cy="329184"/>
           </a:xfrm>
           <a:prstGeom prst="rect">
@@ -4426,8 +5850,8 @@
         </p:nvSpPr>
         <p:spPr>
           <a:xfrm>
-            <a:off x="6665976" y="4645152"/>
-            <a:ext cx="4681728" cy="1316736"/>
+            <a:off x="6665976" y="4480560"/>
+            <a:ext cx="4681728" cy="1554480"/>
           </a:xfrm>
           <a:prstGeom prst="rect">
             <a:avLst/>
@@ -4458,7 +5882,7 @@
                 <a:ea typeface="Calibri" pitchFamily="34" charset="-122"/>
                 <a:cs typeface="Calibri" pitchFamily="34" charset="-120"/>
               </a:rPr>
-              <a:t>每台機實際日完成批數（核對稼動率 46.7%）</a:t>
+              <a:t>實際的 WIP 清單（第 9~10 頁用模擬資料）</a:t>
             </a:r>
             <a:endParaRPr lang="en-US" sz="1200" dirty="0"/>
           </a:p>
@@ -4482,7 +5906,7 @@
                 <a:ea typeface="Calibri" pitchFamily="34" charset="-122"/>
                 <a:cs typeface="Calibri" pitchFamily="34" charset="-120"/>
               </a:rPr>
-              <a:t>逾期一批的真實違約成本（現以 20,000 代入）</a:t>
+              <a:t>每台機實際日完成批數（核對稼動率 46.7%）</a:t>
             </a:r>
             <a:endParaRPr lang="en-US" sz="1200" dirty="0"/>
           </a:p>
@@ -4506,6 +5930,30 @@
                 <a:ea typeface="Calibri" pitchFamily="34" charset="-122"/>
                 <a:cs typeface="Calibri" pitchFamily="34" charset="-120"/>
               </a:rPr>
+              <a:t>逾期一批的真實違約成本（現以 20,000 代入）</a:t>
+            </a:r>
+            <a:endParaRPr lang="en-US" sz="1200" dirty="0"/>
+          </a:p>
+          <a:p>
+            <a:pPr marL="342900" indent="-342900">
+              <a:lnSpc>
+                <a:spcPts val="1800"/>
+              </a:lnSpc>
+              <a:spcAft>
+                <a:spcPts val="400"/>
+              </a:spcAft>
+              <a:buSzPct val="100000"/>
+              <a:buChar char="•"/>
+            </a:pPr>
+            <a:r>
+              <a:rPr lang="en-US" sz="1200" dirty="0">
+                <a:solidFill>
+                  <a:srgbClr val="16213E"/>
+                </a:solidFill>
+                <a:latin typeface="Calibri" pitchFamily="34" charset="0"/>
+                <a:ea typeface="Calibri" pitchFamily="34" charset="-122"/>
+                <a:cs typeface="Calibri" pitchFamily="34" charset="-120"/>
+              </a:rPr>
               <a:t>換程式是否一律由工程師執行——若由操作員執行，人力需求可由 10 人降至 5～6 人</a:t>
             </a:r>
             <a:endParaRPr lang="en-US" sz="1200" dirty="0"/>
@@ -4520,8 +5968,8 @@
         </p:nvSpPr>
         <p:spPr>
           <a:xfrm>
-            <a:off x="566928" y="6181344"/>
-            <a:ext cx="11018520" cy="384048"/>
+            <a:off x="566928" y="6217920"/>
+            <a:ext cx="11018520" cy="365760"/>
           </a:xfrm>
           <a:prstGeom prst="rect">
             <a:avLst/>

--- a/docs/測試排程分析報告.pptx
+++ b/docs/測試排程分析報告.pptx
@@ -18,9 +18,10 @@
     <p:sldId id="266" r:id="rId12"/>
     <p:sldId id="267" r:id="rId13"/>
     <p:sldId id="268" r:id="rId14"/>
+    <p:sldId id="269" r:id="rId15"/>
   </p:sldIdLst>
   <p:notesMasterIdLst>
-    <p:notesMasterId r:id="rId15"/>
+    <p:notesMasterId r:id="rId16"/>
   </p:notesMasterIdLst>
   <p:sldSz cx="12192000" cy="6858000"/>
   <p:notesSz cx="6858000" cy="12192000"/>
@@ -778,7 +779,7 @@
           <a:p>
             <a:r>
               <a:rPr lang="en-US" dirty="0"/>
-              <a:t>前兩項是純管理決策，今天就能改；第三項是人力預算；第四項需要 IT 或設備工程投入。</a:t>
+              <a:t>5 台機時瓶頸是改機排隊，所以省改機贏；25 台機時機台過剩、瓶頸變成有沒有把大批塞進 8-site 快機。重新對齊後所有法則的等工程師時間都是 0。</a:t>
             </a:r>
             <a:endParaRPr lang="en-US" dirty="0"/>
           </a:p>
@@ -866,7 +867,7 @@
           <a:p>
             <a:r>
               <a:rPr lang="en-US" dirty="0"/>
-              <a:t>四個階段刻意分開，避免同時變動多個變數而無法歸因。最大的單一不確定性是換程式是否佔用工程師。</a:t>
+              <a:t>前兩項是純管理決策，今天就能改；第三項是人力預算；第四項需要 IT 或設備工程投入。</a:t>
             </a:r>
             <a:endParaRPr lang="en-US" dirty="0"/>
           </a:p>
@@ -890,6 +891,94 @@
             <a:fld id="{F7021451-1387-4CA6-816F-3879F97B5CBC}" type="slidenum">
               <a:rPr lang="en-US"/>
               <a:t>13</a:t>
+            </a:fld>
+            <a:endParaRPr lang="en-US"/>
+          </a:p>
+        </p:txBody>
+      </p:sp>
+    </p:spTree>
+    <p:extLst>
+      <p:ext uri="{BB962C8B-B14F-4D97-AF65-F5344CB8AC3E}">
+        <p14:creationId xmlns:p14="http://schemas.microsoft.com/office/powerpoint/2010/main" val="1024086991"/>
+      </p:ext>
+    </p:extLst>
+  </p:cSld>
+  <p:clrMapOvr>
+    <a:masterClrMapping/>
+  </p:clrMapOvr>
+</p:notes>
+</file>
+
+<file path=ppt/notesSlides/notesSlide14.xml><?xml version="1.0" encoding="utf-8"?>
+<p:notes xmlns:a="http://schemas.openxmlformats.org/drawingml/2006/main" xmlns:r="http://schemas.openxmlformats.org/officeDocument/2006/relationships" xmlns:p="http://schemas.openxmlformats.org/presentationml/2006/main">
+  <p:cSld>
+    <p:spTree>
+      <p:nvGrpSpPr>
+        <p:cNvPr id="1" name=""/>
+        <p:cNvGrpSpPr/>
+        <p:nvPr/>
+      </p:nvGrpSpPr>
+      <p:grpSpPr>
+        <a:xfrm>
+          <a:off x="0" y="0"/>
+          <a:ext cx="0" cy="0"/>
+          <a:chOff x="0" y="0"/>
+          <a:chExt cx="0" cy="0"/>
+        </a:xfrm>
+      </p:grpSpPr>
+      <p:sp>
+        <p:nvSpPr>
+          <p:cNvPr id="2" name="Slide Image Placeholder 1"/>
+          <p:cNvSpPr>
+            <a:spLocks noGrp="1" noRot="1" noChangeAspect="1"/>
+          </p:cNvSpPr>
+          <p:nvPr>
+            <p:ph type="sldImg"/>
+          </p:nvPr>
+        </p:nvSpPr>
+        <p:spPr/>
+      </p:sp>
+      <p:sp>
+        <p:nvSpPr>
+          <p:cNvPr id="3" name="Notes Placeholder 2"/>
+          <p:cNvSpPr>
+            <a:spLocks noGrp="1"/>
+          </p:cNvSpPr>
+          <p:nvPr>
+            <p:ph type="body" idx="1"/>
+          </p:nvPr>
+        </p:nvSpPr>
+        <p:spPr/>
+        <p:txBody>
+          <a:bodyPr/>
+          <a:lstStyle/>
+          <a:p>
+            <a:r>
+              <a:rPr lang="en-US" dirty="0"/>
+              <a:t>四個階段刻意分開，避免同時變動多個變數而無法歸因。最大的單一不確定性是換程式是否佔用工程師。</a:t>
+            </a:r>
+            <a:endParaRPr lang="en-US" dirty="0"/>
+          </a:p>
+        </p:txBody>
+      </p:sp>
+      <p:sp>
+        <p:nvSpPr>
+          <p:cNvPr id="4" name="Slide Number Placeholder 3"/>
+          <p:cNvSpPr>
+            <a:spLocks noGrp="1"/>
+          </p:cNvSpPr>
+          <p:nvPr>
+            <p:ph type="sldNum" sz="quarter" idx="10"/>
+          </p:nvPr>
+        </p:nvSpPr>
+        <p:spPr/>
+        <p:txBody>
+          <a:bodyPr/>
+          <a:lstStyle/>
+          <a:p>
+            <a:fld id="{F7021451-1387-4CA6-816F-3879F97B5CBC}" type="slidenum">
+              <a:rPr lang="en-US"/>
+              <a:t>14</a:t>
             </a:fld>
             <a:endParaRPr lang="en-US"/>
           </a:p>
@@ -3340,6 +3429,605 @@
 <file path=ppt/slides/slide12.xml><?xml version="1.0" encoding="utf-8"?>
 <p:sld xmlns:a="http://schemas.openxmlformats.org/drawingml/2006/main" xmlns:r="http://schemas.openxmlformats.org/officeDocument/2006/relationships" xmlns:p="http://schemas.openxmlformats.org/presentationml/2006/main">
   <p:cSld name="Slide 12">
+    <p:spTree>
+      <p:nvGrpSpPr>
+        <p:cNvPr id="1" name=""/>
+        <p:cNvGrpSpPr/>
+        <p:nvPr/>
+      </p:nvGrpSpPr>
+      <p:grpSpPr>
+        <a:xfrm>
+          <a:off x="0" y="0"/>
+          <a:ext cx="0" cy="0"/>
+          <a:chOff x="0" y="0"/>
+          <a:chExt cx="0" cy="0"/>
+        </a:xfrm>
+      </p:grpSpPr>
+      <p:sp>
+        <p:nvSpPr>
+          <p:cNvPr id="2" name="Text 0"/>
+          <p:cNvSpPr txBox="1"/>
+          <p:nvPr/>
+        </p:nvSpPr>
+        <p:spPr>
+          <a:xfrm>
+            <a:off x="566928" y="384048"/>
+            <a:ext cx="502920" cy="457200"/>
+          </a:xfrm>
+          <a:prstGeom prst="rect">
+            <a:avLst/>
+          </a:prstGeom>
+          <a:noFill/>
+          <a:ln/>
+        </p:spPr>
+        <p:txBody>
+          <a:bodyPr wrap="square" rtlCol="0" anchor="ctr"/>
+          <a:lstStyle/>
+          <a:p>
+            <a:pPr indent="0" marL="0">
+              <a:buNone/>
+            </a:pPr>
+            <a:r>
+              <a:rPr lang="en-US" sz="1300" b="1" dirty="0">
+                <a:solidFill>
+                  <a:srgbClr val="1C7293"/>
+                </a:solidFill>
+                <a:latin typeface="Calibri" pitchFamily="34" charset="0"/>
+                <a:ea typeface="Calibri" pitchFamily="34" charset="-122"/>
+                <a:cs typeface="Calibri" pitchFamily="34" charset="-120"/>
+              </a:rPr>
+              <a:t>11</a:t>
+            </a:r>
+            <a:endParaRPr lang="en-US" sz="1300" dirty="0"/>
+          </a:p>
+        </p:txBody>
+      </p:sp>
+      <p:sp>
+        <p:nvSpPr>
+          <p:cNvPr id="3" name="Text 1"/>
+          <p:cNvSpPr txBox="1"/>
+          <p:nvPr/>
+        </p:nvSpPr>
+        <p:spPr>
+          <a:xfrm>
+            <a:off x="1143000" y="310896"/>
+            <a:ext cx="10424160" cy="566928"/>
+          </a:xfrm>
+          <a:prstGeom prst="rect">
+            <a:avLst/>
+          </a:prstGeom>
+          <a:noFill/>
+          <a:ln/>
+        </p:spPr>
+        <p:txBody>
+          <a:bodyPr wrap="square" rtlCol="0" anchor="ctr"/>
+          <a:lstStyle/>
+          <a:p>
+            <a:pPr indent="0" marL="0">
+              <a:buNone/>
+            </a:pPr>
+            <a:r>
+              <a:rPr lang="en-US" sz="3000" b="1" dirty="0">
+                <a:solidFill>
+                  <a:srgbClr val="1E2761"/>
+                </a:solidFill>
+                <a:latin typeface="Cambria" pitchFamily="34" charset="0"/>
+                <a:ea typeface="Cambria" pitchFamily="34" charset="-122"/>
+                <a:cs typeface="Cambria" pitchFamily="34" charset="-120"/>
+              </a:rPr>
+              <a:t>機隊規模與專用機配置也會換掉答案</a:t>
+            </a:r>
+            <a:endParaRPr lang="en-US" sz="3000" dirty="0"/>
+          </a:p>
+        </p:txBody>
+      </p:sp>
+      <p:sp>
+        <p:nvSpPr>
+          <p:cNvPr id="4" name="Text 2"/>
+          <p:cNvSpPr txBox="1"/>
+          <p:nvPr/>
+        </p:nvSpPr>
+        <p:spPr>
+          <a:xfrm>
+            <a:off x="1143000" y="896112"/>
+            <a:ext cx="10424160" cy="384048"/>
+          </a:xfrm>
+          <a:prstGeom prst="rect">
+            <a:avLst/>
+          </a:prstGeom>
+          <a:noFill/>
+          <a:ln/>
+        </p:spPr>
+        <p:txBody>
+          <a:bodyPr wrap="square" rtlCol="0" anchor="ctr"/>
+          <a:lstStyle/>
+          <a:p>
+            <a:pPr indent="0" marL="0">
+              <a:buNone/>
+            </a:pPr>
+            <a:r>
+              <a:rPr lang="en-US" sz="1350" dirty="0">
+                <a:solidFill>
+                  <a:srgbClr val="5A6785"/>
+                </a:solidFill>
+                <a:latin typeface="Calibri" pitchFamily="34" charset="0"/>
+                <a:ea typeface="Calibri" pitchFamily="34" charset="-122"/>
+                <a:cs typeface="Calibri" pitchFamily="34" charset="-120"/>
+              </a:rPr>
+              <a:t>同一批 90 批 WIP，把 5 台機換成真實的 25 台機隊（機隊 100 site、10 位工程師）重跑一次</a:t>
+            </a:r>
+            <a:endParaRPr lang="en-US" sz="1350" dirty="0"/>
+          </a:p>
+        </p:txBody>
+      </p:sp>
+      <p:pic>
+        <p:nvPicPr>
+          <p:cNvPr id="5" name="Image 0" descr="charts/c_fleet.png">    </p:cNvPr>
+          <p:cNvPicPr>
+            <a:picLocks noChangeAspect="1"/>
+          </p:cNvPicPr>
+          <p:nvPr/>
+        </p:nvPicPr>
+        <p:blipFill>
+          <a:blip r:embed="rId1"/>
+          <a:stretch>
+            <a:fillRect/>
+          </a:stretch>
+        </p:blipFill>
+        <p:spPr>
+          <a:xfrm>
+            <a:off x="566928" y="1316736"/>
+            <a:ext cx="5029200" cy="3455545"/>
+          </a:xfrm>
+          <a:prstGeom prst="rect">
+            <a:avLst/>
+          </a:prstGeom>
+        </p:spPr>
+      </p:pic>
+      <p:pic>
+        <p:nvPicPr>
+          <p:cNvPr id="6" name="Image 1" descr="charts/c_rematch.png">    </p:cNvPr>
+          <p:cNvPicPr>
+            <a:picLocks noChangeAspect="1"/>
+          </p:cNvPicPr>
+          <p:nvPr/>
+        </p:nvPicPr>
+        <p:blipFill>
+          <a:blip r:embed="rId2"/>
+          <a:stretch>
+            <a:fillRect/>
+          </a:stretch>
+        </p:blipFill>
+        <p:spPr>
+          <a:xfrm>
+            <a:off x="6592824" y="1316736"/>
+            <a:ext cx="5029200" cy="3455545"/>
+          </a:xfrm>
+          <a:prstGeom prst="rect">
+            <a:avLst/>
+          </a:prstGeom>
+        </p:spPr>
+      </p:pic>
+      <p:sp>
+        <p:nvSpPr>
+          <p:cNvPr id="7" name="Shape 3"/>
+          <p:cNvSpPr/>
+          <p:nvPr/>
+        </p:nvSpPr>
+        <p:spPr>
+          <a:xfrm>
+            <a:off x="566928" y="4846320"/>
+            <a:ext cx="5486400" cy="1481328"/>
+          </a:xfrm>
+          <a:prstGeom prst="roundRect">
+            <a:avLst>
+              <a:gd name="adj" fmla="val 3086"/>
+            </a:avLst>
+          </a:prstGeom>
+          <a:solidFill>
+            <a:srgbClr val="F5F7FB"/>
+          </a:solidFill>
+          <a:ln w="12700">
+            <a:solidFill>
+              <a:srgbClr val="FFFFFF"/>
+            </a:solidFill>
+            <a:prstDash val="solid"/>
+          </a:ln>
+        </p:spPr>
+      </p:sp>
+      <p:sp>
+        <p:nvSpPr>
+          <p:cNvPr id="8" name="Shape 4"/>
+          <p:cNvSpPr/>
+          <p:nvPr/>
+        </p:nvSpPr>
+        <p:spPr>
+          <a:xfrm>
+            <a:off x="804672" y="5102352"/>
+            <a:ext cx="146304" cy="146304"/>
+          </a:xfrm>
+          <a:prstGeom prst="ellipse">
+            <a:avLst/>
+          </a:prstGeom>
+          <a:solidFill>
+            <a:srgbClr val="C2410C"/>
+          </a:solidFill>
+          <a:ln w="12700">
+            <a:solidFill>
+              <a:srgbClr val="C2410C"/>
+            </a:solidFill>
+            <a:prstDash val="solid"/>
+          </a:ln>
+        </p:spPr>
+      </p:sp>
+      <p:sp>
+        <p:nvSpPr>
+          <p:cNvPr id="9" name="Text 5"/>
+          <p:cNvSpPr txBox="1"/>
+          <p:nvPr/>
+        </p:nvSpPr>
+        <p:spPr>
+          <a:xfrm>
+            <a:off x="1060704" y="5001768"/>
+            <a:ext cx="4754880" cy="329184"/>
+          </a:xfrm>
+          <a:prstGeom prst="rect">
+            <a:avLst/>
+          </a:prstGeom>
+          <a:noFill/>
+          <a:ln/>
+        </p:spPr>
+        <p:txBody>
+          <a:bodyPr wrap="square" lIns="0" tIns="0" rIns="0" bIns="0" rtlCol="0" anchor="ctr"/>
+          <a:lstStyle/>
+          <a:p>
+            <a:pPr indent="0" marL="0">
+              <a:buNone/>
+            </a:pPr>
+            <a:r>
+              <a:rPr lang="en-US" sz="1450" b="1" dirty="0">
+                <a:solidFill>
+                  <a:srgbClr val="1E2761"/>
+                </a:solidFill>
+                <a:latin typeface="Calibri" pitchFamily="34" charset="0"/>
+                <a:ea typeface="Calibri" pitchFamily="34" charset="-122"/>
+                <a:cs typeface="Calibri" pitchFamily="34" charset="-120"/>
+              </a:rPr>
+              <a:t>機台越多，省改機越不是答案</a:t>
+            </a:r>
+            <a:endParaRPr lang="en-US" sz="1450" dirty="0"/>
+          </a:p>
+        </p:txBody>
+      </p:sp>
+      <p:sp>
+        <p:nvSpPr>
+          <p:cNvPr id="10" name="Text 6"/>
+          <p:cNvSpPr txBox="1"/>
+          <p:nvPr/>
+        </p:nvSpPr>
+        <p:spPr>
+          <a:xfrm>
+            <a:off x="1060704" y="5358384"/>
+            <a:ext cx="4754880" cy="877824"/>
+          </a:xfrm>
+          <a:prstGeom prst="rect">
+            <a:avLst/>
+          </a:prstGeom>
+          <a:noFill/>
+          <a:ln/>
+        </p:spPr>
+        <p:txBody>
+          <a:bodyPr wrap="square" lIns="0" tIns="0" rIns="0" bIns="0" rtlCol="0" anchor="ctr"/>
+          <a:lstStyle/>
+          <a:p>
+            <a:pPr marL="342900" indent="-342900">
+              <a:lnSpc>
+                <a:spcPts val="1800"/>
+              </a:lnSpc>
+              <a:spcAft>
+                <a:spcPts val="400"/>
+              </a:spcAft>
+              <a:buSzPct val="100000"/>
+              <a:buChar char="•"/>
+            </a:pPr>
+            <a:r>
+              <a:rPr lang="en-US" sz="1200" dirty="0">
+                <a:solidFill>
+                  <a:srgbClr val="16213E"/>
+                </a:solidFill>
+                <a:latin typeface="Calibri" pitchFamily="34" charset="0"/>
+                <a:ea typeface="Calibri" pitchFamily="34" charset="-122"/>
+                <a:cs typeface="Calibri" pitchFamily="34" charset="-120"/>
+              </a:rPr>
+              <a:t>5 台機：省改機 14.6 h 勝，大批給快機 29.4 h</a:t>
+            </a:r>
+            <a:endParaRPr lang="en-US" sz="1200" dirty="0"/>
+          </a:p>
+          <a:p>
+            <a:pPr marL="342900" indent="-342900">
+              <a:lnSpc>
+                <a:spcPts val="1800"/>
+              </a:lnSpc>
+              <a:spcAft>
+                <a:spcPts val="400"/>
+              </a:spcAft>
+              <a:buSzPct val="100000"/>
+              <a:buChar char="•"/>
+            </a:pPr>
+            <a:r>
+              <a:rPr lang="en-US" sz="1200" dirty="0">
+                <a:solidFill>
+                  <a:srgbClr val="16213E"/>
+                </a:solidFill>
+                <a:latin typeface="Calibri" pitchFamily="34" charset="0"/>
+                <a:ea typeface="Calibri" pitchFamily="34" charset="-122"/>
+                <a:cs typeface="Calibri" pitchFamily="34" charset="-120"/>
+              </a:rPr>
+              <a:t>25 台機：大批給快機 6.4 h，省改機退到 7.9 h</a:t>
+            </a:r>
+            <a:endParaRPr lang="en-US" sz="1200" dirty="0"/>
+          </a:p>
+          <a:p>
+            <a:pPr marL="342900" indent="-342900">
+              <a:lnSpc>
+                <a:spcPts val="1800"/>
+              </a:lnSpc>
+              <a:spcAft>
+                <a:spcPts val="400"/>
+              </a:spcAft>
+              <a:buSzPct val="100000"/>
+              <a:buChar char="•"/>
+            </a:pPr>
+            <a:r>
+              <a:rPr lang="en-US" sz="1200" dirty="0">
+                <a:solidFill>
+                  <a:srgbClr val="16213E"/>
+                </a:solidFill>
+                <a:latin typeface="Calibri" pitchFamily="34" charset="0"/>
+                <a:ea typeface="Calibri" pitchFamily="34" charset="-122"/>
+                <a:cs typeface="Calibri" pitchFamily="34" charset="-120"/>
+              </a:rPr>
+              <a:t>機台少 → 改機排隊；機台多 → 快機沒用滿</a:t>
+            </a:r>
+            <a:endParaRPr lang="en-US" sz="1200" dirty="0"/>
+          </a:p>
+        </p:txBody>
+      </p:sp>
+      <p:sp>
+        <p:nvSpPr>
+          <p:cNvPr id="11" name="Shape 7"/>
+          <p:cNvSpPr/>
+          <p:nvPr/>
+        </p:nvSpPr>
+        <p:spPr>
+          <a:xfrm>
+            <a:off x="6172200" y="4846320"/>
+            <a:ext cx="5449824" cy="1481328"/>
+          </a:xfrm>
+          <a:prstGeom prst="roundRect">
+            <a:avLst>
+              <a:gd name="adj" fmla="val 3086"/>
+            </a:avLst>
+          </a:prstGeom>
+          <a:solidFill>
+            <a:srgbClr val="F5F7FB"/>
+          </a:solidFill>
+          <a:ln w="12700">
+            <a:solidFill>
+              <a:srgbClr val="FFFFFF"/>
+            </a:solidFill>
+            <a:prstDash val="solid"/>
+          </a:ln>
+        </p:spPr>
+      </p:sp>
+      <p:sp>
+        <p:nvSpPr>
+          <p:cNvPr id="12" name="Shape 8"/>
+          <p:cNvSpPr/>
+          <p:nvPr/>
+        </p:nvSpPr>
+        <p:spPr>
+          <a:xfrm>
+            <a:off x="6409944" y="5102352"/>
+            <a:ext cx="146304" cy="146304"/>
+          </a:xfrm>
+          <a:prstGeom prst="ellipse">
+            <a:avLst/>
+          </a:prstGeom>
+          <a:solidFill>
+            <a:srgbClr val="0F7B6C"/>
+          </a:solidFill>
+          <a:ln w="12700">
+            <a:solidFill>
+              <a:srgbClr val="0F7B6C"/>
+            </a:solidFill>
+            <a:prstDash val="solid"/>
+          </a:ln>
+        </p:spPr>
+      </p:sp>
+      <p:sp>
+        <p:nvSpPr>
+          <p:cNvPr id="13" name="Text 9"/>
+          <p:cNvSpPr txBox="1"/>
+          <p:nvPr/>
+        </p:nvSpPr>
+        <p:spPr>
+          <a:xfrm>
+            <a:off x="6665976" y="5001768"/>
+            <a:ext cx="4718304" cy="329184"/>
+          </a:xfrm>
+          <a:prstGeom prst="rect">
+            <a:avLst/>
+          </a:prstGeom>
+          <a:noFill/>
+          <a:ln/>
+        </p:spPr>
+        <p:txBody>
+          <a:bodyPr wrap="square" lIns="0" tIns="0" rIns="0" bIns="0" rtlCol="0" anchor="ctr"/>
+          <a:lstStyle/>
+          <a:p>
+            <a:pPr indent="0" marL="0">
+              <a:buNone/>
+            </a:pPr>
+            <a:r>
+              <a:rPr lang="en-US" sz="1450" b="1" dirty="0">
+                <a:solidFill>
+                  <a:srgbClr val="1E2761"/>
+                </a:solidFill>
+                <a:latin typeface="Calibri" pitchFamily="34" charset="0"/>
+                <a:ea typeface="Calibri" pitchFamily="34" charset="-122"/>
+                <a:cs typeface="Calibri" pitchFamily="34" charset="-120"/>
+              </a:rPr>
+              <a:t>配置對齊買到的是容錯，不是速度</a:t>
+            </a:r>
+            <a:endParaRPr lang="en-US" sz="1450" dirty="0"/>
+          </a:p>
+        </p:txBody>
+      </p:sp>
+      <p:sp>
+        <p:nvSpPr>
+          <p:cNvPr id="14" name="Text 10"/>
+          <p:cNvSpPr txBox="1"/>
+          <p:nvPr/>
+        </p:nvSpPr>
+        <p:spPr>
+          <a:xfrm>
+            <a:off x="6665976" y="5358384"/>
+            <a:ext cx="4718304" cy="877824"/>
+          </a:xfrm>
+          <a:prstGeom prst="rect">
+            <a:avLst/>
+          </a:prstGeom>
+          <a:noFill/>
+          <a:ln/>
+        </p:spPr>
+        <p:txBody>
+          <a:bodyPr wrap="square" lIns="0" tIns="0" rIns="0" bIns="0" rtlCol="0" anchor="ctr"/>
+          <a:lstStyle/>
+          <a:p>
+            <a:pPr marL="342900" indent="-342900">
+              <a:lnSpc>
+                <a:spcPts val="1800"/>
+              </a:lnSpc>
+              <a:spcAft>
+                <a:spcPts val="400"/>
+              </a:spcAft>
+              <a:buSzPct val="100000"/>
+              <a:buChar char="•"/>
+            </a:pPr>
+            <a:r>
+              <a:rPr lang="en-US" sz="1200" dirty="0">
+                <a:solidFill>
+                  <a:srgbClr val="16213E"/>
+                </a:solidFill>
+                <a:latin typeface="Calibri" pitchFamily="34" charset="0"/>
+                <a:ea typeface="Calibri" pitchFamily="34" charset="-122"/>
+                <a:cs typeface="Calibri" pitchFamily="34" charset="-120"/>
+              </a:rPr>
+              <a:t>最佳法則幾乎沒變：6.4 h → 6.6 h</a:t>
+            </a:r>
+            <a:endParaRPr lang="en-US" sz="1200" dirty="0"/>
+          </a:p>
+          <a:p>
+            <a:pPr marL="342900" indent="-342900">
+              <a:lnSpc>
+                <a:spcPts val="1800"/>
+              </a:lnSpc>
+              <a:spcAft>
+                <a:spcPts val="400"/>
+              </a:spcAft>
+              <a:buSzPct val="100000"/>
+              <a:buChar char="•"/>
+            </a:pPr>
+            <a:r>
+              <a:rPr lang="en-US" sz="1200" dirty="0">
+                <a:solidFill>
+                  <a:srgbClr val="16213E"/>
+                </a:solidFill>
+                <a:latin typeface="Calibri" pitchFamily="34" charset="0"/>
+                <a:ea typeface="Calibri" pitchFamily="34" charset="-122"/>
+                <a:cs typeface="Calibri" pitchFamily="34" charset="-120"/>
+              </a:rPr>
+              <a:t>最差法則大幅改善：19.8 h → 12.5 h</a:t>
+            </a:r>
+            <a:endParaRPr lang="en-US" sz="1200" dirty="0"/>
+          </a:p>
+          <a:p>
+            <a:pPr marL="342900" indent="-342900">
+              <a:lnSpc>
+                <a:spcPts val="1800"/>
+              </a:lnSpc>
+              <a:spcAft>
+                <a:spcPts val="400"/>
+              </a:spcAft>
+              <a:buSzPct val="100000"/>
+              <a:buChar char="•"/>
+            </a:pPr>
+            <a:r>
+              <a:rPr lang="en-US" sz="1200" dirty="0">
+                <a:solidFill>
+                  <a:srgbClr val="16213E"/>
+                </a:solidFill>
+                <a:latin typeface="Calibri" pitchFamily="34" charset="0"/>
+                <a:ea typeface="Calibri" pitchFamily="34" charset="-122"/>
+                <a:cs typeface="Calibri" pitchFamily="34" charset="-120"/>
+              </a:rPr>
+              <a:t>選錯法則的代價從 13.4 h 降到 5.9 h，等工程師歸零</a:t>
+            </a:r>
+            <a:endParaRPr lang="en-US" sz="1200" dirty="0"/>
+          </a:p>
+        </p:txBody>
+      </p:sp>
+      <p:sp>
+        <p:nvSpPr>
+          <p:cNvPr id="15" name="Text 11"/>
+          <p:cNvSpPr txBox="1"/>
+          <p:nvPr/>
+        </p:nvSpPr>
+        <p:spPr>
+          <a:xfrm>
+            <a:off x="566928" y="6382512"/>
+            <a:ext cx="11055096" cy="237744"/>
+          </a:xfrm>
+          <a:prstGeom prst="rect">
+            <a:avLst/>
+          </a:prstGeom>
+          <a:noFill/>
+          <a:ln/>
+        </p:spPr>
+        <p:txBody>
+          <a:bodyPr wrap="square" rtlCol="0" anchor="ctr"/>
+          <a:lstStyle/>
+          <a:p>
+            <a:pPr indent="0" marL="0">
+              <a:buNone/>
+            </a:pPr>
+            <a:r>
+              <a:rPr lang="en-US" sz="1000" dirty="0">
+                <a:solidFill>
+                  <a:srgbClr val="5A6785"/>
+                </a:solidFill>
+                <a:latin typeface="Calibri" pitchFamily="34" charset="0"/>
+                <a:ea typeface="Calibri" pitchFamily="34" charset="-122"/>
+                <a:cs typeface="Calibri" pitchFamily="34" charset="-120"/>
+              </a:rPr>
+              <a:t>註　這批 WIP 的 QFN32 佔 46.5% 工時，現場卻只有 5 台專用機（22 site）裝著它，QFN48 反而有 8 台（40 site）——配置和貨量是反的。「重新對齊」＝ 機台數與 site 結構完全不動，只改 20 台專用機各自綁哪一種封裝。</a:t>
+            </a:r>
+            <a:endParaRPr lang="en-US" sz="1000" dirty="0"/>
+          </a:p>
+        </p:txBody>
+      </p:sp>
+    </p:spTree>
+  </p:cSld>
+  <p:clrMapOvr>
+    <a:masterClrMapping/>
+  </p:clrMapOvr>
+</p:sld>
+</file>
+
+<file path=ppt/slides/slide13.xml><?xml version="1.0" encoding="utf-8"?>
+<p:sld xmlns:a="http://schemas.openxmlformats.org/drawingml/2006/main" xmlns:r="http://schemas.openxmlformats.org/officeDocument/2006/relationships" xmlns:p="http://schemas.openxmlformats.org/presentationml/2006/main">
+  <p:cSld name="Slide 13">
     <p:bg>
       <p:bgPr>
         <a:solidFill>
@@ -3394,7 +4082,7 @@
                 <a:ea typeface="Calibri" pitchFamily="34" charset="-122"/>
                 <a:cs typeface="Calibri" pitchFamily="34" charset="-120"/>
               </a:rPr>
-              <a:t>11</a:t>
+              <a:t>12</a:t>
             </a:r>
             <a:endParaRPr lang="en-US" sz="1300" dirty="0"/>
           </a:p>
@@ -4382,7 +5070,7 @@
                 <a:ea typeface="Calibri" pitchFamily="34" charset="-122"/>
                 <a:cs typeface="Calibri" pitchFamily="34" charset="-120"/>
               </a:rPr>
-              <a:t>但第 1 項有前提：省改機是「人力吃緊」時的最佳解。人補到 1:2.5 之後，改用「大批給快機」更快——夜班與白班人數不同，規則就該不同。</a:t>
+              <a:t>但第 1 項有前提：省改機是「人力吃緊、機台不夠」時的最佳解。人補到 1:2.5、或機台多到用不完時，改用「大批給快機」更快——班別與機隊狀況不同，規則就該不同。</a:t>
             </a:r>
             <a:endParaRPr lang="en-US" sz="1150" dirty="0"/>
           </a:p>
@@ -4396,9 +5084,9 @@
 </p:sld>
 </file>
 
-<file path=ppt/slides/slide13.xml><?xml version="1.0" encoding="utf-8"?>
+<file path=ppt/slides/slide14.xml><?xml version="1.0" encoding="utf-8"?>
 <p:sld xmlns:a="http://schemas.openxmlformats.org/drawingml/2006/main" xmlns:r="http://schemas.openxmlformats.org/officeDocument/2006/relationships" xmlns:p="http://schemas.openxmlformats.org/presentationml/2006/main">
-  <p:cSld name="Slide 13">
+  <p:cSld name="Slide 14">
     <p:spTree>
       <p:nvGrpSpPr>
         <p:cNvPr id="1" name=""/>
@@ -4446,7 +5134,7 @@
                 <a:ea typeface="Calibri" pitchFamily="34" charset="-122"/>
                 <a:cs typeface="Calibri" pitchFamily="34" charset="-120"/>
               </a:rPr>
-              <a:t>12</a:t>
+              <a:t>13</a:t>
             </a:r>
             <a:endParaRPr lang="en-US" sz="1300" dirty="0"/>
           </a:p>

--- a/docs/測試排程分析報告.pptx
+++ b/docs/測試排程分析報告.pptx
@@ -19,9 +19,10 @@
     <p:sldId id="267" r:id="rId13"/>
     <p:sldId id="268" r:id="rId14"/>
     <p:sldId id="269" r:id="rId15"/>
+    <p:sldId id="270" r:id="rId16"/>
   </p:sldIdLst>
   <p:notesMasterIdLst>
-    <p:notesMasterId r:id="rId16"/>
+    <p:notesMasterId r:id="rId17"/>
   </p:notesMasterIdLst>
   <p:sldSz cx="12192000" cy="6858000"/>
   <p:notesSz cx="6858000" cy="12192000"/>
@@ -867,7 +868,7 @@
           <a:p>
             <a:r>
               <a:rPr lang="en-US" dirty="0"/>
-              <a:t>前兩項是純管理決策，今天就能改；第三項是人力預算；第四項需要 IT 或設備工程投入。</a:t>
+              <a:t>門檻的實際分界在 31.7% 與 35.8% 之間；靠近門檻時兩種法則差距小，選錯的代價不大。</a:t>
             </a:r>
             <a:endParaRPr lang="en-US" dirty="0"/>
           </a:p>
@@ -955,7 +956,7 @@
           <a:p>
             <a:r>
               <a:rPr lang="en-US" dirty="0"/>
-              <a:t>四個階段刻意分開，避免同時變動多個變數而無法歸因。最大的單一不確定性是換程式是否佔用工程師。</a:t>
+              <a:t>前兩項是純管理決策，今天就能改；第三項是人力預算；第四項需要 IT 或設備工程投入。</a:t>
             </a:r>
             <a:endParaRPr lang="en-US" dirty="0"/>
           </a:p>
@@ -979,6 +980,94 @@
             <a:fld id="{F7021451-1387-4CA6-816F-3879F97B5CBC}" type="slidenum">
               <a:rPr lang="en-US"/>
               <a:t>14</a:t>
+            </a:fld>
+            <a:endParaRPr lang="en-US"/>
+          </a:p>
+        </p:txBody>
+      </p:sp>
+    </p:spTree>
+    <p:extLst>
+      <p:ext uri="{BB962C8B-B14F-4D97-AF65-F5344CB8AC3E}">
+        <p14:creationId xmlns:p14="http://schemas.microsoft.com/office/powerpoint/2010/main" val="1024086991"/>
+      </p:ext>
+    </p:extLst>
+  </p:cSld>
+  <p:clrMapOvr>
+    <a:masterClrMapping/>
+  </p:clrMapOvr>
+</p:notes>
+</file>
+
+<file path=ppt/notesSlides/notesSlide15.xml><?xml version="1.0" encoding="utf-8"?>
+<p:notes xmlns:a="http://schemas.openxmlformats.org/drawingml/2006/main" xmlns:r="http://schemas.openxmlformats.org/officeDocument/2006/relationships" xmlns:p="http://schemas.openxmlformats.org/presentationml/2006/main">
+  <p:cSld>
+    <p:spTree>
+      <p:nvGrpSpPr>
+        <p:cNvPr id="1" name=""/>
+        <p:cNvGrpSpPr/>
+        <p:nvPr/>
+      </p:nvGrpSpPr>
+      <p:grpSpPr>
+        <a:xfrm>
+          <a:off x="0" y="0"/>
+          <a:ext cx="0" cy="0"/>
+          <a:chOff x="0" y="0"/>
+          <a:chExt cx="0" cy="0"/>
+        </a:xfrm>
+      </p:grpSpPr>
+      <p:sp>
+        <p:nvSpPr>
+          <p:cNvPr id="2" name="Slide Image Placeholder 1"/>
+          <p:cNvSpPr>
+            <a:spLocks noGrp="1" noRot="1" noChangeAspect="1"/>
+          </p:cNvSpPr>
+          <p:nvPr>
+            <p:ph type="sldImg"/>
+          </p:nvPr>
+        </p:nvSpPr>
+        <p:spPr/>
+      </p:sp>
+      <p:sp>
+        <p:nvSpPr>
+          <p:cNvPr id="3" name="Notes Placeholder 2"/>
+          <p:cNvSpPr>
+            <a:spLocks noGrp="1"/>
+          </p:cNvSpPr>
+          <p:nvPr>
+            <p:ph type="body" idx="1"/>
+          </p:nvPr>
+        </p:nvSpPr>
+        <p:spPr/>
+        <p:txBody>
+          <a:bodyPr/>
+          <a:lstStyle/>
+          <a:p>
+            <a:r>
+              <a:rPr lang="en-US" dirty="0"/>
+              <a:t>四個階段刻意分開，避免同時變動多個變數而無法歸因。最大的單一不確定性是換程式是否佔用工程師。</a:t>
+            </a:r>
+            <a:endParaRPr lang="en-US" dirty="0"/>
+          </a:p>
+        </p:txBody>
+      </p:sp>
+      <p:sp>
+        <p:nvSpPr>
+          <p:cNvPr id="4" name="Slide Number Placeholder 3"/>
+          <p:cNvSpPr>
+            <a:spLocks noGrp="1"/>
+          </p:cNvSpPr>
+          <p:nvPr>
+            <p:ph type="sldNum" sz="quarter" idx="10"/>
+          </p:nvPr>
+        </p:nvSpPr>
+        <p:spPr/>
+        <p:txBody>
+          <a:bodyPr/>
+          <a:lstStyle/>
+          <a:p>
+            <a:fld id="{F7021451-1387-4CA6-816F-3879F97B5CBC}" type="slidenum">
+              <a:rPr lang="en-US"/>
+              <a:t>15</a:t>
             </a:fld>
             <a:endParaRPr lang="en-US"/>
           </a:p>
@@ -4028,6 +4117,533 @@
 <file path=ppt/slides/slide13.xml><?xml version="1.0" encoding="utf-8"?>
 <p:sld xmlns:a="http://schemas.openxmlformats.org/drawingml/2006/main" xmlns:r="http://schemas.openxmlformats.org/officeDocument/2006/relationships" xmlns:p="http://schemas.openxmlformats.org/presentationml/2006/main">
   <p:cSld name="Slide 13">
+    <p:spTree>
+      <p:nvGrpSpPr>
+        <p:cNvPr id="1" name=""/>
+        <p:cNvGrpSpPr/>
+        <p:nvPr/>
+      </p:nvGrpSpPr>
+      <p:grpSpPr>
+        <a:xfrm>
+          <a:off x="0" y="0"/>
+          <a:ext cx="0" cy="0"/>
+          <a:chOff x="0" y="0"/>
+          <a:chExt cx="0" cy="0"/>
+        </a:xfrm>
+      </p:grpSpPr>
+      <p:sp>
+        <p:nvSpPr>
+          <p:cNvPr id="2" name="Text 0"/>
+          <p:cNvSpPr txBox="1"/>
+          <p:nvPr/>
+        </p:nvSpPr>
+        <p:spPr>
+          <a:xfrm>
+            <a:off x="566928" y="384048"/>
+            <a:ext cx="502920" cy="457200"/>
+          </a:xfrm>
+          <a:prstGeom prst="rect">
+            <a:avLst/>
+          </a:prstGeom>
+          <a:noFill/>
+          <a:ln/>
+        </p:spPr>
+        <p:txBody>
+          <a:bodyPr wrap="square" rtlCol="0" anchor="ctr"/>
+          <a:lstStyle/>
+          <a:p>
+            <a:pPr indent="0" marL="0">
+              <a:buNone/>
+            </a:pPr>
+            <a:r>
+              <a:rPr lang="en-US" sz="1300" b="1" dirty="0">
+                <a:solidFill>
+                  <a:srgbClr val="1C7293"/>
+                </a:solidFill>
+                <a:latin typeface="Calibri" pitchFamily="34" charset="0"/>
+                <a:ea typeface="Calibri" pitchFamily="34" charset="-122"/>
+                <a:cs typeface="Calibri" pitchFamily="34" charset="-120"/>
+              </a:rPr>
+              <a:t>12</a:t>
+            </a:r>
+            <a:endParaRPr lang="en-US" sz="1300" dirty="0"/>
+          </a:p>
+        </p:txBody>
+      </p:sp>
+      <p:sp>
+        <p:nvSpPr>
+          <p:cNvPr id="3" name="Text 1"/>
+          <p:cNvSpPr txBox="1"/>
+          <p:nvPr/>
+        </p:nvSpPr>
+        <p:spPr>
+          <a:xfrm>
+            <a:off x="1143000" y="310896"/>
+            <a:ext cx="10424160" cy="566928"/>
+          </a:xfrm>
+          <a:prstGeom prst="rect">
+            <a:avLst/>
+          </a:prstGeom>
+          <a:noFill/>
+          <a:ln/>
+        </p:spPr>
+        <p:txBody>
+          <a:bodyPr wrap="square" rtlCol="0" anchor="ctr"/>
+          <a:lstStyle/>
+          <a:p>
+            <a:pPr indent="0" marL="0">
+              <a:buNone/>
+            </a:pPr>
+            <a:r>
+              <a:rPr lang="en-US" sz="3000" b="1" dirty="0">
+                <a:solidFill>
+                  <a:srgbClr val="1E2761"/>
+                </a:solidFill>
+                <a:latin typeface="Cambria" pitchFamily="34" charset="0"/>
+                <a:ea typeface="Cambria" pitchFamily="34" charset="-122"/>
+                <a:cs typeface="Cambria" pitchFamily="34" charset="-120"/>
+              </a:rPr>
+              <a:t>什麼時候該切換排程法則</a:t>
+            </a:r>
+            <a:endParaRPr lang="en-US" sz="3000" dirty="0"/>
+          </a:p>
+        </p:txBody>
+      </p:sp>
+      <p:sp>
+        <p:nvSpPr>
+          <p:cNvPr id="4" name="Text 2"/>
+          <p:cNvSpPr txBox="1"/>
+          <p:nvPr/>
+        </p:nvSpPr>
+        <p:spPr>
+          <a:xfrm>
+            <a:off x="1143000" y="896112"/>
+            <a:ext cx="10424160" cy="384048"/>
+          </a:xfrm>
+          <a:prstGeom prst="rect">
+            <a:avLst/>
+          </a:prstGeom>
+          <a:noFill/>
+          <a:ln/>
+        </p:spPr>
+        <p:txBody>
+          <a:bodyPr wrap="square" rtlCol="0" anchor="ctr"/>
+          <a:lstStyle/>
+          <a:p>
+            <a:pPr indent="0" marL="0">
+              <a:buNone/>
+            </a:pPr>
+            <a:r>
+              <a:rPr lang="en-US" sz="1350" dirty="0">
+                <a:solidFill>
+                  <a:srgbClr val="5A6785"/>
+                </a:solidFill>
+                <a:latin typeface="Calibri" pitchFamily="34" charset="0"/>
+                <a:ea typeface="Calibri" pitchFamily="34" charset="-122"/>
+                <a:cs typeface="Calibri" pitchFamily="34" charset="-120"/>
+              </a:rPr>
+              <a:t>四次翻轉放在同一把尺上量：改機與等工程師合計吃掉多少機台時間，門檻落在 33% 附近</a:t>
+            </a:r>
+            <a:endParaRPr lang="en-US" sz="1350" dirty="0"/>
+          </a:p>
+        </p:txBody>
+      </p:sp>
+      <p:pic>
+        <p:nvPicPr>
+          <p:cNvPr id="5" name="Image 0" descr="charts/c_switch.png">    </p:cNvPr>
+          <p:cNvPicPr>
+            <a:picLocks noChangeAspect="1"/>
+          </p:cNvPicPr>
+          <p:nvPr/>
+        </p:nvPicPr>
+        <p:blipFill>
+          <a:blip r:embed="rId1"/>
+          <a:stretch>
+            <a:fillRect/>
+          </a:stretch>
+        </p:blipFill>
+        <p:spPr>
+          <a:xfrm>
+            <a:off x="1344168" y="1280160"/>
+            <a:ext cx="9509760" cy="3929003"/>
+          </a:xfrm>
+          <a:prstGeom prst="rect">
+            <a:avLst/>
+          </a:prstGeom>
+        </p:spPr>
+      </p:pic>
+      <p:sp>
+        <p:nvSpPr>
+          <p:cNvPr id="6" name="Shape 3"/>
+          <p:cNvSpPr/>
+          <p:nvPr/>
+        </p:nvSpPr>
+        <p:spPr>
+          <a:xfrm>
+            <a:off x="566928" y="5285232"/>
+            <a:ext cx="5486400" cy="1188720"/>
+          </a:xfrm>
+          <a:prstGeom prst="roundRect">
+            <a:avLst>
+              <a:gd name="adj" fmla="val 3846"/>
+            </a:avLst>
+          </a:prstGeom>
+          <a:solidFill>
+            <a:srgbClr val="F5F7FB"/>
+          </a:solidFill>
+          <a:ln w="12700">
+            <a:solidFill>
+              <a:srgbClr val="FFFFFF"/>
+            </a:solidFill>
+            <a:prstDash val="solid"/>
+          </a:ln>
+        </p:spPr>
+      </p:sp>
+      <p:sp>
+        <p:nvSpPr>
+          <p:cNvPr id="7" name="Shape 4"/>
+          <p:cNvSpPr/>
+          <p:nvPr/>
+        </p:nvSpPr>
+        <p:spPr>
+          <a:xfrm>
+            <a:off x="804672" y="5541264"/>
+            <a:ext cx="146304" cy="146304"/>
+          </a:xfrm>
+          <a:prstGeom prst="ellipse">
+            <a:avLst/>
+          </a:prstGeom>
+          <a:solidFill>
+            <a:srgbClr val="1E2761"/>
+          </a:solidFill>
+          <a:ln w="12700">
+            <a:solidFill>
+              <a:srgbClr val="1E2761"/>
+            </a:solidFill>
+            <a:prstDash val="solid"/>
+          </a:ln>
+        </p:spPr>
+      </p:sp>
+      <p:sp>
+        <p:nvSpPr>
+          <p:cNvPr id="8" name="Text 5"/>
+          <p:cNvSpPr txBox="1"/>
+          <p:nvPr/>
+        </p:nvSpPr>
+        <p:spPr>
+          <a:xfrm>
+            <a:off x="1060704" y="5440680"/>
+            <a:ext cx="4754880" cy="329184"/>
+          </a:xfrm>
+          <a:prstGeom prst="rect">
+            <a:avLst/>
+          </a:prstGeom>
+          <a:noFill/>
+          <a:ln/>
+        </p:spPr>
+        <p:txBody>
+          <a:bodyPr wrap="square" lIns="0" tIns="0" rIns="0" bIns="0" rtlCol="0" anchor="ctr"/>
+          <a:lstStyle/>
+          <a:p>
+            <a:pPr indent="0" marL="0">
+              <a:buNone/>
+            </a:pPr>
+            <a:r>
+              <a:rPr lang="en-US" sz="1450" b="1" dirty="0">
+                <a:solidFill>
+                  <a:srgbClr val="1E2761"/>
+                </a:solidFill>
+                <a:latin typeface="Calibri" pitchFamily="34" charset="0"/>
+                <a:ea typeface="Calibri" pitchFamily="34" charset="-122"/>
+                <a:cs typeface="Calibri" pitchFamily="34" charset="-120"/>
+              </a:rPr>
+              <a:t>怎麼量（用現場的實績，不用模擬）</a:t>
+            </a:r>
+            <a:endParaRPr lang="en-US" sz="1450" dirty="0"/>
+          </a:p>
+        </p:txBody>
+      </p:sp>
+      <p:sp>
+        <p:nvSpPr>
+          <p:cNvPr id="9" name="Text 6"/>
+          <p:cNvSpPr txBox="1"/>
+          <p:nvPr/>
+        </p:nvSpPr>
+        <p:spPr>
+          <a:xfrm>
+            <a:off x="1060704" y="5797296"/>
+            <a:ext cx="4754880" cy="585216"/>
+          </a:xfrm>
+          <a:prstGeom prst="rect">
+            <a:avLst/>
+          </a:prstGeom>
+          <a:noFill/>
+          <a:ln/>
+        </p:spPr>
+        <p:txBody>
+          <a:bodyPr wrap="square" lIns="0" tIns="0" rIns="0" bIns="0" rtlCol="0" anchor="ctr"/>
+          <a:lstStyle/>
+          <a:p>
+            <a:pPr marL="342900" indent="-342900">
+              <a:lnSpc>
+                <a:spcPts val="1800"/>
+              </a:lnSpc>
+              <a:spcAft>
+                <a:spcPts val="400"/>
+              </a:spcAft>
+              <a:buSzPct val="100000"/>
+              <a:buChar char="•"/>
+            </a:pPr>
+            <a:r>
+              <a:rPr lang="en-US" sz="1200" dirty="0">
+                <a:solidFill>
+                  <a:srgbClr val="16213E"/>
+                </a:solidFill>
+                <a:latin typeface="Calibri" pitchFamily="34" charset="0"/>
+                <a:ea typeface="Calibri" pitchFamily="34" charset="-122"/>
+                <a:cs typeface="Calibri" pitchFamily="34" charset="-120"/>
+              </a:rPr>
+              <a:t>（改機分鐘 ＋ 等工程師分鐘）÷（機台數 × 當班分鐘）</a:t>
+            </a:r>
+            <a:endParaRPr lang="en-US" sz="1200" dirty="0"/>
+          </a:p>
+          <a:p>
+            <a:pPr marL="342900" indent="-342900">
+              <a:lnSpc>
+                <a:spcPts val="1800"/>
+              </a:lnSpc>
+              <a:spcAft>
+                <a:spcPts val="400"/>
+              </a:spcAft>
+              <a:buSzPct val="100000"/>
+              <a:buChar char="•"/>
+            </a:pPr>
+            <a:r>
+              <a:rPr lang="en-US" sz="1200" dirty="0">
+                <a:solidFill>
+                  <a:srgbClr val="16213E"/>
+                </a:solidFill>
+                <a:latin typeface="Calibri" pitchFamily="34" charset="0"/>
+                <a:ea typeface="Calibri" pitchFamily="34" charset="-122"/>
+                <a:cs typeface="Calibri" pitchFamily="34" charset="-120"/>
+              </a:rPr>
+              <a:t>模擬器的跑分表直接有這兩欄，現場的機台稼動報表也有</a:t>
+            </a:r>
+            <a:endParaRPr lang="en-US" sz="1200" dirty="0"/>
+          </a:p>
+        </p:txBody>
+      </p:sp>
+      <p:sp>
+        <p:nvSpPr>
+          <p:cNvPr id="10" name="Shape 7"/>
+          <p:cNvSpPr/>
+          <p:nvPr/>
+        </p:nvSpPr>
+        <p:spPr>
+          <a:xfrm>
+            <a:off x="6172200" y="5285232"/>
+            <a:ext cx="5449824" cy="1188720"/>
+          </a:xfrm>
+          <a:prstGeom prst="roundRect">
+            <a:avLst>
+              <a:gd name="adj" fmla="val 3846"/>
+            </a:avLst>
+          </a:prstGeom>
+          <a:solidFill>
+            <a:srgbClr val="F5F7FB"/>
+          </a:solidFill>
+          <a:ln w="12700">
+            <a:solidFill>
+              <a:srgbClr val="FFFFFF"/>
+            </a:solidFill>
+            <a:prstDash val="solid"/>
+          </a:ln>
+        </p:spPr>
+      </p:sp>
+      <p:sp>
+        <p:nvSpPr>
+          <p:cNvPr id="11" name="Shape 8"/>
+          <p:cNvSpPr/>
+          <p:nvPr/>
+        </p:nvSpPr>
+        <p:spPr>
+          <a:xfrm>
+            <a:off x="6409944" y="5541264"/>
+            <a:ext cx="146304" cy="146304"/>
+          </a:xfrm>
+          <a:prstGeom prst="ellipse">
+            <a:avLst/>
+          </a:prstGeom>
+          <a:solidFill>
+            <a:srgbClr val="0F7B6C"/>
+          </a:solidFill>
+          <a:ln w="12700">
+            <a:solidFill>
+              <a:srgbClr val="0F7B6C"/>
+            </a:solidFill>
+            <a:prstDash val="solid"/>
+          </a:ln>
+        </p:spPr>
+      </p:sp>
+      <p:sp>
+        <p:nvSpPr>
+          <p:cNvPr id="12" name="Text 9"/>
+          <p:cNvSpPr txBox="1"/>
+          <p:nvPr/>
+        </p:nvSpPr>
+        <p:spPr>
+          <a:xfrm>
+            <a:off x="6665976" y="5440680"/>
+            <a:ext cx="4718304" cy="329184"/>
+          </a:xfrm>
+          <a:prstGeom prst="rect">
+            <a:avLst/>
+          </a:prstGeom>
+          <a:noFill/>
+          <a:ln/>
+        </p:spPr>
+        <p:txBody>
+          <a:bodyPr wrap="square" lIns="0" tIns="0" rIns="0" bIns="0" rtlCol="0" anchor="ctr"/>
+          <a:lstStyle/>
+          <a:p>
+            <a:pPr indent="0" marL="0">
+              <a:buNone/>
+            </a:pPr>
+            <a:r>
+              <a:rPr lang="en-US" sz="1450" b="1" dirty="0">
+                <a:solidFill>
+                  <a:srgbClr val="1E2761"/>
+                </a:solidFill>
+                <a:latin typeface="Calibri" pitchFamily="34" charset="0"/>
+                <a:ea typeface="Calibri" pitchFamily="34" charset="-122"/>
+                <a:cs typeface="Calibri" pitchFamily="34" charset="-120"/>
+              </a:rPr>
+              <a:t>怎麼判斷</a:t>
+            </a:r>
+            <a:endParaRPr lang="en-US" sz="1450" dirty="0"/>
+          </a:p>
+        </p:txBody>
+      </p:sp>
+      <p:sp>
+        <p:nvSpPr>
+          <p:cNvPr id="13" name="Text 10"/>
+          <p:cNvSpPr txBox="1"/>
+          <p:nvPr/>
+        </p:nvSpPr>
+        <p:spPr>
+          <a:xfrm>
+            <a:off x="6665976" y="5797296"/>
+            <a:ext cx="4718304" cy="585216"/>
+          </a:xfrm>
+          <a:prstGeom prst="rect">
+            <a:avLst/>
+          </a:prstGeom>
+          <a:noFill/>
+          <a:ln/>
+        </p:spPr>
+        <p:txBody>
+          <a:bodyPr wrap="square" lIns="0" tIns="0" rIns="0" bIns="0" rtlCol="0" anchor="ctr"/>
+          <a:lstStyle/>
+          <a:p>
+            <a:pPr marL="342900" indent="-342900">
+              <a:lnSpc>
+                <a:spcPts val="1800"/>
+              </a:lnSpc>
+              <a:spcAft>
+                <a:spcPts val="400"/>
+              </a:spcAft>
+              <a:buSzPct val="100000"/>
+              <a:buChar char="•"/>
+            </a:pPr>
+            <a:r>
+              <a:rPr lang="en-US" sz="1200" dirty="0">
+                <a:solidFill>
+                  <a:srgbClr val="16213E"/>
+                </a:solidFill>
+                <a:latin typeface="Calibri" pitchFamily="34" charset="0"/>
+                <a:ea typeface="Calibri" pitchFamily="34" charset="-122"/>
+                <a:cs typeface="Calibri" pitchFamily="34" charset="-120"/>
+              </a:rPr>
+              <a:t>超過 35% → 改用「省改機優先」，10 組情境全對</a:t>
+            </a:r>
+            <a:endParaRPr lang="en-US" sz="1200" dirty="0"/>
+          </a:p>
+          <a:p>
+            <a:pPr marL="342900" indent="-342900">
+              <a:lnSpc>
+                <a:spcPts val="1800"/>
+              </a:lnSpc>
+              <a:spcAft>
+                <a:spcPts val="400"/>
+              </a:spcAft>
+              <a:buSzPct val="100000"/>
+              <a:buChar char="•"/>
+            </a:pPr>
+            <a:r>
+              <a:rPr lang="en-US" sz="1200" dirty="0">
+                <a:solidFill>
+                  <a:srgbClr val="16213E"/>
+                </a:solidFill>
+                <a:latin typeface="Calibri" pitchFamily="34" charset="0"/>
+                <a:ea typeface="Calibri" pitchFamily="34" charset="-122"/>
+                <a:cs typeface="Calibri" pitchFamily="34" charset="-120"/>
+              </a:rPr>
+              <a:t>低於 30% → 改用「大批給快機」；30～35% 之間兩者差不到 15%</a:t>
+            </a:r>
+            <a:endParaRPr lang="en-US" sz="1200" dirty="0"/>
+          </a:p>
+        </p:txBody>
+      </p:sp>
+      <p:sp>
+        <p:nvSpPr>
+          <p:cNvPr id="14" name="Text 11"/>
+          <p:cNvSpPr txBox="1"/>
+          <p:nvPr/>
+        </p:nvSpPr>
+        <p:spPr>
+          <a:xfrm>
+            <a:off x="566928" y="6492240"/>
+            <a:ext cx="11055096" cy="173736"/>
+          </a:xfrm>
+          <a:prstGeom prst="rect">
+            <a:avLst/>
+          </a:prstGeom>
+          <a:noFill/>
+          <a:ln/>
+        </p:spPr>
+        <p:txBody>
+          <a:bodyPr wrap="square" rtlCol="0" anchor="ctr"/>
+          <a:lstStyle/>
+          <a:p>
+            <a:pPr indent="0" marL="0">
+              <a:buNone/>
+            </a:pPr>
+            <a:r>
+              <a:rPr lang="en-US" sz="950" dirty="0">
+                <a:solidFill>
+                  <a:srgbClr val="5A6785"/>
+                </a:solidFill>
+                <a:latin typeface="Calibri" pitchFamily="34" charset="0"/>
+                <a:ea typeface="Calibri" pitchFamily="34" charset="-122"/>
+                <a:cs typeface="Calibri" pitchFamily="34" charset="-120"/>
+              </a:rPr>
+              <a:t>註　兩項要合計才準：5 台機那三組是改機本身吃掉 35%（等人只有 0～2%），25 台機 200 批 3 人那組反過來是等人吃掉 36%（改機只有 10%）——只看其中一項都會判錯。量測時用現行的「追交期」排程當基準。</a:t>
+            </a:r>
+            <a:endParaRPr lang="en-US" sz="950" dirty="0"/>
+          </a:p>
+        </p:txBody>
+      </p:sp>
+    </p:spTree>
+  </p:cSld>
+  <p:clrMapOvr>
+    <a:masterClrMapping/>
+  </p:clrMapOvr>
+</p:sld>
+</file>
+
+<file path=ppt/slides/slide14.xml><?xml version="1.0" encoding="utf-8"?>
+<p:sld xmlns:a="http://schemas.openxmlformats.org/drawingml/2006/main" xmlns:r="http://schemas.openxmlformats.org/officeDocument/2006/relationships" xmlns:p="http://schemas.openxmlformats.org/presentationml/2006/main">
+  <p:cSld name="Slide 14">
     <p:bg>
       <p:bgPr>
         <a:solidFill>
@@ -4082,7 +4698,7 @@
                 <a:ea typeface="Calibri" pitchFamily="34" charset="-122"/>
                 <a:cs typeface="Calibri" pitchFamily="34" charset="-120"/>
               </a:rPr>
-              <a:t>12</a:t>
+              <a:t>13</a:t>
             </a:r>
             <a:endParaRPr lang="en-US" sz="1300" dirty="0"/>
           </a:p>
@@ -5070,7 +5686,7 @@
                 <a:ea typeface="Calibri" pitchFamily="34" charset="-122"/>
                 <a:cs typeface="Calibri" pitchFamily="34" charset="-120"/>
               </a:rPr>
-              <a:t>但第 1 項有前提：省改機是「人力吃緊、機台不夠」時的最佳解。人補到 1:2.5、或機台多到用不完時，改用「大批給快機」更快——班別與機隊狀況不同，規則就該不同。</a:t>
+              <a:t>但第 1 項有前提：省改機是「改機＋等工程師吃掉機台時間超過 35%」時的最佳解；低於 30% 就該改用「大批給快機」（見第 12 頁）。班別與機隊狀況不同，規則就該不同。</a:t>
             </a:r>
             <a:endParaRPr lang="en-US" sz="1150" dirty="0"/>
           </a:p>
@@ -5084,9 +5700,9 @@
 </p:sld>
 </file>
 
-<file path=ppt/slides/slide14.xml><?xml version="1.0" encoding="utf-8"?>
+<file path=ppt/slides/slide15.xml><?xml version="1.0" encoding="utf-8"?>
 <p:sld xmlns:a="http://schemas.openxmlformats.org/drawingml/2006/main" xmlns:r="http://schemas.openxmlformats.org/officeDocument/2006/relationships" xmlns:p="http://schemas.openxmlformats.org/presentationml/2006/main">
-  <p:cSld name="Slide 14">
+  <p:cSld name="Slide 15">
     <p:spTree>
       <p:nvGrpSpPr>
         <p:cNvPr id="1" name=""/>
@@ -5134,7 +5750,7 @@
                 <a:ea typeface="Calibri" pitchFamily="34" charset="-122"/>
                 <a:cs typeface="Calibri" pitchFamily="34" charset="-120"/>
               </a:rPr>
-              <a:t>13</a:t>
+              <a:t>14</a:t>
             </a:r>
             <a:endParaRPr lang="en-US" sz="1300" dirty="0"/>
           </a:p>
@@ -6224,7 +6840,7 @@
                 <a:ea typeface="Calibri" pitchFamily="34" charset="-122"/>
                 <a:cs typeface="Calibri" pitchFamily="34" charset="-120"/>
               </a:rPr>
-              <a:t>追蹤：換程式次數 × 平均時間</a:t>
+              <a:t>追蹤：（改機＋等人）÷ 機台時間</a:t>
             </a:r>
             <a:endParaRPr lang="en-US" sz="1100" dirty="0"/>
           </a:p>

--- a/docs/測試排程分析報告.pptx
+++ b/docs/測試排程分析報告.pptx
@@ -3477,7 +3477,7 @@
                 <a:ea typeface="Calibri" pitchFamily="34" charset="-122"/>
                 <a:cs typeface="Calibri" pitchFamily="34" charset="-120"/>
               </a:rPr>
-              <a:t>QFN32 佔 38.6% 工時，卻只有 22/100 site 裝著它</a:t>
+              <a:t>這 200 批裡 QFN32 佔 38.6% 工時，卻只有 22/100 site 裝著它</a:t>
             </a:r>
             <a:endParaRPr lang="en-US" sz="1200" dirty="0"/>
           </a:p>
@@ -4264,8 +4264,8 @@
         </p:blipFill>
         <p:spPr>
           <a:xfrm>
-            <a:off x="1344168" y="1280160"/>
-            <a:ext cx="9509760" cy="3929003"/>
+            <a:off x="1618488" y="1243584"/>
+            <a:ext cx="8961120" cy="3804662"/>
           </a:xfrm>
           <a:prstGeom prst="rect">
             <a:avLst/>
@@ -4280,12 +4280,12 @@
         </p:nvSpPr>
         <p:spPr>
           <a:xfrm>
-            <a:off x="566928" y="5285232"/>
-            <a:ext cx="5486400" cy="1188720"/>
+            <a:off x="566928" y="5138928"/>
+            <a:ext cx="5486400" cy="1261872"/>
           </a:xfrm>
           <a:prstGeom prst="roundRect">
             <a:avLst>
-              <a:gd name="adj" fmla="val 3846"/>
+              <a:gd name="adj" fmla="val 3623"/>
             </a:avLst>
           </a:prstGeom>
           <a:solidFill>
@@ -4307,7 +4307,7 @@
         </p:nvSpPr>
         <p:spPr>
           <a:xfrm>
-            <a:off x="804672" y="5541264"/>
+            <a:off x="804672" y="5394960"/>
             <a:ext cx="146304" cy="146304"/>
           </a:xfrm>
           <a:prstGeom prst="ellipse">
@@ -4332,7 +4332,7 @@
         </p:nvSpPr>
         <p:spPr>
           <a:xfrm>
-            <a:off x="1060704" y="5440680"/>
+            <a:off x="1060704" y="5294376"/>
             <a:ext cx="4754880" cy="329184"/>
           </a:xfrm>
           <a:prstGeom prst="rect">
@@ -4371,8 +4371,8 @@
         </p:nvSpPr>
         <p:spPr>
           <a:xfrm>
-            <a:off x="1060704" y="5797296"/>
-            <a:ext cx="4754880" cy="585216"/>
+            <a:off x="1060704" y="5650992"/>
+            <a:ext cx="4754880" cy="658368"/>
           </a:xfrm>
           <a:prstGeom prst="rect">
             <a:avLst/>
@@ -4427,7 +4427,7 @@
                 <a:ea typeface="Calibri" pitchFamily="34" charset="-122"/>
                 <a:cs typeface="Calibri" pitchFamily="34" charset="-120"/>
               </a:rPr>
-              <a:t>模擬器的跑分表直接有這兩欄，現場的機台稼動報表也有</a:t>
+              <a:t>用「切換前」的排程量一次就好，現場稼動報表就有這兩欄</a:t>
             </a:r>
             <a:endParaRPr lang="en-US" sz="1200" dirty="0"/>
           </a:p>
@@ -4441,12 +4441,12 @@
         </p:nvSpPr>
         <p:spPr>
           <a:xfrm>
-            <a:off x="6172200" y="5285232"/>
-            <a:ext cx="5449824" cy="1188720"/>
+            <a:off x="6172200" y="5138928"/>
+            <a:ext cx="5449824" cy="1261872"/>
           </a:xfrm>
           <a:prstGeom prst="roundRect">
             <a:avLst>
-              <a:gd name="adj" fmla="val 3846"/>
+              <a:gd name="adj" fmla="val 3623"/>
             </a:avLst>
           </a:prstGeom>
           <a:solidFill>
@@ -4468,7 +4468,7 @@
         </p:nvSpPr>
         <p:spPr>
           <a:xfrm>
-            <a:off x="6409944" y="5541264"/>
+            <a:off x="6409944" y="5394960"/>
             <a:ext cx="146304" cy="146304"/>
           </a:xfrm>
           <a:prstGeom prst="ellipse">
@@ -4493,7 +4493,7 @@
         </p:nvSpPr>
         <p:spPr>
           <a:xfrm>
-            <a:off x="6665976" y="5440680"/>
+            <a:off x="6665976" y="5294376"/>
             <a:ext cx="4718304" cy="329184"/>
           </a:xfrm>
           <a:prstGeom prst="rect">
@@ -4532,8 +4532,8 @@
         </p:nvSpPr>
         <p:spPr>
           <a:xfrm>
-            <a:off x="6665976" y="5797296"/>
-            <a:ext cx="4718304" cy="585216"/>
+            <a:off x="6665976" y="5650992"/>
+            <a:ext cx="4718304" cy="658368"/>
           </a:xfrm>
           <a:prstGeom prst="rect">
             <a:avLst/>
@@ -4564,7 +4564,7 @@
                 <a:ea typeface="Calibri" pitchFamily="34" charset="-122"/>
                 <a:cs typeface="Calibri" pitchFamily="34" charset="-120"/>
               </a:rPr>
-              <a:t>超過 35% → 改用「省改機優先」，10 組情境全對</a:t>
+              <a:t>超過 35% → 改用「省改機優先」，11 組情境全對</a:t>
             </a:r>
             <a:endParaRPr lang="en-US" sz="1200" dirty="0"/>
           </a:p>
@@ -4588,7 +4588,7 @@
                 <a:ea typeface="Calibri" pitchFamily="34" charset="-122"/>
                 <a:cs typeface="Calibri" pitchFamily="34" charset="-120"/>
               </a:rPr>
-              <a:t>低於 30% → 改用「大批給快機」；30～35% 之間兩者差不到 15%</a:t>
+              <a:t>低於 30% → 改用「大批給快機」；30～35% 兩者差不到 15%</a:t>
             </a:r>
             <a:endParaRPr lang="en-US" sz="1200" dirty="0"/>
           </a:p>
@@ -4602,8 +4602,8 @@
         </p:nvSpPr>
         <p:spPr>
           <a:xfrm>
-            <a:off x="566928" y="6492240"/>
-            <a:ext cx="11055096" cy="173736"/>
+            <a:off x="566928" y="6437376"/>
+            <a:ext cx="11055096" cy="237744"/>
           </a:xfrm>
           <a:prstGeom prst="rect">
             <a:avLst/>
@@ -4619,7 +4619,7 @@
               <a:buNone/>
             </a:pPr>
             <a:r>
-              <a:rPr lang="en-US" sz="950" dirty="0">
+              <a:rPr lang="en-US" sz="900" dirty="0">
                 <a:solidFill>
                   <a:srgbClr val="5A6785"/>
                 </a:solidFill>
@@ -4627,9 +4627,9 @@
                 <a:ea typeface="Calibri" pitchFamily="34" charset="-122"/>
                 <a:cs typeface="Calibri" pitchFamily="34" charset="-120"/>
               </a:rPr>
-              <a:t>註　兩項要合計才準：5 台機那三組是改機本身吃掉 35%（等人只有 0～2%），25 台機 200 批 3 人那組反過來是等人吃掉 36%（改機只有 10%）——只看其中一項都會判錯。量測時用現行的「追交期」排程當基準。</a:t>
-            </a:r>
-            <a:endParaRPr lang="en-US" sz="950" dirty="0"/>
+              <a:t>註　① 兩項要合計才準：5 台機那三組是改機吃掉 35%（等人只有 0～2%），25 台機 200 批 3 人那組反過來是等人吃掉 36%（改機只有 10%）——只看一項會判錯。② 全部以現行的「追交期」排程量測。③ 切換到省改機之後這個數字會自己掉下來（43.3% → 27.5%），那是措施生效，不是要你切回去。</a:t>
+            </a:r>
+            <a:endParaRPr lang="en-US" sz="900" dirty="0"/>
           </a:p>
         </p:txBody>
       </p:sp>
@@ -5686,7 +5686,7 @@
                 <a:ea typeface="Calibri" pitchFamily="34" charset="-122"/>
                 <a:cs typeface="Calibri" pitchFamily="34" charset="-120"/>
               </a:rPr>
-              <a:t>但第 1 項有前提：省改機是「改機＋等工程師吃掉機台時間超過 35%」時的最佳解；低於 30% 就該改用「大批給快機」（見第 12 頁）。班別與機隊狀況不同，規則就該不同。</a:t>
+              <a:t>但第 1 項有前提：省改機是「改機＋等工程師吃掉機台時間超過 35%」時的最佳解；低於 30% 就該改用「大批給快機」（見第 13 頁）。班別與機隊狀況不同，規則就該不同。</a:t>
             </a:r>
             <a:endParaRPr lang="en-US" sz="1150" dirty="0"/>
           </a:p>
@@ -7186,7 +7186,7 @@
                 <a:ea typeface="Calibri" pitchFamily="34" charset="-122"/>
                 <a:cs typeface="Calibri" pitchFamily="34" charset="-120"/>
               </a:rPr>
-              <a:t>實際的 WIP 清單（第 9~10 頁用模擬資料）</a:t>
+              <a:t>實際的 WIP 清單（第 10~13 頁用模擬資料）</a:t>
             </a:r>
             <a:endParaRPr lang="en-US" sz="1200" dirty="0"/>
           </a:p>
@@ -8605,7 +8605,7 @@
                 <a:ea typeface="Calibri" pitchFamily="34" charset="-122"/>
                 <a:cs typeface="Calibri" pitchFamily="34" charset="-120"/>
               </a:rPr>
-              <a:t>模型不是假設出來的：用現場三項實測值反推參數，三項同時對上才開始分析</a:t>
+              <a:t>模型不是假設出來的：用現場三項實測值反推參數，三項同時對上才開始分析。右圖是校準後的基準情境</a:t>
             </a:r>
             <a:endParaRPr lang="en-US" sz="1350" dirty="0"/>
           </a:p>
@@ -10129,6 +10129,45 @@
         </p:nvSpPr>
         <p:spPr>
           <a:xfrm>
+            <a:off x="7406640" y="6217920"/>
+            <a:ext cx="4206240" cy="384048"/>
+          </a:xfrm>
+          <a:prstGeom prst="rect">
+            <a:avLst/>
+          </a:prstGeom>
+          <a:noFill/>
+          <a:ln/>
+        </p:spPr>
+        <p:txBody>
+          <a:bodyPr wrap="square" rtlCol="0" anchor="ctr"/>
+          <a:lstStyle/>
+          <a:p>
+            <a:pPr indent="0" marL="0">
+              <a:buNone/>
+            </a:pPr>
+            <a:r>
+              <a:rPr lang="en-US" sz="1000" dirty="0">
+                <a:solidFill>
+                  <a:srgbClr val="5A6785"/>
+                </a:solidFill>
+                <a:latin typeface="Calibri" pitchFamily="34" charset="0"/>
+                <a:ea typeface="Calibri" pitchFamily="34" charset="-122"/>
+                <a:cs typeface="Calibri" pitchFamily="34" charset="-120"/>
+              </a:rPr>
+              <a:t>右圖是基準情境（已採用省改機＋即時派工＋10 人）；現場典型做法的稼動只有 29.2%，見第 9 頁的起點 A。</a:t>
+            </a:r>
+            <a:endParaRPr lang="en-US" sz="1000" dirty="0"/>
+          </a:p>
+        </p:txBody>
+      </p:sp>
+      <p:sp>
+        <p:nvSpPr>
+          <p:cNvPr id="16" name="Text 12"/>
+          <p:cNvSpPr txBox="1"/>
+          <p:nvPr/>
+        </p:nvSpPr>
+        <p:spPr>
+          <a:xfrm>
             <a:off x="566928" y="5650992"/>
             <a:ext cx="6675120" cy="365760"/>
           </a:xfrm>
@@ -11481,7 +11520,7 @@
                 <a:ea typeface="Calibri" pitchFamily="34" charset="-122"/>
                 <a:cs typeface="Calibri" pitchFamily="34" charset="-120"/>
               </a:rPr>
-              <a:t>機台 site 數低、測試遠長於改機時，追交期才是對的</a:t>
+              <a:t>機台或人力寬裕時改用「大批給快機」更快，判斷方式見第 13 頁</a:t>
             </a:r>
             <a:endParaRPr lang="en-US" sz="1200" dirty="0"/>
           </a:p>
@@ -12235,8 +12274,8 @@
         </p:blipFill>
         <p:spPr>
           <a:xfrm>
-            <a:off x="566928" y="1371600"/>
-            <a:ext cx="4754880" cy="3616979"/>
+            <a:off x="566928" y="1353312"/>
+            <a:ext cx="4572000" cy="3477864"/>
           </a:xfrm>
           <a:prstGeom prst="rect">
             <a:avLst/>
@@ -12259,8 +12298,8 @@
         </p:blipFill>
         <p:spPr>
           <a:xfrm>
-            <a:off x="5760720" y="1371600"/>
-            <a:ext cx="5852160" cy="3666767"/>
+            <a:off x="5852160" y="1353312"/>
+            <a:ext cx="5623560" cy="3523534"/>
           </a:xfrm>
           <a:prstGeom prst="rect">
             <a:avLst/>
@@ -12275,12 +12314,12 @@
         </p:nvSpPr>
         <p:spPr>
           <a:xfrm>
-            <a:off x="566928" y="5138928"/>
-            <a:ext cx="5486400" cy="1444752"/>
+            <a:off x="566928" y="4983480"/>
+            <a:ext cx="5486400" cy="1627632"/>
           </a:xfrm>
           <a:prstGeom prst="roundRect">
             <a:avLst>
-              <a:gd name="adj" fmla="val 3165"/>
+              <a:gd name="adj" fmla="val 2809"/>
             </a:avLst>
           </a:prstGeom>
           <a:solidFill>
@@ -12302,7 +12341,7 @@
         </p:nvSpPr>
         <p:spPr>
           <a:xfrm>
-            <a:off x="804672" y="5394960"/>
+            <a:off x="804672" y="5239512"/>
             <a:ext cx="146304" cy="146304"/>
           </a:xfrm>
           <a:prstGeom prst="ellipse">
@@ -12327,7 +12366,7 @@
         </p:nvSpPr>
         <p:spPr>
           <a:xfrm>
-            <a:off x="1060704" y="5294376"/>
+            <a:off x="1060704" y="5138928"/>
             <a:ext cx="4754880" cy="329184"/>
           </a:xfrm>
           <a:prstGeom prst="rect">
@@ -12352,7 +12391,7 @@
                 <a:ea typeface="Calibri" pitchFamily="34" charset="-122"/>
                 <a:cs typeface="Calibri" pitchFamily="34" charset="-120"/>
               </a:rPr>
-              <a:t>專用化：現況已接近最佳</a:t>
+              <a:t>彈性機的「台數」已接近最佳</a:t>
             </a:r>
             <a:endParaRPr lang="en-US" sz="1450" dirty="0"/>
           </a:p>
@@ -12366,8 +12405,8 @@
         </p:nvSpPr>
         <p:spPr>
           <a:xfrm>
-            <a:off x="1060704" y="5650992"/>
-            <a:ext cx="4754880" cy="841248"/>
+            <a:off x="1060704" y="5495544"/>
+            <a:ext cx="4754880" cy="1024128"/>
           </a:xfrm>
           <a:prstGeom prst="rect">
             <a:avLst/>
@@ -12422,7 +12461,7 @@
                 <a:ea typeface="Calibri" pitchFamily="34" charset="-122"/>
                 <a:cs typeface="Calibri" pitchFamily="34" charset="-120"/>
               </a:rPr>
-              <a:t>完全專用再省 70 分／台／日，但彈性歸零</a:t>
+              <a:t>完全專用再省 70 分／台／日，但急單無處插隊</a:t>
             </a:r>
             <a:endParaRPr lang="en-US" sz="1200" dirty="0"/>
           </a:p>
@@ -12446,7 +12485,7 @@
                 <a:ea typeface="Calibri" pitchFamily="34" charset="-122"/>
                 <a:cs typeface="Calibri" pitchFamily="34" charset="-120"/>
               </a:rPr>
-              <a:t>急單無處插隊，逾期反而由 5.0 升到 5.5 批</a:t>
+              <a:t>專用機「各綁哪一種封裝」是另一回事，見第 12 頁</a:t>
             </a:r>
             <a:endParaRPr lang="en-US" sz="1200" dirty="0"/>
           </a:p>
@@ -12460,12 +12499,12 @@
         </p:nvSpPr>
         <p:spPr>
           <a:xfrm>
-            <a:off x="6172200" y="5138928"/>
-            <a:ext cx="5413248" cy="1444752"/>
+            <a:off x="6172200" y="4983480"/>
+            <a:ext cx="5413248" cy="1627632"/>
           </a:xfrm>
           <a:prstGeom prst="roundRect">
             <a:avLst>
-              <a:gd name="adj" fmla="val 3165"/>
+              <a:gd name="adj" fmla="val 2809"/>
             </a:avLst>
           </a:prstGeom>
           <a:solidFill>
@@ -12487,7 +12526,7 @@
         </p:nvSpPr>
         <p:spPr>
           <a:xfrm>
-            <a:off x="6409944" y="5394960"/>
+            <a:off x="6409944" y="5239512"/>
             <a:ext cx="146304" cy="146304"/>
           </a:xfrm>
           <a:prstGeom prst="ellipse">
@@ -12512,7 +12551,7 @@
         </p:nvSpPr>
         <p:spPr>
           <a:xfrm>
-            <a:off x="6665976" y="5294376"/>
+            <a:off x="6665976" y="5138928"/>
             <a:ext cx="4681728" cy="329184"/>
           </a:xfrm>
           <a:prstGeom prst="rect">
@@ -12551,8 +12590,8 @@
         </p:nvSpPr>
         <p:spPr>
           <a:xfrm>
-            <a:off x="6665976" y="5650992"/>
-            <a:ext cx="4681728" cy="841248"/>
+            <a:off x="6665976" y="5495544"/>
+            <a:ext cx="4681728" cy="1024128"/>
           </a:xfrm>
           <a:prstGeom prst="rect">
             <a:avLst/>

--- a/docs/測試排程分析報告.pptx
+++ b/docs/測試排程分析報告.pptx
@@ -20,9 +20,10 @@
     <p:sldId id="268" r:id="rId14"/>
     <p:sldId id="269" r:id="rId15"/>
     <p:sldId id="270" r:id="rId16"/>
+    <p:sldId id="271" r:id="rId17"/>
   </p:sldIdLst>
   <p:notesMasterIdLst>
-    <p:notesMasterId r:id="rId17"/>
+    <p:notesMasterId r:id="rId18"/>
   </p:notesMasterIdLst>
   <p:sldSz cx="12192000" cy="6858000"/>
   <p:notesSz cx="6858000" cy="12192000"/>
@@ -956,7 +957,7 @@
           <a:p>
             <a:r>
               <a:rPr lang="en-US" dirty="0"/>
-              <a:t>前兩項是純管理決策，今天就能改；第三項是人力預算；第四項需要 IT 或設備工程投入。</a:t>
+              <a:t>重點不是哪一格數字，而是治具套數和機台數、人力一樣會決定該用哪一種排程法則。請提供實際 Kit 套數後重跑本頁。</a:t>
             </a:r>
             <a:endParaRPr lang="en-US" dirty="0"/>
           </a:p>
@@ -1044,7 +1045,7 @@
           <a:p>
             <a:r>
               <a:rPr lang="en-US" dirty="0"/>
-              <a:t>四個階段刻意分開，避免同時變動多個變數而無法歸因。最大的單一不確定性是換程式是否佔用工程師。</a:t>
+              <a:t>前兩項是純管理決策，今天就能改；第三項是人力預算；第四項需要 IT 或設備工程投入。</a:t>
             </a:r>
             <a:endParaRPr lang="en-US" dirty="0"/>
           </a:p>
@@ -1068,6 +1069,94 @@
             <a:fld id="{F7021451-1387-4CA6-816F-3879F97B5CBC}" type="slidenum">
               <a:rPr lang="en-US"/>
               <a:t>15</a:t>
+            </a:fld>
+            <a:endParaRPr lang="en-US"/>
+          </a:p>
+        </p:txBody>
+      </p:sp>
+    </p:spTree>
+    <p:extLst>
+      <p:ext uri="{BB962C8B-B14F-4D97-AF65-F5344CB8AC3E}">
+        <p14:creationId xmlns:p14="http://schemas.microsoft.com/office/powerpoint/2010/main" val="1024086991"/>
+      </p:ext>
+    </p:extLst>
+  </p:cSld>
+  <p:clrMapOvr>
+    <a:masterClrMapping/>
+  </p:clrMapOvr>
+</p:notes>
+</file>
+
+<file path=ppt/notesSlides/notesSlide16.xml><?xml version="1.0" encoding="utf-8"?>
+<p:notes xmlns:a="http://schemas.openxmlformats.org/drawingml/2006/main" xmlns:r="http://schemas.openxmlformats.org/officeDocument/2006/relationships" xmlns:p="http://schemas.openxmlformats.org/presentationml/2006/main">
+  <p:cSld>
+    <p:spTree>
+      <p:nvGrpSpPr>
+        <p:cNvPr id="1" name=""/>
+        <p:cNvGrpSpPr/>
+        <p:nvPr/>
+      </p:nvGrpSpPr>
+      <p:grpSpPr>
+        <a:xfrm>
+          <a:off x="0" y="0"/>
+          <a:ext cx="0" cy="0"/>
+          <a:chOff x="0" y="0"/>
+          <a:chExt cx="0" cy="0"/>
+        </a:xfrm>
+      </p:grpSpPr>
+      <p:sp>
+        <p:nvSpPr>
+          <p:cNvPr id="2" name="Slide Image Placeholder 1"/>
+          <p:cNvSpPr>
+            <a:spLocks noGrp="1" noRot="1" noChangeAspect="1"/>
+          </p:cNvSpPr>
+          <p:nvPr>
+            <p:ph type="sldImg"/>
+          </p:nvPr>
+        </p:nvSpPr>
+        <p:spPr/>
+      </p:sp>
+      <p:sp>
+        <p:nvSpPr>
+          <p:cNvPr id="3" name="Notes Placeholder 2"/>
+          <p:cNvSpPr>
+            <a:spLocks noGrp="1"/>
+          </p:cNvSpPr>
+          <p:nvPr>
+            <p:ph type="body" idx="1"/>
+          </p:nvPr>
+        </p:nvSpPr>
+        <p:spPr/>
+        <p:txBody>
+          <a:bodyPr/>
+          <a:lstStyle/>
+          <a:p>
+            <a:r>
+              <a:rPr lang="en-US" dirty="0"/>
+              <a:t>四個階段刻意分開，避免同時變動多個變數而無法歸因。最大的單一不確定性是換程式是否佔用工程師。</a:t>
+            </a:r>
+            <a:endParaRPr lang="en-US" dirty="0"/>
+          </a:p>
+        </p:txBody>
+      </p:sp>
+      <p:sp>
+        <p:nvSpPr>
+          <p:cNvPr id="4" name="Slide Number Placeholder 3"/>
+          <p:cNvSpPr>
+            <a:spLocks noGrp="1"/>
+          </p:cNvSpPr>
+          <p:nvPr>
+            <p:ph type="sldNum" sz="quarter" idx="10"/>
+          </p:nvPr>
+        </p:nvSpPr>
+        <p:spPr/>
+        <p:txBody>
+          <a:bodyPr/>
+          <a:lstStyle/>
+          <a:p>
+            <a:fld id="{F7021451-1387-4CA6-816F-3879F97B5CBC}" type="slidenum">
+              <a:rPr lang="en-US"/>
+              <a:t>16</a:t>
             </a:fld>
             <a:endParaRPr lang="en-US"/>
           </a:p>
@@ -4644,6 +4733,608 @@
 <file path=ppt/slides/slide14.xml><?xml version="1.0" encoding="utf-8"?>
 <p:sld xmlns:a="http://schemas.openxmlformats.org/drawingml/2006/main" xmlns:r="http://schemas.openxmlformats.org/officeDocument/2006/relationships" xmlns:p="http://schemas.openxmlformats.org/presentationml/2006/main">
   <p:cSld name="Slide 14">
+    <p:spTree>
+      <p:nvGrpSpPr>
+        <p:cNvPr id="1" name=""/>
+        <p:cNvGrpSpPr/>
+        <p:nvPr/>
+      </p:nvGrpSpPr>
+      <p:grpSpPr>
+        <a:xfrm>
+          <a:off x="0" y="0"/>
+          <a:ext cx="0" cy="0"/>
+          <a:chOff x="0" y="0"/>
+          <a:chExt cx="0" cy="0"/>
+        </a:xfrm>
+      </p:grpSpPr>
+      <p:sp>
+        <p:nvSpPr>
+          <p:cNvPr id="2" name="Text 0"/>
+          <p:cNvSpPr txBox="1"/>
+          <p:nvPr/>
+        </p:nvSpPr>
+        <p:spPr>
+          <a:xfrm>
+            <a:off x="566928" y="384048"/>
+            <a:ext cx="502920" cy="457200"/>
+          </a:xfrm>
+          <a:prstGeom prst="rect">
+            <a:avLst/>
+          </a:prstGeom>
+          <a:noFill/>
+          <a:ln/>
+        </p:spPr>
+        <p:txBody>
+          <a:bodyPr wrap="square" rtlCol="0" anchor="ctr"/>
+          <a:lstStyle/>
+          <a:p>
+            <a:pPr indent="0" marL="0">
+              <a:buNone/>
+            </a:pPr>
+            <a:r>
+              <a:rPr lang="en-US" sz="1300" b="1" dirty="0">
+                <a:solidFill>
+                  <a:srgbClr val="1C7293"/>
+                </a:solidFill>
+                <a:latin typeface="Calibri" pitchFamily="34" charset="0"/>
+                <a:ea typeface="Calibri" pitchFamily="34" charset="-122"/>
+                <a:cs typeface="Calibri" pitchFamily="34" charset="-120"/>
+              </a:rPr>
+              <a:t>13</a:t>
+            </a:r>
+            <a:endParaRPr lang="en-US" sz="1300" dirty="0"/>
+          </a:p>
+        </p:txBody>
+      </p:sp>
+      <p:sp>
+        <p:nvSpPr>
+          <p:cNvPr id="3" name="Text 1"/>
+          <p:cNvSpPr txBox="1"/>
+          <p:nvPr/>
+        </p:nvSpPr>
+        <p:spPr>
+          <a:xfrm>
+            <a:off x="1143000" y="310896"/>
+            <a:ext cx="10424160" cy="566928"/>
+          </a:xfrm>
+          <a:prstGeom prst="rect">
+            <a:avLst/>
+          </a:prstGeom>
+          <a:noFill/>
+          <a:ln/>
+        </p:spPr>
+        <p:txBody>
+          <a:bodyPr wrap="square" rtlCol="0" anchor="ctr"/>
+          <a:lstStyle/>
+          <a:p>
+            <a:pPr indent="0" marL="0">
+              <a:buNone/>
+            </a:pPr>
+            <a:r>
+              <a:rPr lang="en-US" sz="3000" b="1" dirty="0">
+                <a:solidFill>
+                  <a:srgbClr val="1E2761"/>
+                </a:solidFill>
+                <a:latin typeface="Cambria" pitchFamily="34" charset="0"/>
+                <a:ea typeface="Cambria" pitchFamily="34" charset="-122"/>
+                <a:cs typeface="Cambria" pitchFamily="34" charset="-120"/>
+              </a:rPr>
+              <a:t>治具（Kit）套數會換掉冠軍法則</a:t>
+            </a:r>
+            <a:endParaRPr lang="en-US" sz="3000" dirty="0"/>
+          </a:p>
+        </p:txBody>
+      </p:sp>
+      <p:sp>
+        <p:nvSpPr>
+          <p:cNvPr id="4" name="Text 2"/>
+          <p:cNvSpPr txBox="1"/>
+          <p:nvPr/>
+        </p:nvSpPr>
+        <p:spPr>
+          <a:xfrm>
+            <a:off x="1143000" y="896112"/>
+            <a:ext cx="10424160" cy="384048"/>
+          </a:xfrm>
+          <a:prstGeom prst="rect">
+            <a:avLst/>
+          </a:prstGeom>
+          <a:noFill/>
+          <a:ln/>
+        </p:spPr>
+        <p:txBody>
+          <a:bodyPr wrap="square" rtlCol="0" anchor="ctr"/>
+          <a:lstStyle/>
+          <a:p>
+            <a:pPr indent="0" marL="0">
+              <a:buNone/>
+            </a:pPr>
+            <a:r>
+              <a:rPr lang="en-US" sz="1350" dirty="0">
+                <a:solidFill>
+                  <a:srgbClr val="5A6785"/>
+                </a:solidFill>
+                <a:latin typeface="Calibri" pitchFamily="34" charset="0"/>
+                <a:ea typeface="Calibri" pitchFamily="34" charset="-122"/>
+                <a:cs typeface="Calibri" pitchFamily="34" charset="-120"/>
+              </a:rPr>
+              <a:t>同一份 200 批 WIP、同一組 25 台機、同樣 10 位工程師，只改變「每種封裝有幾套治具」（本頁套數為假設值，見註）</a:t>
+            </a:r>
+            <a:endParaRPr lang="en-US" sz="1350" dirty="0"/>
+          </a:p>
+        </p:txBody>
+      </p:sp>
+      <p:pic>
+        <p:nvPicPr>
+          <p:cNvPr id="5" name="Image 0" descr="charts/c_kit.png">    </p:cNvPr>
+          <p:cNvPicPr>
+            <a:picLocks noChangeAspect="1"/>
+          </p:cNvPicPr>
+          <p:nvPr/>
+        </p:nvPicPr>
+        <p:blipFill>
+          <a:blip r:embed="rId1"/>
+          <a:stretch>
+            <a:fillRect/>
+          </a:stretch>
+        </p:blipFill>
+        <p:spPr>
+          <a:xfrm>
+            <a:off x="566928" y="1280160"/>
+            <a:ext cx="5029200" cy="3347667"/>
+          </a:xfrm>
+          <a:prstGeom prst="rect">
+            <a:avLst/>
+          </a:prstGeom>
+        </p:spPr>
+      </p:pic>
+      <p:pic>
+        <p:nvPicPr>
+          <p:cNvPr id="6" name="Image 1" descr="charts/c_kitdelta.png">    </p:cNvPr>
+          <p:cNvPicPr>
+            <a:picLocks noChangeAspect="1"/>
+          </p:cNvPicPr>
+          <p:nvPr/>
+        </p:nvPicPr>
+        <p:blipFill>
+          <a:blip r:embed="rId2"/>
+          <a:stretch>
+            <a:fillRect/>
+          </a:stretch>
+        </p:blipFill>
+        <p:spPr>
+          <a:xfrm>
+            <a:off x="6592824" y="1280160"/>
+            <a:ext cx="5029200" cy="3151128"/>
+          </a:xfrm>
+          <a:prstGeom prst="rect">
+            <a:avLst/>
+          </a:prstGeom>
+        </p:spPr>
+      </p:pic>
+      <p:sp>
+        <p:nvSpPr>
+          <p:cNvPr id="7" name="Shape 3"/>
+          <p:cNvSpPr/>
+          <p:nvPr/>
+        </p:nvSpPr>
+        <p:spPr>
+          <a:xfrm>
+            <a:off x="566928" y="4754880"/>
+            <a:ext cx="5486400" cy="1481328"/>
+          </a:xfrm>
+          <a:prstGeom prst="roundRect">
+            <a:avLst>
+              <a:gd name="adj" fmla="val 3086"/>
+            </a:avLst>
+          </a:prstGeom>
+          <a:solidFill>
+            <a:srgbClr val="F5F7FB"/>
+          </a:solidFill>
+          <a:ln w="12700">
+            <a:solidFill>
+              <a:srgbClr val="FFFFFF"/>
+            </a:solidFill>
+            <a:prstDash val="solid"/>
+          </a:ln>
+        </p:spPr>
+      </p:sp>
+      <p:sp>
+        <p:nvSpPr>
+          <p:cNvPr id="8" name="Shape 4"/>
+          <p:cNvSpPr/>
+          <p:nvPr/>
+        </p:nvSpPr>
+        <p:spPr>
+          <a:xfrm>
+            <a:off x="804672" y="5010912"/>
+            <a:ext cx="146304" cy="146304"/>
+          </a:xfrm>
+          <a:prstGeom prst="ellipse">
+            <a:avLst/>
+          </a:prstGeom>
+          <a:solidFill>
+            <a:srgbClr val="C2410C"/>
+          </a:solidFill>
+          <a:ln w="12700">
+            <a:solidFill>
+              <a:srgbClr val="C2410C"/>
+            </a:solidFill>
+            <a:prstDash val="solid"/>
+          </a:ln>
+        </p:spPr>
+      </p:sp>
+      <p:sp>
+        <p:nvSpPr>
+          <p:cNvPr id="9" name="Text 5"/>
+          <p:cNvSpPr txBox="1"/>
+          <p:nvPr/>
+        </p:nvSpPr>
+        <p:spPr>
+          <a:xfrm>
+            <a:off x="1060704" y="4910328"/>
+            <a:ext cx="4754880" cy="329184"/>
+          </a:xfrm>
+          <a:prstGeom prst="rect">
+            <a:avLst/>
+          </a:prstGeom>
+          <a:noFill/>
+          <a:ln/>
+        </p:spPr>
+        <p:txBody>
+          <a:bodyPr wrap="square" lIns="0" tIns="0" rIns="0" bIns="0" rtlCol="0" anchor="ctr"/>
+          <a:lstStyle/>
+          <a:p>
+            <a:pPr indent="0" marL="0">
+              <a:buNone/>
+            </a:pPr>
+            <a:r>
+              <a:rPr lang="en-US" sz="1450" b="1" dirty="0">
+                <a:solidFill>
+                  <a:srgbClr val="1E2761"/>
+                </a:solidFill>
+                <a:latin typeface="Calibri" pitchFamily="34" charset="0"/>
+                <a:ea typeface="Calibri" pitchFamily="34" charset="-122"/>
+                <a:cs typeface="Calibri" pitchFamily="34" charset="-120"/>
+              </a:rPr>
+              <a:t>治具一變少，冠軍就換人</a:t>
+            </a:r>
+            <a:endParaRPr lang="en-US" sz="1450" dirty="0"/>
+          </a:p>
+        </p:txBody>
+      </p:sp>
+      <p:sp>
+        <p:nvSpPr>
+          <p:cNvPr id="10" name="Text 6"/>
+          <p:cNvSpPr txBox="1"/>
+          <p:nvPr/>
+        </p:nvSpPr>
+        <p:spPr>
+          <a:xfrm>
+            <a:off x="1060704" y="5266944"/>
+            <a:ext cx="4754880" cy="877824"/>
+          </a:xfrm>
+          <a:prstGeom prst="rect">
+            <a:avLst/>
+          </a:prstGeom>
+          <a:noFill/>
+          <a:ln/>
+        </p:spPr>
+        <p:txBody>
+          <a:bodyPr wrap="square" lIns="0" tIns="0" rIns="0" bIns="0" rtlCol="0" anchor="ctr"/>
+          <a:lstStyle/>
+          <a:p>
+            <a:pPr marL="342900" indent="-342900">
+              <a:lnSpc>
+                <a:spcPts val="1800"/>
+              </a:lnSpc>
+              <a:spcAft>
+                <a:spcPts val="400"/>
+              </a:spcAft>
+              <a:buSzPct val="100000"/>
+              <a:buChar char="•"/>
+            </a:pPr>
+            <a:r>
+              <a:rPr lang="en-US" sz="1200" dirty="0">
+                <a:solidFill>
+                  <a:srgbClr val="16213E"/>
+                </a:solidFill>
+                <a:latin typeface="Calibri" pitchFamily="34" charset="0"/>
+                <a:ea typeface="Calibri" pitchFamily="34" charset="-122"/>
+                <a:cs typeface="Calibri" pitchFamily="34" charset="-120"/>
+              </a:rPr>
+              <a:t>不限量：大批給快機 9.7 h 最快</a:t>
+            </a:r>
+            <a:endParaRPr lang="en-US" sz="1200" dirty="0"/>
+          </a:p>
+          <a:p>
+            <a:pPr marL="342900" indent="-342900">
+              <a:lnSpc>
+                <a:spcPts val="1800"/>
+              </a:lnSpc>
+              <a:spcAft>
+                <a:spcPts val="400"/>
+              </a:spcAft>
+              <a:buSzPct val="100000"/>
+              <a:buChar char="•"/>
+            </a:pPr>
+            <a:r>
+              <a:rPr lang="en-US" sz="1200" dirty="0">
+                <a:solidFill>
+                  <a:srgbClr val="16213E"/>
+                </a:solidFill>
+                <a:latin typeface="Calibri" pitchFamily="34" charset="0"/>
+                <a:ea typeface="Calibri" pitchFamily="34" charset="-122"/>
+                <a:cs typeface="Calibri" pitchFamily="34" charset="-120"/>
+              </a:rPr>
+              <a:t>沒有備品：省改機 11.1 h 反而最快</a:t>
+            </a:r>
+            <a:endParaRPr lang="en-US" sz="1200" dirty="0"/>
+          </a:p>
+          <a:p>
+            <a:pPr marL="342900" indent="-342900">
+              <a:lnSpc>
+                <a:spcPts val="1800"/>
+              </a:lnSpc>
+              <a:spcAft>
+                <a:spcPts val="400"/>
+              </a:spcAft>
+              <a:buSzPct val="100000"/>
+              <a:buChar char="•"/>
+            </a:pPr>
+            <a:r>
+              <a:rPr lang="en-US" sz="1200" dirty="0">
+                <a:solidFill>
+                  <a:srgbClr val="16213E"/>
+                </a:solidFill>
+                <a:latin typeface="Calibri" pitchFamily="34" charset="0"/>
+                <a:ea typeface="Calibri" pitchFamily="34" charset="-122"/>
+                <a:cs typeface="Calibri" pitchFamily="34" charset="-120"/>
+              </a:rPr>
+              <a:t>每種 2 套：七種法則全落到 18～32 h</a:t>
+            </a:r>
+            <a:endParaRPr lang="en-US" sz="1200" dirty="0"/>
+          </a:p>
+        </p:txBody>
+      </p:sp>
+      <p:sp>
+        <p:nvSpPr>
+          <p:cNvPr id="11" name="Shape 7"/>
+          <p:cNvSpPr/>
+          <p:nvPr/>
+        </p:nvSpPr>
+        <p:spPr>
+          <a:xfrm>
+            <a:off x="6172200" y="4754880"/>
+            <a:ext cx="5449824" cy="1481328"/>
+          </a:xfrm>
+          <a:prstGeom prst="roundRect">
+            <a:avLst>
+              <a:gd name="adj" fmla="val 3086"/>
+            </a:avLst>
+          </a:prstGeom>
+          <a:solidFill>
+            <a:srgbClr val="F5F7FB"/>
+          </a:solidFill>
+          <a:ln w="12700">
+            <a:solidFill>
+              <a:srgbClr val="FFFFFF"/>
+            </a:solidFill>
+            <a:prstDash val="solid"/>
+          </a:ln>
+        </p:spPr>
+      </p:sp>
+      <p:sp>
+        <p:nvSpPr>
+          <p:cNvPr id="12" name="Shape 8"/>
+          <p:cNvSpPr/>
+          <p:nvPr/>
+        </p:nvSpPr>
+        <p:spPr>
+          <a:xfrm>
+            <a:off x="6409944" y="5010912"/>
+            <a:ext cx="146304" cy="146304"/>
+          </a:xfrm>
+          <a:prstGeom prst="ellipse">
+            <a:avLst/>
+          </a:prstGeom>
+          <a:solidFill>
+            <a:srgbClr val="9B1C1C"/>
+          </a:solidFill>
+          <a:ln w="12700">
+            <a:solidFill>
+              <a:srgbClr val="9B1C1C"/>
+            </a:solidFill>
+            <a:prstDash val="solid"/>
+          </a:ln>
+        </p:spPr>
+      </p:sp>
+      <p:sp>
+        <p:nvSpPr>
+          <p:cNvPr id="13" name="Text 9"/>
+          <p:cNvSpPr txBox="1"/>
+          <p:nvPr/>
+        </p:nvSpPr>
+        <p:spPr>
+          <a:xfrm>
+            <a:off x="6665976" y="4910328"/>
+            <a:ext cx="4718304" cy="329184"/>
+          </a:xfrm>
+          <a:prstGeom prst="rect">
+            <a:avLst/>
+          </a:prstGeom>
+          <a:noFill/>
+          <a:ln/>
+        </p:spPr>
+        <p:txBody>
+          <a:bodyPr wrap="square" lIns="0" tIns="0" rIns="0" bIns="0" rtlCol="0" anchor="ctr"/>
+          <a:lstStyle/>
+          <a:p>
+            <a:pPr indent="0" marL="0">
+              <a:buNone/>
+            </a:pPr>
+            <a:r>
+              <a:rPr lang="en-US" sz="1450" b="1" dirty="0">
+                <a:solidFill>
+                  <a:srgbClr val="1E2761"/>
+                </a:solidFill>
+                <a:latin typeface="Calibri" pitchFamily="34" charset="0"/>
+                <a:ea typeface="Calibri" pitchFamily="34" charset="-122"/>
+                <a:cs typeface="Calibri" pitchFamily="34" charset="-120"/>
+              </a:rPr>
+              <a:t>最怕治具不足的是「追交期」</a:t>
+            </a:r>
+            <a:endParaRPr lang="en-US" sz="1450" dirty="0"/>
+          </a:p>
+        </p:txBody>
+      </p:sp>
+      <p:sp>
+        <p:nvSpPr>
+          <p:cNvPr id="14" name="Text 10"/>
+          <p:cNvSpPr txBox="1"/>
+          <p:nvPr/>
+        </p:nvSpPr>
+        <p:spPr>
+          <a:xfrm>
+            <a:off x="6665976" y="5266944"/>
+            <a:ext cx="4718304" cy="877824"/>
+          </a:xfrm>
+          <a:prstGeom prst="rect">
+            <a:avLst/>
+          </a:prstGeom>
+          <a:noFill/>
+          <a:ln/>
+        </p:spPr>
+        <p:txBody>
+          <a:bodyPr wrap="square" lIns="0" tIns="0" rIns="0" bIns="0" rtlCol="0" anchor="ctr"/>
+          <a:lstStyle/>
+          <a:p>
+            <a:pPr marL="342900" indent="-342900">
+              <a:lnSpc>
+                <a:spcPts val="1800"/>
+              </a:lnSpc>
+              <a:spcAft>
+                <a:spcPts val="400"/>
+              </a:spcAft>
+              <a:buSzPct val="100000"/>
+              <a:buChar char="•"/>
+            </a:pPr>
+            <a:r>
+              <a:rPr lang="en-US" sz="1200" dirty="0">
+                <a:solidFill>
+                  <a:srgbClr val="16213E"/>
+                </a:solidFill>
+                <a:latin typeface="Calibri" pitchFamily="34" charset="0"/>
+                <a:ea typeface="Calibri" pitchFamily="34" charset="-122"/>
+                <a:cs typeface="Calibri" pitchFamily="34" charset="-120"/>
+              </a:rPr>
+              <a:t>EDD 從 11.2 h 變 26.8 h，七種法則最慘</a:t>
+            </a:r>
+            <a:endParaRPr lang="en-US" sz="1200" dirty="0"/>
+          </a:p>
+          <a:p>
+            <a:pPr marL="342900" indent="-342900">
+              <a:lnSpc>
+                <a:spcPts val="1800"/>
+              </a:lnSpc>
+              <a:spcAft>
+                <a:spcPts val="400"/>
+              </a:spcAft>
+              <a:buSzPct val="100000"/>
+              <a:buChar char="•"/>
+            </a:pPr>
+            <a:r>
+              <a:rPr lang="en-US" sz="1200" dirty="0">
+                <a:solidFill>
+                  <a:srgbClr val="16213E"/>
+                </a:solidFill>
+                <a:latin typeface="Calibri" pitchFamily="34" charset="0"/>
+                <a:ea typeface="Calibri" pitchFamily="34" charset="-122"/>
+                <a:cs typeface="Calibri" pitchFamily="34" charset="-120"/>
+              </a:rPr>
+              <a:t>交期排序會把同治具的批拆開互搶</a:t>
+            </a:r>
+            <a:endParaRPr lang="en-US" sz="1200" dirty="0"/>
+          </a:p>
+          <a:p>
+            <a:pPr marL="342900" indent="-342900">
+              <a:lnSpc>
+                <a:spcPts val="1800"/>
+              </a:lnSpc>
+              <a:spcAft>
+                <a:spcPts val="400"/>
+              </a:spcAft>
+              <a:buSzPct val="100000"/>
+              <a:buChar char="•"/>
+            </a:pPr>
+            <a:r>
+              <a:rPr lang="en-US" sz="1200" dirty="0">
+                <a:solidFill>
+                  <a:srgbClr val="16213E"/>
+                </a:solidFill>
+                <a:latin typeface="Calibri" pitchFamily="34" charset="0"/>
+                <a:ea typeface="Calibri" pitchFamily="34" charset="-122"/>
+                <a:cs typeface="Calibri" pitchFamily="34" charset="-120"/>
+              </a:rPr>
+              <a:t>省改機反而快 3.4 h：它本來就串同治具</a:t>
+            </a:r>
+            <a:endParaRPr lang="en-US" sz="1200" dirty="0"/>
+          </a:p>
+        </p:txBody>
+      </p:sp>
+      <p:sp>
+        <p:nvSpPr>
+          <p:cNvPr id="15" name="Text 11"/>
+          <p:cNvSpPr txBox="1"/>
+          <p:nvPr/>
+        </p:nvSpPr>
+        <p:spPr>
+          <a:xfrm>
+            <a:off x="566928" y="6272784"/>
+            <a:ext cx="11055096" cy="365760"/>
+          </a:xfrm>
+          <a:prstGeom prst="rect">
+            <a:avLst/>
+          </a:prstGeom>
+          <a:noFill/>
+          <a:ln/>
+        </p:spPr>
+        <p:txBody>
+          <a:bodyPr wrap="square" rtlCol="0" anchor="ctr"/>
+          <a:lstStyle/>
+          <a:p>
+            <a:pPr indent="0" marL="0">
+              <a:lnSpc>
+                <a:spcPts val="1200"/>
+              </a:lnSpc>
+              <a:buNone/>
+            </a:pPr>
+            <a:r>
+              <a:rPr lang="en-US" sz="900" dirty="0">
+                <a:solidFill>
+                  <a:srgbClr val="5A6785"/>
+                </a:solidFill>
+                <a:latin typeface="Calibri" pitchFamily="34" charset="0"/>
+                <a:ea typeface="Calibri" pitchFamily="34" charset="-122"/>
+                <a:cs typeface="Calibri" pitchFamily="34" charset="-120"/>
+              </a:rPr>
+              <a:t>註　① 本頁治具套數是假設值：「沒有備品」＝ 每種封裝的套數剛好等於現在裝著它的機台數，「每種只有 2 套」是壓力測試；要得到可用的結論，請填入實際套數（資料檔「配件」分頁）。② 模型規則：機台閒置、且佇列裡沒有同封裝的貨時，身上的治具可被別台拿走。③ 省改機變快不是因為治具變少——改機次數完全沒變，是稼動率從 34.8% 升到 43.3%（治具限制逼派工分散），同一組設定下 EDD 反而多花 15.6 h。</a:t>
+            </a:r>
+            <a:endParaRPr lang="en-US" sz="900" dirty="0"/>
+          </a:p>
+        </p:txBody>
+      </p:sp>
+    </p:spTree>
+  </p:cSld>
+  <p:clrMapOvr>
+    <a:masterClrMapping/>
+  </p:clrMapOvr>
+</p:sld>
+</file>
+
+<file path=ppt/slides/slide15.xml><?xml version="1.0" encoding="utf-8"?>
+<p:sld xmlns:a="http://schemas.openxmlformats.org/drawingml/2006/main" xmlns:r="http://schemas.openxmlformats.org/officeDocument/2006/relationships" xmlns:p="http://schemas.openxmlformats.org/presentationml/2006/main">
+  <p:cSld name="Slide 15">
     <p:bg>
       <p:bgPr>
         <a:solidFill>
@@ -4698,7 +5389,7 @@
                 <a:ea typeface="Calibri" pitchFamily="34" charset="-122"/>
                 <a:cs typeface="Calibri" pitchFamily="34" charset="-120"/>
               </a:rPr>
-              <a:t>13</a:t>
+              <a:t>14</a:t>
             </a:r>
             <a:endParaRPr lang="en-US" sz="1300" dirty="0"/>
           </a:p>
@@ -5700,9 +6391,9 @@
 </p:sld>
 </file>
 
-<file path=ppt/slides/slide15.xml><?xml version="1.0" encoding="utf-8"?>
+<file path=ppt/slides/slide16.xml><?xml version="1.0" encoding="utf-8"?>
 <p:sld xmlns:a="http://schemas.openxmlformats.org/drawingml/2006/main" xmlns:r="http://schemas.openxmlformats.org/officeDocument/2006/relationships" xmlns:p="http://schemas.openxmlformats.org/presentationml/2006/main">
-  <p:cSld name="Slide 15">
+  <p:cSld name="Slide 16">
     <p:spTree>
       <p:nvGrpSpPr>
         <p:cNvPr id="1" name=""/>
@@ -5750,7 +6441,7 @@
                 <a:ea typeface="Calibri" pitchFamily="34" charset="-122"/>
                 <a:cs typeface="Calibri" pitchFamily="34" charset="-120"/>
               </a:rPr>
-              <a:t>14</a:t>
+              <a:t>15</a:t>
             </a:r>
             <a:endParaRPr lang="en-US" sz="1300" dirty="0"/>
           </a:p>
@@ -7001,7 +7692,7 @@
                 <a:ea typeface="Calibri" pitchFamily="34" charset="-122"/>
                 <a:cs typeface="Calibri" pitchFamily="34" charset="-120"/>
               </a:rPr>
-              <a:t>Handler／Kit 數量限制（假設隨時可取得）</a:t>
+              <a:t>Handler 數量限制（治具已納入，見第 14 頁）</a:t>
             </a:r>
             <a:endParaRPr lang="en-US" sz="1200" dirty="0"/>
           </a:p>
@@ -7186,7 +7877,7 @@
                 <a:ea typeface="Calibri" pitchFamily="34" charset="-122"/>
                 <a:cs typeface="Calibri" pitchFamily="34" charset="-120"/>
               </a:rPr>
-              <a:t>實際的 WIP 清單（第 10~13 頁用模擬資料）</a:t>
+              <a:t>實際 Kit 套數（第 14 頁為假設值）</a:t>
             </a:r>
             <a:endParaRPr lang="en-US" sz="1200" dirty="0"/>
           </a:p>
@@ -7210,7 +7901,7 @@
                 <a:ea typeface="Calibri" pitchFamily="34" charset="-122"/>
                 <a:cs typeface="Calibri" pitchFamily="34" charset="-120"/>
               </a:rPr>
-              <a:t>每台機實際日完成批數（核對稼動率 46.7%）</a:t>
+              <a:t>實際 WIP 清單（第 10~14 頁為模擬資料）</a:t>
             </a:r>
             <a:endParaRPr lang="en-US" sz="1200" dirty="0"/>
           </a:p>
@@ -7234,7 +7925,7 @@
                 <a:ea typeface="Calibri" pitchFamily="34" charset="-122"/>
                 <a:cs typeface="Calibri" pitchFamily="34" charset="-120"/>
               </a:rPr>
-              <a:t>逾期一批的真實違約成本（現以 20,000 代入）</a:t>
+              <a:t>每台機日完成批數（核對稼動率 46.7%）</a:t>
             </a:r>
             <a:endParaRPr lang="en-US" sz="1200" dirty="0"/>
           </a:p>
@@ -7258,7 +7949,31 @@
                 <a:ea typeface="Calibri" pitchFamily="34" charset="-122"/>
                 <a:cs typeface="Calibri" pitchFamily="34" charset="-120"/>
               </a:rPr>
-              <a:t>換程式是否一律由工程師執行——若由操作員執行，人力需求可由 10 人降至 5～6 人</a:t>
+              <a:t>逾期一批違約成本（現以 20,000 代入）</a:t>
+            </a:r>
+            <a:endParaRPr lang="en-US" sz="1200" dirty="0"/>
+          </a:p>
+          <a:p>
+            <a:pPr marL="342900" indent="-342900">
+              <a:lnSpc>
+                <a:spcPts val="1800"/>
+              </a:lnSpc>
+              <a:spcAft>
+                <a:spcPts val="400"/>
+              </a:spcAft>
+              <a:buSzPct val="100000"/>
+              <a:buChar char="•"/>
+            </a:pPr>
+            <a:r>
+              <a:rPr lang="en-US" sz="1200" dirty="0">
+                <a:solidFill>
+                  <a:srgbClr val="16213E"/>
+                </a:solidFill>
+                <a:latin typeface="Calibri" pitchFamily="34" charset="0"/>
+                <a:ea typeface="Calibri" pitchFamily="34" charset="-122"/>
+                <a:cs typeface="Calibri" pitchFamily="34" charset="-120"/>
+              </a:rPr>
+              <a:t>換程式是否由工程師執行（若否人力可降 5～6 人）</a:t>
             </a:r>
             <a:endParaRPr lang="en-US" sz="1200" dirty="0"/>
           </a:p>

--- a/docs/測試排程分析報告.pptx
+++ b/docs/測試排程分析報告.pptx
@@ -693,7 +693,7 @@
           <a:p>
             <a:r>
               <a:rPr lang="en-US" dirty="0"/>
-              <a:t>3 人時省改機的等工程師時間是 32 分，其他法則是 5,000~13,000 分；加上當機後，3 人除了省改機全部拖到 36~52 小時。</a:t>
+              <a:t>3 人時省改機的等工程師時間是 50 分、加權綜合 254 分，其他法則是 9,000~11,000 分；加上當機後（10 次平均），3 人除了省改機 14.5 h 與加權綜合 18.8 h，全部拖到 44~50 小時。加權綜合在 3／5／10 人下都是 10.2~10.3 h，是三種人力裡最穩的一個。</a:t>
             </a:r>
             <a:endParaRPr lang="en-US" dirty="0"/>
           </a:p>
@@ -869,7 +869,7 @@
           <a:p>
             <a:r>
               <a:rPr lang="en-US" dirty="0"/>
-              <a:t>門檻的實際分界在 31.7% 與 35.8% 之間；靠近門檻時兩種法則差距小，選錯的代價不大。</a:t>
+              <a:t>門檻的實際分界在 26.7% 與 28.2% 之間。配對派工把改機的浪費壓低了（同一組情境的改機占比從 35% 掉到 28%），所以門檻跟著下修；兩側離門檻越遠，兩種法則差距越大。</a:t>
             </a:r>
             <a:endParaRPr lang="en-US" dirty="0"/>
           </a:p>
@@ -2758,7 +2758,7 @@
                 <a:ea typeface="Calibri" pitchFamily="34" charset="-122"/>
                 <a:cs typeface="Calibri" pitchFamily="34" charset="-120"/>
               </a:rPr>
-              <a:t>最快的法則 9 小時 41 分，仍比下限多 142%</a:t>
+              <a:t>最快的法則 9 小時 18 分，仍比下限多 132%</a:t>
             </a:r>
             <a:endParaRPr lang="en-US" sz="1200" dirty="0"/>
           </a:p>
@@ -2782,7 +2782,7 @@
                 <a:ea typeface="Calibri" pitchFamily="34" charset="-122"/>
                 <a:cs typeface="Calibri" pitchFamily="34" charset="-120"/>
               </a:rPr>
-              <a:t>最快與最慢差 10 小時 20 分</a:t>
+              <a:t>最快與最慢差 9 小時 38 分</a:t>
             </a:r>
             <a:endParaRPr lang="en-US" sz="1200" dirty="0"/>
           </a:p>
@@ -2919,7 +2919,7 @@
                 <a:ea typeface="Calibri" pitchFamily="34" charset="-122"/>
                 <a:cs typeface="Calibri" pitchFamily="34" charset="-120"/>
               </a:rPr>
-              <a:t>省改機前 3 小時就做完 137 批，遙遙領先</a:t>
+              <a:t>省改機前 3 小時就做完 139 批，遙遙領先</a:t>
             </a:r>
             <a:endParaRPr lang="en-US" sz="1200" dirty="0"/>
           </a:p>
@@ -2943,7 +2943,7 @@
                 <a:ea typeface="Calibri" pitchFamily="34" charset="-122"/>
                 <a:cs typeface="Calibri" pitchFamily="34" charset="-120"/>
               </a:rPr>
-              <a:t>但 9 小時後停在 198 批，最後 2 批拖到 14.5 小時</a:t>
+              <a:t>但 9 小時後停在 198 批，最後 2 批拖到 12.4 小時</a:t>
             </a:r>
             <a:endParaRPr lang="en-US" sz="1200" dirty="0"/>
           </a:p>
@@ -2967,7 +2967,7 @@
                 <a:ea typeface="Calibri" pitchFamily="34" charset="-122"/>
                 <a:cs typeface="Calibri" pitchFamily="34" charset="-120"/>
               </a:rPr>
-              <a:t>大批給快機起步慢，10 小時整批清光</a:t>
+              <a:t>大批給快機起步慢，卻 9.3 小時最早清光</a:t>
             </a:r>
             <a:endParaRPr lang="en-US" sz="1200" dirty="0"/>
           </a:p>
@@ -2991,7 +2991,7 @@
                 <a:ea typeface="Calibri" pitchFamily="34" charset="-122"/>
                 <a:cs typeface="Calibri" pitchFamily="34" charset="-120"/>
               </a:rPr>
-              <a:t>看整批何時清空，不能只看前段衝得多快</a:t>
+              <a:t>加權綜合起步快、10.2 小時清光，兩頭兼顧</a:t>
             </a:r>
             <a:endParaRPr lang="en-US" sz="1200" dirty="0"/>
           </a:p>
@@ -3030,7 +3030,7 @@
                 <a:ea typeface="Calibri" pitchFamily="34" charset="-122"/>
                 <a:cs typeface="Calibri" pitchFamily="34" charset="-120"/>
               </a:rPr>
-              <a:t>註　情境為「純排程比較」：關閉當機與良率波動，同一批貨每次跑結果完全相同，法則之間的差異純粹來自排程順序。</a:t>
+              <a:t>註　情境為「純排程比較」：關閉當機與良率波動，同一批貨每次跑結果完全相同，法則之間的差異純粹來自排程順序。第 10～14 頁的派工採「Lot × 機台配對」：空機接一批之前先比各台的預計完工，留給更快做完的那台。</a:t>
             </a:r>
             <a:endParaRPr lang="en-US" sz="1100" dirty="0"/>
           </a:p>
@@ -3311,7 +3311,7 @@
                 <a:ea typeface="Calibri" pitchFamily="34" charset="-122"/>
                 <a:cs typeface="Calibri" pitchFamily="34" charset="-120"/>
               </a:rPr>
-              <a:t>交叉點在 5～10 人之間</a:t>
+              <a:t>交叉點在 3～5 人之間</a:t>
             </a:r>
             <a:endParaRPr lang="en-US" sz="1450" dirty="0"/>
           </a:p>
@@ -3357,7 +3357,7 @@
                 <a:ea typeface="Calibri" pitchFamily="34" charset="-122"/>
                 <a:cs typeface="Calibri" pitchFamily="34" charset="-120"/>
               </a:rPr>
-              <a:t>3 人：省改機 13.5 h 勝出，大批給快機要 18.0 h</a:t>
+              <a:t>3 人：省改機 12.4 h 勝出，大批給快機要 18.0 h</a:t>
             </a:r>
             <a:endParaRPr lang="en-US" sz="1200" dirty="0"/>
           </a:p>
@@ -3381,7 +3381,7 @@
                 <a:ea typeface="Calibri" pitchFamily="34" charset="-122"/>
                 <a:cs typeface="Calibri" pitchFamily="34" charset="-120"/>
               </a:rPr>
-              <a:t>10 人：大批給快機 9.7 h，省改機落到 14.5 h</a:t>
+              <a:t>5 人起大批給快機反超：11.1 h；10 人 9.3 h 對 12.4 h</a:t>
             </a:r>
             <a:endParaRPr lang="en-US" sz="1200" dirty="0"/>
           </a:p>
@@ -3941,7 +3941,7 @@
                 <a:ea typeface="Calibri" pitchFamily="34" charset="-122"/>
                 <a:cs typeface="Calibri" pitchFamily="34" charset="-120"/>
               </a:rPr>
-              <a:t>25 台機：大批給快機 6.4 h，省改機退到 7.9 h</a:t>
+              <a:t>25 台機：大批給快機 6.5 h，省改機退到 16.9 h</a:t>
             </a:r>
             <a:endParaRPr lang="en-US" sz="1200" dirty="0"/>
           </a:p>
@@ -4102,7 +4102,7 @@
                 <a:ea typeface="Calibri" pitchFamily="34" charset="-122"/>
                 <a:cs typeface="Calibri" pitchFamily="34" charset="-120"/>
               </a:rPr>
-              <a:t>最佳法則幾乎沒變：6.4 h → 6.6 h</a:t>
+              <a:t>最佳法則幾乎沒變：6.5 h → 6.6 h</a:t>
             </a:r>
             <a:endParaRPr lang="en-US" sz="1200" dirty="0"/>
           </a:p>
@@ -4126,7 +4126,7 @@
                 <a:ea typeface="Calibri" pitchFamily="34" charset="-122"/>
                 <a:cs typeface="Calibri" pitchFamily="34" charset="-120"/>
               </a:rPr>
-              <a:t>最差法則大幅改善：19.8 h → 12.5 h</a:t>
+              <a:t>最差法則大幅改善：16.9 h → 12.9 h</a:t>
             </a:r>
             <a:endParaRPr lang="en-US" sz="1200" dirty="0"/>
           </a:p>
@@ -4150,7 +4150,7 @@
                 <a:ea typeface="Calibri" pitchFamily="34" charset="-122"/>
                 <a:cs typeface="Calibri" pitchFamily="34" charset="-120"/>
               </a:rPr>
-              <a:t>選錯法則的代價從 13.4 h 降到 5.9 h，等工程師歸零</a:t>
+              <a:t>選錯法則的代價從 10.5 h 降到 6.3 h，等工程師歸零</a:t>
             </a:r>
             <a:endParaRPr lang="en-US" sz="1200" dirty="0"/>
           </a:p>
@@ -4331,7 +4331,7 @@
                 <a:ea typeface="Calibri" pitchFamily="34" charset="-122"/>
                 <a:cs typeface="Calibri" pitchFamily="34" charset="-120"/>
               </a:rPr>
-              <a:t>四次翻轉放在同一把尺上量：改機與等工程師合計吃掉多少機台時間，門檻落在 33% 附近</a:t>
+              <a:t>四次翻轉放在同一把尺上量：改機與等工程師合計吃掉多少機台時間，門檻落在 27% 附近</a:t>
             </a:r>
             <a:endParaRPr lang="en-US" sz="1350" dirty="0"/>
           </a:p>
@@ -4653,7 +4653,7 @@
                 <a:ea typeface="Calibri" pitchFamily="34" charset="-122"/>
                 <a:cs typeface="Calibri" pitchFamily="34" charset="-120"/>
               </a:rPr>
-              <a:t>超過 35% → 改用「省改機優先」，11 組情境全對</a:t>
+              <a:t>＞28% 省改機優先；＜27% 大批給快機，11 組全對</a:t>
             </a:r>
             <a:endParaRPr lang="en-US" sz="1200" dirty="0"/>
           </a:p>
@@ -4677,7 +4677,7 @@
                 <a:ea typeface="Calibri" pitchFamily="34" charset="-122"/>
                 <a:cs typeface="Calibri" pitchFamily="34" charset="-120"/>
               </a:rPr>
-              <a:t>低於 30% → 改用「大批給快機」；30～35% 兩者差不到 15%</a:t>
+              <a:t>25～30% 先用加權綜合（10 組裡 5 組最快、8 組前三）</a:t>
             </a:r>
             <a:endParaRPr lang="en-US" sz="1200" dirty="0"/>
           </a:p>
@@ -4716,7 +4716,7 @@
                 <a:ea typeface="Calibri" pitchFamily="34" charset="-122"/>
                 <a:cs typeface="Calibri" pitchFamily="34" charset="-120"/>
               </a:rPr>
-              <a:t>註　① 兩項要合計才準：5 台機那三組是改機吃掉 35%（等人只有 0～2%），25 台機 200 批 3 人那組反過來是等人吃掉 36%（改機只有 10%）——只看一項會判錯。② 全部以現行的「追交期」排程量測。③ 切換到省改機之後這個數字會自己掉下來（43.3% → 27.5%），那是措施生效，不是要你切回去。</a:t>
+              <a:t>註　① 兩項要合計才準：5 台機那三組是改機吃掉 28～29%（等人只有 0～1%），25 台機 200 批 3 人那組反過來是等人吃掉 32%（改機只有 10%）——只看一項會判錯。② 全部以現行的「追交期」排程量測。③ 切換到省改機之後這個數字會自己掉下來（43.3% → 27.5%），那是措施生效，不是要你切回去。</a:t>
             </a:r>
             <a:endParaRPr lang="en-US" sz="900" dirty="0"/>
           </a:p>
@@ -5043,7 +5043,7 @@
                 <a:ea typeface="Calibri" pitchFamily="34" charset="-122"/>
                 <a:cs typeface="Calibri" pitchFamily="34" charset="-120"/>
               </a:rPr>
-              <a:t>不限量：大批給快機 9.7 h 最快</a:t>
+              <a:t>不限量：大批給快機 9.3 h 最快</a:t>
             </a:r>
             <a:endParaRPr lang="en-US" sz="1200" dirty="0"/>
           </a:p>
@@ -5067,7 +5067,7 @@
                 <a:ea typeface="Calibri" pitchFamily="34" charset="-122"/>
                 <a:cs typeface="Calibri" pitchFamily="34" charset="-120"/>
               </a:rPr>
-              <a:t>沒有備品：省改機 11.1 h 反而最快</a:t>
+              <a:t>沒有備品：省改機 10.1 h 反而最快</a:t>
             </a:r>
             <a:endParaRPr lang="en-US" sz="1200" dirty="0"/>
           </a:p>
@@ -5182,7 +5182,7 @@
                 <a:ea typeface="Calibri" pitchFamily="34" charset="-122"/>
                 <a:cs typeface="Calibri" pitchFamily="34" charset="-120"/>
               </a:rPr>
-              <a:t>最怕治具不足的是「追交期」</a:t>
+              <a:t>少一套治具，多數法則多花 3～4 小時</a:t>
             </a:r>
             <a:endParaRPr lang="en-US" sz="1450" dirty="0"/>
           </a:p>
@@ -5228,7 +5228,7 @@
                 <a:ea typeface="Calibri" pitchFamily="34" charset="-122"/>
                 <a:cs typeface="Calibri" pitchFamily="34" charset="-120"/>
               </a:rPr>
-              <a:t>EDD 從 11.2 h 變 26.8 h，七種法則最慘</a:t>
+              <a:t>加權綜合 +3.9 h、FIFO +3.7 h、EDD +3.4 h</a:t>
             </a:r>
             <a:endParaRPr lang="en-US" sz="1200" dirty="0"/>
           </a:p>
@@ -5252,7 +5252,7 @@
                 <a:ea typeface="Calibri" pitchFamily="34" charset="-122"/>
                 <a:cs typeface="Calibri" pitchFamily="34" charset="-120"/>
               </a:rPr>
-              <a:t>交期排序會把同治具的批拆開互搶</a:t>
+              <a:t>等治具 325～785 分：誰先拿到治具決定誰等</a:t>
             </a:r>
             <a:endParaRPr lang="en-US" sz="1200" dirty="0"/>
           </a:p>
@@ -5276,7 +5276,7 @@
                 <a:ea typeface="Calibri" pitchFamily="34" charset="-122"/>
                 <a:cs typeface="Calibri" pitchFamily="34" charset="-120"/>
               </a:rPr>
-              <a:t>省改機反而快 3.4 h：它本來就串同治具</a:t>
+              <a:t>省改機反而快 2.3 h：它本來就串同治具</a:t>
             </a:r>
             <a:endParaRPr lang="en-US" sz="1200" dirty="0"/>
           </a:p>
@@ -5318,7 +5318,7 @@
                 <a:ea typeface="Calibri" pitchFamily="34" charset="-122"/>
                 <a:cs typeface="Calibri" pitchFamily="34" charset="-120"/>
               </a:rPr>
-              <a:t>註　① 本頁治具套數是假設值：「沒有備品」＝ 每種封裝的套數剛好等於現在裝著它的機台數，「每種只有 2 套」是壓力測試；要得到可用的結論，請填入實際套數（資料檔「配件」分頁）。② 模型規則：機台閒置、且佇列裡沒有同封裝的貨時，身上的治具可被別台拿走。③ 省改機變快不是因為治具變少——改機次數完全沒變，是稼動率從 34.8% 升到 43.3%（治具限制逼派工分散），同一組設定下 EDD 反而多花 15.6 h。</a:t>
+              <a:t>註　① 本頁治具套數是假設值：「沒有備品」＝ 每種封裝的套數剛好等於現在裝著它的機台數，「每種只有 2 套」是壓力測試；要得到可用的結論，請填入實際套數（資料檔「配件」分頁）。② 模型規則：機台閒置、且佇列裡沒有同封裝的貨時，身上的治具可被別台拿走。③ 省改機變快不是因為治具變少——是治具限制逼派工分散到已經裝著該治具的機台：換 Kit 5 次降到 2 次、稼動率 40.8% 升到 46.9%；同一組設定下其他法則多花 3～4 h。</a:t>
             </a:r>
             <a:endParaRPr lang="en-US" sz="900" dirty="0"/>
           </a:p>
@@ -6377,7 +6377,7 @@
                 <a:ea typeface="Calibri" pitchFamily="34" charset="-122"/>
                 <a:cs typeface="Calibri" pitchFamily="34" charset="-120"/>
               </a:rPr>
-              <a:t>但第 1 項有前提：省改機是「改機＋等工程師吃掉機台時間超過 35%」時的最佳解；低於 30% 就該改用「大批給快機」（見第 13 頁）。班別與機隊狀況不同，規則就該不同。</a:t>
+              <a:t>但第 1 項有前提：省改機是「改機＋等工程師吃掉機台時間超過 28%」時的最佳解；低於 27% 就該改用「大批給快機」，靠近門檻時用「加權綜合」（見第 13 頁）。班別與機隊狀況不同，規則就該不同。</a:t>
             </a:r>
             <a:endParaRPr lang="en-US" sz="1150" dirty="0"/>
           </a:p>

--- a/docs/測試排程分析報告.pptx
+++ b/docs/測試排程分析報告.pptx
@@ -1309,7 +1309,7 @@
           <a:p>
             <a:r>
               <a:rPr lang="en-US" dirty="0"/>
-              <a:t>每台機每天：測試 673 分、改機 343 分、維修 161 分、等工程師 53 分、閒置 210 分。</a:t>
+              <a:t>每台機每天：測試 627 分、改機 308 分、維修 160 分、等工程師 26 分、閒置 318 分。</a:t>
             </a:r>
             <a:endParaRPr lang="en-US" dirty="0"/>
           </a:p>
@@ -1397,7 +1397,7 @@
           <a:p>
             <a:r>
               <a:rPr lang="en-US" dirty="0"/>
-              <a:t>當機率減半呈現負值，是因為工程師被釋放後排程做了更多改機，屬於資源再分配效果。</a:t>
+              <a:t>當機率減半只多 1 萬顆：工程師被釋放後排程做了更多改機（每台改機 308→325 分），屬於資源再分配效果。</a:t>
             </a:r>
             <a:endParaRPr lang="en-US" dirty="0"/>
           </a:p>
@@ -1573,7 +1573,7 @@
           <a:p>
             <a:r>
               <a:rPr lang="en-US" dirty="0"/>
-              <a:t>省改機法則同時把逾期批數壓到 5 批，是唯一兼顧產出與交期的法則。</a:t>
+              <a:t>省改機與加權綜合都把逾期壓到 2 批上下，是僅有的兼顧產出與交期的法則；加權綜合高 1.4%，在 20 天平均裡屬同一水準，建議第一步仍用規則最簡單的省改機。</a:t>
             </a:r>
             <a:endParaRPr lang="en-US" dirty="0"/>
           </a:p>
@@ -1661,7 +1661,7 @@
           <a:p>
             <a:r>
               <a:rPr lang="en-US" dirty="0"/>
-              <a:t>每台機每天需要 504 分鐘的工程師工時（改機 343 + 維修 161），25 台合計 8.8 人的純工作量，加上排隊緩衝需 10 人。</a:t>
+              <a:t>每台機每天需要 468 分鐘的工程師工時（改機 308 + 維修 160），25 台合計 8.1 人的純工作量，加上排隊緩衝需 10 人。</a:t>
             </a:r>
             <a:endParaRPr lang="en-US" dirty="0"/>
           </a:p>
@@ -1837,7 +1837,7 @@
           <a:p>
             <a:r>
               <a:rPr lang="en-US" dirty="0"/>
-              <a:t>A→E 累積 +71.4 萬顆／日（+92.8%）。B +40.8 萬、C +20.8 萬、D +6.9 萬、E +3.0 萬。</a:t>
+              <a:t>A→E 累積 +67.9 萬顆／日（+83.2%）。B +38.1 萬、C +22.8 萬、D +3.6 萬、E +3.3 萬。</a:t>
             </a:r>
             <a:endParaRPr lang="en-US" dirty="0"/>
           </a:p>
@@ -4716,7 +4716,7 @@
                 <a:ea typeface="Calibri" pitchFamily="34" charset="-122"/>
                 <a:cs typeface="Calibri" pitchFamily="34" charset="-120"/>
               </a:rPr>
-              <a:t>註　① 兩項要合計才準：5 台機那三組是改機吃掉 28～29%（等人只有 0～1%），25 台機 200 批 3 人那組反過來是等人吃掉 32%（改機只有 10%）——只看一項會判錯。② 全部以現行的「追交期」排程量測。③ 切換到省改機之後這個數字會自己掉下來（43.3% → 27.5%），那是措施生效，不是要你切回去。</a:t>
+              <a:t>註　① 兩項要合計才準：5 台機那三組是改機吃掉 28～29%（等人只有 0～1%），25 台機 200 批 3 人那組反過來是等人吃掉 32%（改機只有 10%）——只看一項會判錯。② 全部以現行的「追交期」排程量測。③ 切換到省改機之後這個數字會自己掉下來（34.9% → 23.2%），那是措施生效，不是要你切回去。</a:t>
             </a:r>
             <a:endParaRPr lang="en-US" sz="900" dirty="0"/>
           </a:p>
@@ -5675,7 +5675,7 @@
                 <a:ea typeface="Cambria" pitchFamily="34" charset="-122"/>
                 <a:cs typeface="Cambria" pitchFamily="34" charset="-120"/>
               </a:rPr>
-              <a:t>+41 萬顆／日</a:t>
+              <a:t>+38 萬顆／日</a:t>
             </a:r>
             <a:endParaRPr lang="en-US" sz="1900" dirty="0"/>
           </a:p>
@@ -5883,7 +5883,7 @@
                 <a:ea typeface="Cambria" pitchFamily="34" charset="-122"/>
                 <a:cs typeface="Cambria" pitchFamily="34" charset="-120"/>
               </a:rPr>
-              <a:t>+21 萬顆／日</a:t>
+              <a:t>+23 萬顆／日</a:t>
             </a:r>
             <a:endParaRPr lang="en-US" sz="1900" dirty="0"/>
           </a:p>
@@ -6052,7 +6052,7 @@
                 <a:ea typeface="Calibri" pitchFamily="34" charset="-122"/>
                 <a:cs typeface="Calibri" pitchFamily="34" charset="-120"/>
               </a:rPr>
-              <a:t>8 人時有 14.4% 的機台時間在停等</a:t>
+              <a:t>8 人時有 10.9% 的機台時間在停等</a:t>
             </a:r>
             <a:endParaRPr lang="en-US" sz="1250" dirty="0"/>
           </a:p>
@@ -6091,7 +6091,7 @@
                 <a:ea typeface="Cambria" pitchFamily="34" charset="-122"/>
                 <a:cs typeface="Cambria" pitchFamily="34" charset="-120"/>
               </a:rPr>
-              <a:t>+7 萬顆／日</a:t>
+              <a:t>+4 萬顆／日</a:t>
             </a:r>
             <a:endParaRPr lang="en-US" sz="1900" dirty="0"/>
           </a:p>
@@ -6260,7 +6260,7 @@
                 <a:ea typeface="Calibri" pitchFamily="34" charset="-122"/>
                 <a:cs typeface="Calibri" pitchFamily="34" charset="-120"/>
               </a:rPr>
-              <a:t>一天 213 次，槓桿最大的工程改善</a:t>
+              <a:t>一天 192 次，槓桿最大的工程改善</a:t>
             </a:r>
             <a:endParaRPr lang="en-US" sz="1250" dirty="0"/>
           </a:p>
@@ -6338,7 +6338,7 @@
                 <a:ea typeface="Calibri" pitchFamily="34" charset="-122"/>
                 <a:cs typeface="Calibri" pitchFamily="34" charset="-120"/>
               </a:rPr>
-              <a:t>四項全做：每日良品 77 萬 → 148 萬顆（+93%），逾期批數 220 批 → 2 批以下</a:t>
+              <a:t>四項全做：每日良品 82 萬 → 149 萬顆（+83%），逾期批數 189 批 → 1 批以下</a:t>
             </a:r>
             <a:endParaRPr lang="en-US" sz="1300" dirty="0"/>
           </a:p>
@@ -7925,7 +7925,7 @@
                 <a:ea typeface="Calibri" pitchFamily="34" charset="-122"/>
                 <a:cs typeface="Calibri" pitchFamily="34" charset="-120"/>
               </a:rPr>
-              <a:t>每台機日完成批數（核對稼動率 46.7%）</a:t>
+              <a:t>每台機日完成批數（核對稼動率 43.6%）</a:t>
             </a:r>
             <a:endParaRPr lang="en-US" sz="1200" dirty="0"/>
           </a:p>
@@ -8154,7 +8154,7 @@
                 <a:ea typeface="Calibri" pitchFamily="34" charset="-122"/>
                 <a:cs typeface="Calibri" pitchFamily="34" charset="-120"/>
               </a:rPr>
-              <a:t>把典型現行做法換成建議做法，模擬顯示每日良品可以接近翻倍——而且前兩項不花錢</a:t>
+              <a:t>把典型現行做法換成建議做法，模擬顯示每日良品可以提升八成——而且前兩項不花錢</a:t>
             </a:r>
             <a:endParaRPr lang="en-US" sz="1350" dirty="0"/>
           </a:p>
@@ -8220,7 +8220,7 @@
                 <a:ea typeface="Cambria" pitchFamily="34" charset="-122"/>
                 <a:cs typeface="Cambria" pitchFamily="34" charset="-120"/>
               </a:rPr>
-              <a:t>+93%</a:t>
+              <a:t>+83%</a:t>
             </a:r>
             <a:endParaRPr lang="en-US" sz="3100" dirty="0"/>
           </a:p>
@@ -8298,7 +8298,7 @@
                 <a:ea typeface="Calibri" pitchFamily="34" charset="-122"/>
                 <a:cs typeface="Calibri" pitchFamily="34" charset="-120"/>
               </a:rPr>
-              <a:t>77 萬 → 148 萬顆／日</a:t>
+              <a:t>82 萬 → 149 萬顆／日</a:t>
             </a:r>
             <a:endParaRPr lang="en-US" sz="1050" dirty="0"/>
           </a:p>
@@ -8364,7 +8364,7 @@
                 <a:ea typeface="Cambria" pitchFamily="34" charset="-122"/>
                 <a:cs typeface="Cambria" pitchFamily="34" charset="-120"/>
               </a:rPr>
-              <a:t>220 → 2</a:t>
+              <a:t>189 → 1</a:t>
             </a:r>
             <a:endParaRPr lang="en-US" sz="3100" dirty="0"/>
           </a:p>
@@ -8508,7 +8508,7 @@
                 <a:ea typeface="Cambria" pitchFamily="34" charset="-122"/>
                 <a:cs typeface="Cambria" pitchFamily="34" charset="-120"/>
               </a:rPr>
-              <a:t>37% → 1%</a:t>
+              <a:t>34% → 0.4%</a:t>
             </a:r>
             <a:endParaRPr lang="en-US" sz="3100" dirty="0"/>
           </a:p>
@@ -8867,7 +8867,7 @@
                 <a:ea typeface="Calibri" pitchFamily="34" charset="-122"/>
                 <a:cs typeface="Calibri" pitchFamily="34" charset="-120"/>
               </a:rPr>
-              <a:t>排程法則改為「省改機優先」：+41 萬顆／日</a:t>
+              <a:t>排程法則改為「省改機優先」：+38 萬顆／日</a:t>
             </a:r>
             <a:endParaRPr lang="en-US" sz="1200" dirty="0"/>
           </a:p>
@@ -8891,7 +8891,7 @@
                 <a:ea typeface="Calibri" pitchFamily="34" charset="-122"/>
                 <a:cs typeface="Calibri" pitchFamily="34" charset="-120"/>
               </a:rPr>
-              <a:t>取消預先派工，機台做完當下才決定：+21 萬顆／日</a:t>
+              <a:t>取消預先派工，機台做完當下才決定：+23 萬顆／日</a:t>
             </a:r>
             <a:endParaRPr lang="en-US" sz="1200" dirty="0"/>
           </a:p>
@@ -8915,7 +8915,7 @@
                 <a:ea typeface="Calibri" pitchFamily="34" charset="-122"/>
                 <a:cs typeface="Calibri" pitchFamily="34" charset="-120"/>
               </a:rPr>
-              <a:t>兩項合計 +62 萬顆／日（+80%），逾期批數 220 → 20</a:t>
+              <a:t>兩項合計 +61 萬顆／日（+75%），逾期批數 189 → 11</a:t>
             </a:r>
             <a:endParaRPr lang="en-US" sz="1200" dirty="0"/>
           </a:p>
@@ -9052,7 +9052,7 @@
                 <a:ea typeface="Calibri" pitchFamily="34" charset="-122"/>
                 <a:cs typeface="Calibri" pitchFamily="34" charset="-120"/>
               </a:rPr>
-              <a:t>工程師由 8 人補至 10 人：+7 萬顆／日</a:t>
+              <a:t>工程師由 8 人補至 10 人：+4 萬顆／日</a:t>
             </a:r>
             <a:endParaRPr lang="en-US" sz="1200" dirty="0"/>
           </a:p>
@@ -9100,7 +9100,7 @@
                 <a:ea typeface="Calibri" pitchFamily="34" charset="-122"/>
                 <a:cs typeface="Calibri" pitchFamily="34" charset="-120"/>
               </a:rPr>
-              <a:t>兩項合計 +10 萬顆／日，並把逾期壓到 2 批以下</a:t>
+              <a:t>兩項合計 +7 萬顆／日，並把逾期壓到 1 批以下</a:t>
             </a:r>
             <a:endParaRPr lang="en-US" sz="1200" dirty="0"/>
           </a:p>
@@ -9178,7 +9178,7 @@
                 <a:ea typeface="Calibri" pitchFamily="34" charset="-122"/>
                 <a:cs typeface="Calibri" pitchFamily="34" charset="-120"/>
               </a:rPr>
-              <a:t>每組情境皆為 20 個獨立模擬日的平均；情境之間僅改變指定變數，其餘參數完全相同。</a:t>
+              <a:t>每組情境皆為 20 個獨立模擬日的平均；情境之間僅改變指定變數，其餘參數完全相同。全報告的派工採「Lot × 機台配對」（空機接一批之前先比各台的預計完工）。</a:t>
             </a:r>
             <a:endParaRPr lang="en-US" sz="1150" dirty="0"/>
           </a:p>
@@ -9320,7 +9320,7 @@
                 <a:ea typeface="Calibri" pitchFamily="34" charset="-122"/>
                 <a:cs typeface="Calibri" pitchFamily="34" charset="-120"/>
               </a:rPr>
-              <a:t>模型不是假設出來的：用現場三項實測值反推參數，三項同時對上才開始分析。右圖是校準後的基準情境</a:t>
+              <a:t>模型不是假設出來的：先用現場三項實測值反推參數再分析；改用配對派工後換 Kit 略少於實測（見註）。右圖是基準情境</a:t>
             </a:r>
             <a:endParaRPr lang="en-US" sz="1350" dirty="0"/>
           </a:p>
@@ -9776,7 +9776,7 @@
                           <a:ea typeface="Calibri" pitchFamily="34" charset="-122"/>
                           <a:cs typeface="Calibri" pitchFamily="34" charset="-120"/>
                         </a:rPr>
-                        <a:t>39～44 次</a:t>
+                        <a:t>35～39 次</a:t>
                       </a:r>
                       <a:endParaRPr lang="en-US" sz="1200" dirty="0">
                         <a:latin typeface="Calibri" charset="0"/>
@@ -9841,7 +9841,7 @@
                           <a:ea typeface="Calibri" pitchFamily="34" charset="-122"/>
                           <a:cs typeface="Calibri" pitchFamily="34" charset="-120"/>
                         </a:rPr>
-                        <a:t>一致</a:t>
+                        <a:t>略低</a:t>
                       </a:r>
                       <a:endParaRPr lang="en-US" sz="1200" dirty="0">
                         <a:latin typeface="Calibri" charset="0"/>
@@ -10038,7 +10038,7 @@
                           <a:ea typeface="Calibri" pitchFamily="34" charset="-122"/>
                           <a:cs typeface="Calibri" pitchFamily="34" charset="-120"/>
                         </a:rPr>
-                        <a:t>1.47 倍</a:t>
+                        <a:t>1.6～1.8 倍</a:t>
                       </a:r>
                       <a:endParaRPr lang="en-US" sz="1200" dirty="0">
                         <a:latin typeface="Calibri" charset="0"/>
@@ -10103,7 +10103,7 @@
                           <a:ea typeface="Calibri" pitchFamily="34" charset="-122"/>
                           <a:cs typeface="Calibri" pitchFamily="34" charset="-120"/>
                         </a:rPr>
-                        <a:t>一致</a:t>
+                        <a:t>略高</a:t>
                       </a:r>
                       <a:endParaRPr lang="en-US" sz="1200" dirty="0">
                         <a:latin typeface="Calibri" charset="0"/>
@@ -10782,7 +10782,7 @@
                 <a:ea typeface="Calibri" pitchFamily="34" charset="-122"/>
                 <a:cs typeface="Calibri" pitchFamily="34" charset="-120"/>
               </a:rPr>
-              <a:t>真正在測試的時間只有 46.7%</a:t>
+              <a:t>真正在測試的時間只有 43.6%</a:t>
             </a:r>
             <a:endParaRPr lang="en-US" sz="1200" dirty="0"/>
           </a:p>
@@ -10806,7 +10806,7 @@
                 <a:ea typeface="Calibri" pitchFamily="34" charset="-122"/>
                 <a:cs typeface="Calibri" pitchFamily="34" charset="-120"/>
               </a:rPr>
-              <a:t>改機 + 維修 + 等工程師 = 38.7%</a:t>
+              <a:t>改機 + 維修 + 等工程師 = 34.3%</a:t>
             </a:r>
             <a:endParaRPr lang="en-US" sz="1200" dirty="0"/>
           </a:p>
@@ -10869,7 +10869,7 @@
                 <a:ea typeface="Calibri" pitchFamily="34" charset="-122"/>
                 <a:cs typeface="Calibri" pitchFamily="34" charset="-120"/>
               </a:rPr>
-              <a:t>右圖是基準情境（已採用省改機＋即時派工＋10 人）；現場典型做法的稼動只有 29.2%，見第 9 頁的起點 A。</a:t>
+              <a:t>右圖是基準情境（已採用省改機＋即時派工＋10 人）；現場典型做法的稼動只有 30.5%，見第 9 頁的起點 A。</a:t>
             </a:r>
             <a:endParaRPr lang="en-US" sz="1000" dirty="0"/>
           </a:p>
@@ -10883,8 +10883,8 @@
         </p:nvSpPr>
         <p:spPr>
           <a:xfrm>
-            <a:off x="566928" y="5650992"/>
-            <a:ext cx="6675120" cy="365760"/>
+            <a:off x="566928" y="5614416"/>
+            <a:ext cx="6675120" cy="566928"/>
           </a:xfrm>
           <a:prstGeom prst="rect">
             <a:avLst/>
@@ -10897,10 +10897,13 @@
           <a:lstStyle/>
           <a:p>
             <a:pPr indent="0" marL="0">
+              <a:lnSpc>
+                <a:spcPts val="1300"/>
+              </a:lnSpc>
               <a:buNone/>
             </a:pPr>
             <a:r>
-              <a:rPr lang="en-US" sz="1100" dirty="0">
+              <a:rPr lang="en-US" sz="1000" dirty="0">
                 <a:solidFill>
                   <a:srgbClr val="5A6785"/>
                 </a:solidFill>
@@ -10908,9 +10911,9 @@
                 <a:ea typeface="Calibri" pitchFamily="34" charset="-122"/>
                 <a:cs typeface="Calibri" pitchFamily="34" charset="-120"/>
               </a:rPr>
-              <a:t>註　時間結構為 25 台機 × 1440 分鐘的合計分配，取 20 個模擬日平均。</a:t>
-            </a:r>
-            <a:endParaRPr lang="en-US" sz="1100" dirty="0"/>
+              <a:t>註　校準在原派工下完成（當時換 Kit 39～44 次、1.47 倍，三項一致）；改為配對派工後本來就少換 Kit——現行做法情境 39 次、建議做法 35 次，參數未重新校準。時間結構為 25 台機 × 1440 分鐘的合計分配，取 20 個模擬日平均。</a:t>
+            </a:r>
+            <a:endParaRPr lang="en-US" sz="1000" dirty="0"/>
           </a:p>
         </p:txBody>
       </p:sp>
@@ -11211,7 +11214,7 @@
                 <a:ea typeface="Calibri" pitchFamily="34" charset="-122"/>
                 <a:cs typeface="Calibri" pitchFamily="34" charset="-120"/>
               </a:rPr>
-              <a:t>前三項是「排程決策」——不必花錢，改做法即可；後三項是「工程改善」——需要投資或人力</a:t>
+              <a:t>最大的兩項是人力與排程法則；專用化與派工時機各約 10 萬，這三項排程／配置決策都不花錢；工程改善（換程式、當機率）各不到 4 萬</a:t>
             </a:r>
             <a:endParaRPr lang="en-US" sz="1200" dirty="0"/>
           </a:p>
@@ -11314,7 +11317,7 @@
                 <a:ea typeface="Cambria" pitchFamily="34" charset="-122"/>
                 <a:cs typeface="Cambria" pitchFamily="34" charset="-120"/>
               </a:rPr>
-              <a:t>因素一：派工時機（最大的免費槓桿）</a:t>
+              <a:t>因素一：派工時機（不花錢的槓桿）</a:t>
             </a:r>
             <a:endParaRPr lang="en-US" sz="3000" dirty="0"/>
           </a:p>
@@ -11562,7 +11565,7 @@
                 <a:ea typeface="Calibri" pitchFamily="34" charset="-122"/>
                 <a:cs typeface="Calibri" pitchFamily="34" charset="-120"/>
               </a:rPr>
-              <a:t>押 3 批 vs 做完才派：每日良品少 27.7 萬顆（−19%），逾期批數由 5 批暴增到 106 批</a:t>
+              <a:t>押 1 批 vs 做完才派：每日良品少 10.1 萬顆（−7%），逾期由 2.4 批升到 22 批；押 2～3 批不再更糟——當機機台的待接批現在會退回重派</a:t>
             </a:r>
             <a:endParaRPr lang="en-US" sz="1200" dirty="0"/>
           </a:p>
@@ -11819,7 +11822,7 @@
                 <a:ea typeface="Calibri" pitchFamily="34" charset="-122"/>
                 <a:cs typeface="Calibri" pitchFamily="34" charset="-120"/>
               </a:rPr>
-              <a:t>為什麼「省改機」贏</a:t>
+              <a:t>為什麼「省改機」類贏</a:t>
             </a:r>
             <a:endParaRPr lang="en-US" sz="1450" dirty="0"/>
           </a:p>
@@ -11913,7 +11916,7 @@
                 <a:ea typeface="Calibri" pitchFamily="34" charset="-122"/>
                 <a:cs typeface="Calibri" pitchFamily="34" charset="-120"/>
               </a:rPr>
-              <a:t>換 Kit 39 次 vs 最差法則 64 次</a:t>
+              <a:t>換 Kit 35 次 vs 最差法則 60 次</a:t>
             </a:r>
             <a:endParaRPr lang="en-US" sz="1200" dirty="0"/>
           </a:p>
@@ -12050,7 +12053,7 @@
                 <a:ea typeface="Calibri" pitchFamily="34" charset="-122"/>
                 <a:cs typeface="Calibri" pitchFamily="34" charset="-120"/>
               </a:rPr>
-              <a:t>省改機法則的逾期批數也是最低（5 批／日）</a:t>
+              <a:t>省改機逾期 2.4 批／日、加權綜合 1.8 批</a:t>
             </a:r>
             <a:endParaRPr lang="en-US" sz="1200" dirty="0"/>
           </a:p>
@@ -12074,7 +12077,7 @@
                 <a:ea typeface="Calibri" pitchFamily="34" charset="-122"/>
                 <a:cs typeface="Calibri" pitchFamily="34" charset="-120"/>
               </a:rPr>
-              <a:t>是唯一不必在衝產出與保交期之間取捨的法則</a:t>
+              <a:t>加權綜合（省改機佔 20 分）再多 1.4%</a:t>
             </a:r>
             <a:endParaRPr lang="en-US" sz="1200" dirty="0"/>
           </a:p>
@@ -12098,7 +12101,7 @@
                 <a:ea typeface="Calibri" pitchFamily="34" charset="-122"/>
                 <a:cs typeface="Calibri" pitchFamily="34" charset="-120"/>
               </a:rPr>
-              <a:t>其餘法則都得在兩者之間取捨</a:t>
+              <a:t>其餘五種都得在產出與交期間取捨</a:t>
             </a:r>
             <a:endParaRPr lang="en-US" sz="1200" dirty="0"/>
           </a:p>
@@ -12274,7 +12277,7 @@
                 <a:ea typeface="Calibri" pitchFamily="34" charset="-122"/>
                 <a:cs typeface="Calibri" pitchFamily="34" charset="-120"/>
               </a:rPr>
-              <a:t>註　最佳與最差差距 50.2 萬顆／日（+52%）；七種法則皆在相同的 20 個模擬日上比較。</a:t>
+              <a:t>註　最佳與最差差距 33.2 萬顆／日（+29%）；七種法則皆在相同的 20 個模擬日上比較。</a:t>
             </a:r>
             <a:endParaRPr lang="en-US" sz="1100" dirty="0"/>
           </a:p>
@@ -12601,7 +12604,7 @@
                 <a:ea typeface="Calibri" pitchFamily="34" charset="-122"/>
                 <a:cs typeface="Calibri" pitchFamily="34" charset="-120"/>
               </a:rPr>
-              <a:t>10 人是拐點，再加人只多 0.1%</a:t>
+              <a:t>10 人是拐點，再加人只多 0.5%</a:t>
             </a:r>
             <a:endParaRPr lang="en-US" sz="1200" dirty="0"/>
           </a:p>
@@ -12625,7 +12628,7 @@
                 <a:ea typeface="Calibri" pitchFamily="34" charset="-122"/>
                 <a:cs typeface="Calibri" pitchFamily="34" charset="-120"/>
               </a:rPr>
-              <a:t>降到 8 人：停等 14.4%、逾期由 5 批升到 20 批</a:t>
+              <a:t>降到 8 人：停等 10.9%、逾期由 2.4 批升到 11 批</a:t>
             </a:r>
             <a:endParaRPr lang="en-US" sz="1200" dirty="0"/>
           </a:p>
@@ -12762,7 +12765,7 @@
                 <a:ea typeface="Calibri" pitchFamily="34" charset="-122"/>
                 <a:cs typeface="Calibri" pitchFamily="34" charset="-120"/>
               </a:rPr>
-              <a:t>1:4 以內產能幾乎不損失；1:6 直接掉一半</a:t>
+              <a:t>1:4 以內最多損失 12%；1:6 起 25～50 台直接掉一半</a:t>
             </a:r>
             <a:endParaRPr lang="en-US" sz="1200" dirty="0"/>
           </a:p>
@@ -13152,7 +13155,7 @@
                 <a:ea typeface="Calibri" pitchFamily="34" charset="-122"/>
                 <a:cs typeface="Calibri" pitchFamily="34" charset="-120"/>
               </a:rPr>
-              <a:t>5 台彈性機扛下所有換 Kit，現況 39 次／日</a:t>
+              <a:t>5 台彈性機扛下所有換 Kit，現況 35 次／日</a:t>
             </a:r>
             <a:endParaRPr lang="en-US" sz="1200" dirty="0"/>
           </a:p>
@@ -13176,7 +13179,7 @@
                 <a:ea typeface="Calibri" pitchFamily="34" charset="-122"/>
                 <a:cs typeface="Calibri" pitchFamily="34" charset="-120"/>
               </a:rPr>
-              <a:t>完全專用再省 70 分／台／日，但急單無處插隊</a:t>
+              <a:t>完全專用再省 77 分／台／日，但急單無處插隊</a:t>
             </a:r>
             <a:endParaRPr lang="en-US" sz="1200" dirty="0"/>
           </a:p>
@@ -13337,7 +13340,7 @@
                 <a:ea typeface="Calibri" pitchFamily="34" charset="-122"/>
                 <a:cs typeface="Calibri" pitchFamily="34" charset="-120"/>
               </a:rPr>
-              <a:t>換程式 213 次／日 vs 換 Kit 39 次／日</a:t>
+              <a:t>換程式 192 次／日 vs 換 Kit 35 次／日</a:t>
             </a:r>
             <a:endParaRPr lang="en-US" sz="1200" dirty="0"/>
           </a:p>
@@ -13361,7 +13364,7 @@
                 <a:ea typeface="Calibri" pitchFamily="34" charset="-122"/>
                 <a:cs typeface="Calibri" pitchFamily="34" charset="-120"/>
               </a:rPr>
-              <a:t>30→15 分是唯一同時改善產出、工時與交期的措施</a:t>
+              <a:t>30→15 分是單項裡效益最大、且產出／工時／交期同時改善的措施</a:t>
             </a:r>
             <a:endParaRPr lang="en-US" sz="1200" dirty="0"/>
           </a:p>
@@ -13385,7 +13388,7 @@
                 <a:ea typeface="Calibri" pitchFamily="34" charset="-122"/>
                 <a:cs typeface="Calibri" pitchFamily="34" charset="-120"/>
               </a:rPr>
-              <a:t>換 Kit 60→30 分反使逾期由 5 升到 12.6 批</a:t>
+              <a:t>換 Kit 60→30 分反使逾期由 2.4 升到 8.3 批</a:t>
             </a:r>
             <a:endParaRPr lang="en-US" sz="1200" dirty="0"/>
           </a:p>
@@ -13688,7 +13691,7 @@
                 <a:ea typeface="Calibri" pitchFamily="34" charset="-122"/>
                 <a:cs typeface="Calibri" pitchFamily="34" charset="-120"/>
               </a:rPr>
-              <a:t>起點 A：稼動 29.2%、逾期 220 批／日　→　終點 E：稼動 47.2%、逾期 1.9 批／日、等工程師 0.8%</a:t>
+              <a:t>起點 A：稼動 30.5%、逾期 189 批／日　→　終點 E：稼動 41.5%、逾期 0.9 批／日、等工程師 0.4%</a:t>
             </a:r>
             <a:endParaRPr lang="en-US" sz="1200" dirty="0"/>
           </a:p>
@@ -13712,7 +13715,7 @@
                 <a:ea typeface="Calibri" pitchFamily="34" charset="-122"/>
                 <a:cs typeface="Calibri" pitchFamily="34" charset="-120"/>
               </a:rPr>
-              <a:t>B 與 C 合計 +62 萬顆／日，占全部提升的 86%，且完全不需要增加人力或設備</a:t>
+              <a:t>B 與 C 合計 +61 萬顆／日，占全部提升的 90%，且完全不需要增加人力或設備</a:t>
             </a:r>
             <a:endParaRPr lang="en-US" sz="1200" dirty="0"/>
           </a:p>

--- a/docs/測試排程分析報告.pptx
+++ b/docs/測試排程分析報告.pptx
@@ -1309,7 +1309,7 @@
           <a:p>
             <a:r>
               <a:rPr lang="en-US" dirty="0"/>
-              <a:t>每台機每天：測試 627 分、改機 308 分、維修 160 分、等工程師 26 分、閒置 318 分。</a:t>
+              <a:t>每台機每天：測試 622 分、改機 332 分、維修 186 分、等工程師 76 分、閒置 224 分。</a:t>
             </a:r>
             <a:endParaRPr lang="en-US" dirty="0"/>
           </a:p>
@@ -1397,7 +1397,7 @@
           <a:p>
             <a:r>
               <a:rPr lang="en-US" dirty="0"/>
-              <a:t>當機率減半只多 1 萬顆：工程師被釋放後排程做了更多改機（每台改機 308→325 分），屬於資源再分配效果。</a:t>
+              <a:t>當機率減半只多 5.3 萬顆：維修工時 186→80 分，但省下的工程師有一部分被排程拿去多改機（每台改機 332→371 分），屬於資源再分配效果。</a:t>
             </a:r>
             <a:endParaRPr lang="en-US" dirty="0"/>
           </a:p>
@@ -1573,7 +1573,7 @@
           <a:p>
             <a:r>
               <a:rPr lang="en-US" dirty="0"/>
-              <a:t>省改機與加權綜合都把逾期壓到 2 批上下，是僅有的兼顧產出與交期的法則；加權綜合高 1.4%，在 20 天平均裡屬同一水準，建議第一步仍用規則最簡單的省改機。</a:t>
+              <a:t>省改機與加權綜合都把逾期壓在 4 批上下，是僅有的兼顧產出與交期的法則；省改機高 1.5%，規則也最簡單，第一步用它。</a:t>
             </a:r>
             <a:endParaRPr lang="en-US" dirty="0"/>
           </a:p>
@@ -1661,7 +1661,7 @@
           <a:p>
             <a:r>
               <a:rPr lang="en-US" dirty="0"/>
-              <a:t>每台機每天需要 468 分鐘的工程師工時（改機 308 + 維修 160），25 台合計 8.1 人的純工作量，加上排隊緩衝需 10 人。</a:t>
+              <a:t>每台機每天需要 518 分鐘的工程師工時（改機 332 + 維修 186），25 台合計 9.0 人的純工作量，加上排隊緩衝需 10 人。</a:t>
             </a:r>
             <a:endParaRPr lang="en-US" dirty="0"/>
           </a:p>
@@ -1837,7 +1837,7 @@
           <a:p>
             <a:r>
               <a:rPr lang="en-US" dirty="0"/>
-              <a:t>A→E 累積 +67.9 萬顆／日（+83.2%）。B +38.1 萬、C +22.8 萬、D +3.6 萬、E +3.3 萬。</a:t>
+              <a:t>A→E 累積 +88.0 萬顆／日（+139%）。B +49.0 萬、C +21.5 萬、D +9.2 萬、E +8.3 萬。</a:t>
             </a:r>
             <a:endParaRPr lang="en-US" dirty="0"/>
           </a:p>
@@ -4716,7 +4716,7 @@
                 <a:ea typeface="Calibri" pitchFamily="34" charset="-122"/>
                 <a:cs typeface="Calibri" pitchFamily="34" charset="-120"/>
               </a:rPr>
-              <a:t>註　① 兩項要合計才準：5 台機那三組是改機吃掉 28～29%（等人只有 0～1%），25 台機 200 批 3 人那組反過來是等人吃掉 32%（改機只有 10%）——只看一項會判錯。② 全部以現行的「追交期」排程量測。③ 切換到省改機之後這個數字會自己掉下來（34.9% → 23.2%），那是措施生效，不是要你切回去。</a:t>
+              <a:t>註　① 兩項要合計才準：5 台機那三組是改機吃掉 28～29%（等人只有 0～1%），25 台機 200 批 3 人那組反過來是等人吃掉 32%（改機只有 10%）——只看一項會判錯。② 全部以現行的「追交期」排程量測。③ 切換到省改機之後這個數字會自己掉下來（45.1% → 28.4%），那是措施生效，不是要你切回去。</a:t>
             </a:r>
             <a:endParaRPr lang="en-US" sz="900" dirty="0"/>
           </a:p>
@@ -5675,7 +5675,7 @@
                 <a:ea typeface="Cambria" pitchFamily="34" charset="-122"/>
                 <a:cs typeface="Cambria" pitchFamily="34" charset="-120"/>
               </a:rPr>
-              <a:t>+38 萬顆／日</a:t>
+              <a:t>+49 萬顆／日</a:t>
             </a:r>
             <a:endParaRPr lang="en-US" sz="1900" dirty="0"/>
           </a:p>
@@ -5883,7 +5883,7 @@
                 <a:ea typeface="Cambria" pitchFamily="34" charset="-122"/>
                 <a:cs typeface="Cambria" pitchFamily="34" charset="-120"/>
               </a:rPr>
-              <a:t>+23 萬顆／日</a:t>
+              <a:t>+21 萬顆／日</a:t>
             </a:r>
             <a:endParaRPr lang="en-US" sz="1900" dirty="0"/>
           </a:p>
@@ -6052,7 +6052,7 @@
                 <a:ea typeface="Calibri" pitchFamily="34" charset="-122"/>
                 <a:cs typeface="Calibri" pitchFamily="34" charset="-120"/>
               </a:rPr>
-              <a:t>8 人時有 10.9% 的機台時間在停等</a:t>
+              <a:t>8 人時有 16.0% 的機台時間在停等</a:t>
             </a:r>
             <a:endParaRPr lang="en-US" sz="1250" dirty="0"/>
           </a:p>
@@ -6091,7 +6091,7 @@
                 <a:ea typeface="Cambria" pitchFamily="34" charset="-122"/>
                 <a:cs typeface="Cambria" pitchFamily="34" charset="-120"/>
               </a:rPr>
-              <a:t>+4 萬顆／日</a:t>
+              <a:t>+9 萬顆／日</a:t>
             </a:r>
             <a:endParaRPr lang="en-US" sz="1900" dirty="0"/>
           </a:p>
@@ -6260,7 +6260,7 @@
                 <a:ea typeface="Calibri" pitchFamily="34" charset="-122"/>
                 <a:cs typeface="Calibri" pitchFamily="34" charset="-120"/>
               </a:rPr>
-              <a:t>一天 192 次，槓桿最大的工程改善</a:t>
+              <a:t>一天 185 次，槓桿最大的工程改善</a:t>
             </a:r>
             <a:endParaRPr lang="en-US" sz="1250" dirty="0"/>
           </a:p>
@@ -6299,7 +6299,7 @@
                 <a:ea typeface="Cambria" pitchFamily="34" charset="-122"/>
                 <a:cs typeface="Cambria" pitchFamily="34" charset="-120"/>
               </a:rPr>
-              <a:t>+3 萬顆／日</a:t>
+              <a:t>+8 萬顆／日</a:t>
             </a:r>
             <a:endParaRPr lang="en-US" sz="1900" dirty="0"/>
           </a:p>
@@ -6338,7 +6338,7 @@
                 <a:ea typeface="Calibri" pitchFamily="34" charset="-122"/>
                 <a:cs typeface="Calibri" pitchFamily="34" charset="-120"/>
               </a:rPr>
-              <a:t>四項全做：每日良品 82 萬 → 149 萬顆（+83%），逾期批數 189 批 → 1 批以下</a:t>
+              <a:t>四項全做：每日良品 63 萬 → 151 萬顆（+139%），逾期批數 236 批 → 2 批以下</a:t>
             </a:r>
             <a:endParaRPr lang="en-US" sz="1300" dirty="0"/>
           </a:p>
@@ -7925,7 +7925,7 @@
                 <a:ea typeface="Calibri" pitchFamily="34" charset="-122"/>
                 <a:cs typeface="Calibri" pitchFamily="34" charset="-120"/>
               </a:rPr>
-              <a:t>每台機日完成批數（核對稼動率 43.6%）</a:t>
+              <a:t>每台機日完成批數（核對稼動率 43.2%）</a:t>
             </a:r>
             <a:endParaRPr lang="en-US" sz="1200" dirty="0"/>
           </a:p>
@@ -8154,7 +8154,7 @@
                 <a:ea typeface="Calibri" pitchFamily="34" charset="-122"/>
                 <a:cs typeface="Calibri" pitchFamily="34" charset="-120"/>
               </a:rPr>
-              <a:t>把典型現行做法換成建議做法，模擬顯示每日良品可以提升八成——而且前兩項不花錢</a:t>
+              <a:t>把典型現行做法換成建議做法，模擬顯示每日良品可以翻倍以上——而且前兩項不花錢</a:t>
             </a:r>
             <a:endParaRPr lang="en-US" sz="1350" dirty="0"/>
           </a:p>
@@ -8220,7 +8220,7 @@
                 <a:ea typeface="Cambria" pitchFamily="34" charset="-122"/>
                 <a:cs typeface="Cambria" pitchFamily="34" charset="-120"/>
               </a:rPr>
-              <a:t>+83%</a:t>
+              <a:t>+139%</a:t>
             </a:r>
             <a:endParaRPr lang="en-US" sz="3100" dirty="0"/>
           </a:p>
@@ -8298,7 +8298,7 @@
                 <a:ea typeface="Calibri" pitchFamily="34" charset="-122"/>
                 <a:cs typeface="Calibri" pitchFamily="34" charset="-120"/>
               </a:rPr>
-              <a:t>82 萬 → 149 萬顆／日</a:t>
+              <a:t>63 萬 → 151 萬顆／日</a:t>
             </a:r>
             <a:endParaRPr lang="en-US" sz="1050" dirty="0"/>
           </a:p>
@@ -8364,7 +8364,7 @@
                 <a:ea typeface="Cambria" pitchFamily="34" charset="-122"/>
                 <a:cs typeface="Cambria" pitchFamily="34" charset="-120"/>
               </a:rPr>
-              <a:t>189 → 1</a:t>
+              <a:t>236 → 2</a:t>
             </a:r>
             <a:endParaRPr lang="en-US" sz="3100" dirty="0"/>
           </a:p>
@@ -8508,7 +8508,7 @@
                 <a:ea typeface="Cambria" pitchFamily="34" charset="-122"/>
                 <a:cs typeface="Cambria" pitchFamily="34" charset="-120"/>
               </a:rPr>
-              <a:t>34% → 0.4%</a:t>
+              <a:t>42% → 1%</a:t>
             </a:r>
             <a:endParaRPr lang="en-US" sz="3100" dirty="0"/>
           </a:p>
@@ -8867,7 +8867,7 @@
                 <a:ea typeface="Calibri" pitchFamily="34" charset="-122"/>
                 <a:cs typeface="Calibri" pitchFamily="34" charset="-120"/>
               </a:rPr>
-              <a:t>排程法則改為「省改機優先」：+38 萬顆／日</a:t>
+              <a:t>排程法則改為「省改機優先」：+49 萬顆／日</a:t>
             </a:r>
             <a:endParaRPr lang="en-US" sz="1200" dirty="0"/>
           </a:p>
@@ -8891,7 +8891,7 @@
                 <a:ea typeface="Calibri" pitchFamily="34" charset="-122"/>
                 <a:cs typeface="Calibri" pitchFamily="34" charset="-120"/>
               </a:rPr>
-              <a:t>取消預先派工，機台做完當下才決定：+23 萬顆／日</a:t>
+              <a:t>取消預先派工，機台做完當下才決定：+21 萬顆／日</a:t>
             </a:r>
             <a:endParaRPr lang="en-US" sz="1200" dirty="0"/>
           </a:p>
@@ -8915,7 +8915,7 @@
                 <a:ea typeface="Calibri" pitchFamily="34" charset="-122"/>
                 <a:cs typeface="Calibri" pitchFamily="34" charset="-120"/>
               </a:rPr>
-              <a:t>兩項合計 +61 萬顆／日（+75%），逾期批數 189 → 11</a:t>
+              <a:t>兩項合計 +70 萬顆／日（+111%），逾期批數 236 → 30</a:t>
             </a:r>
             <a:endParaRPr lang="en-US" sz="1200" dirty="0"/>
           </a:p>
@@ -9052,7 +9052,7 @@
                 <a:ea typeface="Calibri" pitchFamily="34" charset="-122"/>
                 <a:cs typeface="Calibri" pitchFamily="34" charset="-120"/>
               </a:rPr>
-              <a:t>工程師由 8 人補至 10 人：+4 萬顆／日</a:t>
+              <a:t>工程師由 8 人補至 10 人：+9 萬顆／日</a:t>
             </a:r>
             <a:endParaRPr lang="en-US" sz="1200" dirty="0"/>
           </a:p>
@@ -9076,7 +9076,7 @@
                 <a:ea typeface="Calibri" pitchFamily="34" charset="-122"/>
                 <a:cs typeface="Calibri" pitchFamily="34" charset="-120"/>
               </a:rPr>
-              <a:t>換程式時間 30→15 分：+3 萬顆／日</a:t>
+              <a:t>換程式時間 30→15 分：+8 萬顆／日</a:t>
             </a:r>
             <a:endParaRPr lang="en-US" sz="1200" dirty="0"/>
           </a:p>
@@ -9100,7 +9100,7 @@
                 <a:ea typeface="Calibri" pitchFamily="34" charset="-122"/>
                 <a:cs typeface="Calibri" pitchFamily="34" charset="-120"/>
               </a:rPr>
-              <a:t>兩項合計 +7 萬顆／日，並把逾期壓到 1 批以下</a:t>
+              <a:t>兩項合計 +17 萬顆／日，並把逾期壓到 2 批以下</a:t>
             </a:r>
             <a:endParaRPr lang="en-US" sz="1200" dirty="0"/>
           </a:p>
@@ -9320,7 +9320,7 @@
                 <a:ea typeface="Calibri" pitchFamily="34" charset="-122"/>
                 <a:cs typeface="Calibri" pitchFamily="34" charset="-120"/>
               </a:rPr>
-              <a:t>模型不是假設出來的：先用現場三項實測值反推參數再分析；改用配對派工後換 Kit 略少於實測（見註）。右圖是基準情境</a:t>
+              <a:t>模型不是假設出來的：用現場三項實測值反推參數，三項同時對上才開始分析。右圖是校準後的基準情境</a:t>
             </a:r>
             <a:endParaRPr lang="en-US" sz="1350" dirty="0"/>
           </a:p>
@@ -9776,7 +9776,7 @@
                           <a:ea typeface="Calibri" pitchFamily="34" charset="-122"/>
                           <a:cs typeface="Calibri" pitchFamily="34" charset="-120"/>
                         </a:rPr>
-                        <a:t>35～39 次</a:t>
+                        <a:t>49 次</a:t>
                       </a:r>
                       <a:endParaRPr lang="en-US" sz="1200" dirty="0">
                         <a:latin typeface="Calibri" charset="0"/>
@@ -9841,7 +9841,7 @@
                           <a:ea typeface="Calibri" pitchFamily="34" charset="-122"/>
                           <a:cs typeface="Calibri" pitchFamily="34" charset="-120"/>
                         </a:rPr>
-                        <a:t>略低</a:t>
+                        <a:t>一致</a:t>
                       </a:r>
                       <a:endParaRPr lang="en-US" sz="1200" dirty="0">
                         <a:latin typeface="Calibri" charset="0"/>
@@ -10038,7 +10038,7 @@
                           <a:ea typeface="Calibri" pitchFamily="34" charset="-122"/>
                           <a:cs typeface="Calibri" pitchFamily="34" charset="-120"/>
                         </a:rPr>
-                        <a:t>1.6～1.8 倍</a:t>
+                        <a:t>1.50 倍</a:t>
                       </a:r>
                       <a:endParaRPr lang="en-US" sz="1200" dirty="0">
                         <a:latin typeface="Calibri" charset="0"/>
@@ -10103,7 +10103,7 @@
                           <a:ea typeface="Calibri" pitchFamily="34" charset="-122"/>
                           <a:cs typeface="Calibri" pitchFamily="34" charset="-120"/>
                         </a:rPr>
-                        <a:t>略高</a:t>
+                        <a:t>一致</a:t>
                       </a:r>
                       <a:endParaRPr lang="en-US" sz="1200" dirty="0">
                         <a:latin typeface="Calibri" charset="0"/>
@@ -10621,7 +10621,7 @@
                 <a:ea typeface="Calibri" pitchFamily="34" charset="-122"/>
                 <a:cs typeface="Calibri" pitchFamily="34" charset="-120"/>
               </a:rPr>
-              <a:t>當機率 11.5%／機時、修復 10–120 分、一天 24 小時三班</a:t>
+              <a:t>當機率 13.5%／機時、修復 10–120 分、一天 24 小時三班</a:t>
             </a:r>
             <a:endParaRPr lang="en-US" sz="1200" dirty="0"/>
           </a:p>
@@ -10782,7 +10782,7 @@
                 <a:ea typeface="Calibri" pitchFamily="34" charset="-122"/>
                 <a:cs typeface="Calibri" pitchFamily="34" charset="-120"/>
               </a:rPr>
-              <a:t>真正在測試的時間只有 43.6%</a:t>
+              <a:t>真正在測試的時間只有 43.2%</a:t>
             </a:r>
             <a:endParaRPr lang="en-US" sz="1200" dirty="0"/>
           </a:p>
@@ -10806,7 +10806,7 @@
                 <a:ea typeface="Calibri" pitchFamily="34" charset="-122"/>
                 <a:cs typeface="Calibri" pitchFamily="34" charset="-120"/>
               </a:rPr>
-              <a:t>改機 + 維修 + 等工程師 = 34.3%</a:t>
+              <a:t>改機 + 維修 + 等工程師 = 41.3%</a:t>
             </a:r>
             <a:endParaRPr lang="en-US" sz="1200" dirty="0"/>
           </a:p>
@@ -10869,7 +10869,7 @@
                 <a:ea typeface="Calibri" pitchFamily="34" charset="-122"/>
                 <a:cs typeface="Calibri" pitchFamily="34" charset="-120"/>
               </a:rPr>
-              <a:t>右圖是基準情境（已採用省改機＋即時派工＋10 人）；現場典型做法的稼動只有 30.5%，見第 9 頁的起點 A。</a:t>
+              <a:t>右圖是基準情境（已採用省改機＋即時派工＋10 人）；現場典型做法的稼動只有 24.2%，見第 9 頁的起點 A。</a:t>
             </a:r>
             <a:endParaRPr lang="en-US" sz="1000" dirty="0"/>
           </a:p>
@@ -10911,7 +10911,7 @@
                 <a:ea typeface="Calibri" pitchFamily="34" charset="-122"/>
                 <a:cs typeface="Calibri" pitchFamily="34" charset="-120"/>
               </a:rPr>
-              <a:t>註　校準在原派工下完成（當時換 Kit 39～44 次、1.47 倍，三項一致）；改為配對派工後本來就少換 Kit——現行做法情境 39 次、建議做法 35 次，參數未重新校準。時間結構為 25 台機 × 1440 分鐘的合計分配，取 20 個模擬日平均。</a:t>
+              <a:t>註　校準旋鈕是「彈性機台數」與「當機率」：配對派工本來就少換 Kit，5 台彈性機只剩 35 次／日，調成 8 台彈性＋17 台專用、當機率 13.5%／機時後三項同時對上。時間結構為 25 台機 × 1440 分鐘的合計分配，取 20 個模擬日平均。</a:t>
             </a:r>
             <a:endParaRPr lang="en-US" sz="1000" dirty="0"/>
           </a:p>
@@ -11214,7 +11214,7 @@
                 <a:ea typeface="Calibri" pitchFamily="34" charset="-122"/>
                 <a:cs typeface="Calibri" pitchFamily="34" charset="-120"/>
               </a:rPr>
-              <a:t>最大的兩項是人力與排程法則；專用化與派工時機各約 10 萬，這三項排程／配置決策都不花錢；工程改善（換程式、當機率）各不到 4 萬</a:t>
+              <a:t>人力與排程法則各約 64 萬，是其他四項的 4～12 倍；派工時機、專用化、法則三項是不花錢的排程／配置決策；換程式與當機率是工程改善，各 5～8 萬</a:t>
             </a:r>
             <a:endParaRPr lang="en-US" sz="1200" dirty="0"/>
           </a:p>
@@ -11565,7 +11565,7 @@
                 <a:ea typeface="Calibri" pitchFamily="34" charset="-122"/>
                 <a:cs typeface="Calibri" pitchFamily="34" charset="-120"/>
               </a:rPr>
-              <a:t>押 1 批 vs 做完才派：每日良品少 10.1 萬顆（−7%），逾期由 2.4 批升到 22 批；押 2～3 批不再更糟——當機機台的待接批現在會退回重派</a:t>
+              <a:t>押 1 批 vs 做完才派：每日良品少 15.0 萬顆（−10%），逾期由 3.5 批升到 55 批；押 2～3 批也差不多——當機機台的待接批會退回重派，不會越押越糟</a:t>
             </a:r>
             <a:endParaRPr lang="en-US" sz="1200" dirty="0"/>
           </a:p>
@@ -11822,7 +11822,7 @@
                 <a:ea typeface="Calibri" pitchFamily="34" charset="-122"/>
                 <a:cs typeface="Calibri" pitchFamily="34" charset="-120"/>
               </a:rPr>
-              <a:t>為什麼「省改機」類贏</a:t>
+              <a:t>為什麼「省改機」贏</a:t>
             </a:r>
             <a:endParaRPr lang="en-US" sz="1450" dirty="0"/>
           </a:p>
@@ -11916,7 +11916,7 @@
                 <a:ea typeface="Calibri" pitchFamily="34" charset="-122"/>
                 <a:cs typeface="Calibri" pitchFamily="34" charset="-120"/>
               </a:rPr>
-              <a:t>換 Kit 35 次 vs 最差法則 60 次</a:t>
+              <a:t>換 Kit 49 次 vs 最差法則 75 次</a:t>
             </a:r>
             <a:endParaRPr lang="en-US" sz="1200" dirty="0"/>
           </a:p>
@@ -12053,7 +12053,7 @@
                 <a:ea typeface="Calibri" pitchFamily="34" charset="-122"/>
                 <a:cs typeface="Calibri" pitchFamily="34" charset="-120"/>
               </a:rPr>
-              <a:t>省改機逾期 2.4 批／日、加權綜合 1.8 批</a:t>
+              <a:t>省改機逾期 3.5 批／日，加權綜合 4.1 批緊追</a:t>
             </a:r>
             <a:endParaRPr lang="en-US" sz="1200" dirty="0"/>
           </a:p>
@@ -12077,7 +12077,7 @@
                 <a:ea typeface="Calibri" pitchFamily="34" charset="-122"/>
                 <a:cs typeface="Calibri" pitchFamily="34" charset="-120"/>
               </a:rPr>
-              <a:t>加權綜合（省改機佔 20 分）再多 1.4%</a:t>
+              <a:t>兩者是僅有的兼顧產出與交期的法則</a:t>
             </a:r>
             <a:endParaRPr lang="en-US" sz="1200" dirty="0"/>
           </a:p>
@@ -12101,7 +12101,7 @@
                 <a:ea typeface="Calibri" pitchFamily="34" charset="-122"/>
                 <a:cs typeface="Calibri" pitchFamily="34" charset="-120"/>
               </a:rPr>
-              <a:t>其餘五種都得在產出與交期間取捨</a:t>
+              <a:t>其餘五種逾期 43～122 批，都得取捨</a:t>
             </a:r>
             <a:endParaRPr lang="en-US" sz="1200" dirty="0"/>
           </a:p>
@@ -12277,7 +12277,7 @@
                 <a:ea typeface="Calibri" pitchFamily="34" charset="-122"/>
                 <a:cs typeface="Calibri" pitchFamily="34" charset="-120"/>
               </a:rPr>
-              <a:t>註　最佳與最差差距 33.2 萬顆／日（+29%）；七種法則皆在相同的 20 個模擬日上比較。</a:t>
+              <a:t>註　最佳與最差差距 63.6 萬顆／日（+80%）；七種法則皆在相同的 20 個模擬日上比較。</a:t>
             </a:r>
             <a:endParaRPr lang="en-US" sz="1100" dirty="0"/>
           </a:p>
@@ -12604,7 +12604,7 @@
                 <a:ea typeface="Calibri" pitchFamily="34" charset="-122"/>
                 <a:cs typeface="Calibri" pitchFamily="34" charset="-120"/>
               </a:rPr>
-              <a:t>10 人是拐點，再加人只多 0.5%</a:t>
+              <a:t>10 人是拐點，再加人只多 1.5%（13 人）～3.8%（17 人）</a:t>
             </a:r>
             <a:endParaRPr lang="en-US" sz="1200" dirty="0"/>
           </a:p>
@@ -12628,7 +12628,7 @@
                 <a:ea typeface="Calibri" pitchFamily="34" charset="-122"/>
                 <a:cs typeface="Calibri" pitchFamily="34" charset="-120"/>
               </a:rPr>
-              <a:t>降到 8 人：停等 10.9%、逾期由 2.4 批升到 11 批</a:t>
+              <a:t>降到 8 人：停等 16.0%、逾期由 3.5 批升到 30 批</a:t>
             </a:r>
             <a:endParaRPr lang="en-US" sz="1200" dirty="0"/>
           </a:p>
@@ -12765,7 +12765,7 @@
                 <a:ea typeface="Calibri" pitchFamily="34" charset="-122"/>
                 <a:cs typeface="Calibri" pitchFamily="34" charset="-120"/>
               </a:rPr>
-              <a:t>1:4 以內最多損失 12%；1:6 起 25～50 台直接掉一半</a:t>
+              <a:t>1:3 以內損失不到 4%；1:4 起 25 台掉 19%、1:6 掉六成</a:t>
             </a:r>
             <a:endParaRPr lang="en-US" sz="1200" dirty="0"/>
           </a:p>
@@ -13155,7 +13155,7 @@
                 <a:ea typeface="Calibri" pitchFamily="34" charset="-122"/>
                 <a:cs typeface="Calibri" pitchFamily="34" charset="-120"/>
               </a:rPr>
-              <a:t>5 台彈性機扛下所有換 Kit，現況 35 次／日</a:t>
+              <a:t>8 台彈性機扛下所有換 Kit，現況 49 次／日</a:t>
             </a:r>
             <a:endParaRPr lang="en-US" sz="1200" dirty="0"/>
           </a:p>
@@ -13179,7 +13179,7 @@
                 <a:ea typeface="Calibri" pitchFamily="34" charset="-122"/>
                 <a:cs typeface="Calibri" pitchFamily="34" charset="-120"/>
               </a:rPr>
-              <a:t>完全專用再省 77 分／台／日，但急單無處插隊</a:t>
+              <a:t>完全專用再省 96 分／台／日，但急單無處插隊</a:t>
             </a:r>
             <a:endParaRPr lang="en-US" sz="1200" dirty="0"/>
           </a:p>
@@ -13340,7 +13340,7 @@
                 <a:ea typeface="Calibri" pitchFamily="34" charset="-122"/>
                 <a:cs typeface="Calibri" pitchFamily="34" charset="-120"/>
               </a:rPr>
-              <a:t>換程式 192 次／日 vs 換 Kit 35 次／日</a:t>
+              <a:t>換程式 185 次／日 vs 換 Kit 49 次／日</a:t>
             </a:r>
             <a:endParaRPr lang="en-US" sz="1200" dirty="0"/>
           </a:p>
@@ -13364,7 +13364,7 @@
                 <a:ea typeface="Calibri" pitchFamily="34" charset="-122"/>
                 <a:cs typeface="Calibri" pitchFamily="34" charset="-120"/>
               </a:rPr>
-              <a:t>30→15 分是單項裡效益最大、且產出／工時／交期同時改善的措施</a:t>
+              <a:t>30→15 分是單項效益最大（+8.3 萬），產出／工時／交期同時改善</a:t>
             </a:r>
             <a:endParaRPr lang="en-US" sz="1200" dirty="0"/>
           </a:p>
@@ -13388,7 +13388,7 @@
                 <a:ea typeface="Calibri" pitchFamily="34" charset="-122"/>
                 <a:cs typeface="Calibri" pitchFamily="34" charset="-120"/>
               </a:rPr>
-              <a:t>換 Kit 60→30 分反使逾期由 2.4 升到 8.3 批</a:t>
+              <a:t>換 Kit 60→30 分反使逾期由 3.5 升到 11.4 批</a:t>
             </a:r>
             <a:endParaRPr lang="en-US" sz="1200" dirty="0"/>
           </a:p>
@@ -13691,7 +13691,7 @@
                 <a:ea typeface="Calibri" pitchFamily="34" charset="-122"/>
                 <a:cs typeface="Calibri" pitchFamily="34" charset="-120"/>
               </a:rPr>
-              <a:t>起點 A：稼動 30.5%、逾期 189 批／日　→　終點 E：稼動 41.5%、逾期 0.9 批／日、等工程師 0.4%</a:t>
+              <a:t>起點 A：稼動 24.2%、逾期 236 批／日　→　終點 E：稼動 43.3%、逾期 1.8 批／日、等工程師 1.2%</a:t>
             </a:r>
             <a:endParaRPr lang="en-US" sz="1200" dirty="0"/>
           </a:p>
@@ -13715,7 +13715,7 @@
                 <a:ea typeface="Calibri" pitchFamily="34" charset="-122"/>
                 <a:cs typeface="Calibri" pitchFamily="34" charset="-120"/>
               </a:rPr>
-              <a:t>B 與 C 合計 +61 萬顆／日，占全部提升的 90%，且完全不需要增加人力或設備</a:t>
+              <a:t>B 與 C 合計 +70 萬顆／日，占全部提升的 80%，且完全不需要增加人力或設備</a:t>
             </a:r>
             <a:endParaRPr lang="en-US" sz="1200" dirty="0"/>
           </a:p>
